--- a/Assignment/A2b/A2b_Progress_Presentation.pptx
+++ b/Assignment/A2b/A2b_Progress_Presentation.pptx
@@ -4,23 +4,23 @@
   <p:sldMasterIdLst>
     <p:sldMasterId id="2147483648" r:id="rId1"/>
   </p:sldMasterIdLst>
+  <p:notesMasterIdLst>
+    <p:notesMasterId r:id="rId12"/>
+  </p:notesMasterIdLst>
   <p:sldIdLst>
     <p:sldId id="256" r:id="rId2"/>
     <p:sldId id="257" r:id="rId3"/>
     <p:sldId id="258" r:id="rId4"/>
-    <p:sldId id="259" r:id="rId5"/>
-    <p:sldId id="260" r:id="rId6"/>
+    <p:sldId id="260" r:id="rId5"/>
+    <p:sldId id="259" r:id="rId6"/>
     <p:sldId id="261" r:id="rId7"/>
     <p:sldId id="262" r:id="rId8"/>
     <p:sldId id="263" r:id="rId9"/>
     <p:sldId id="264" r:id="rId10"/>
     <p:sldId id="265" r:id="rId11"/>
   </p:sldIdLst>
-  <p:notesMasterIdLst>
-    <p:notesMasterId r:id="rId12"/>
-  </p:notesMasterIdLst>
-  <p:sldSz cx="12191695" cy="6858000"/>
-  <p:notesSz cx="6858000" cy="12191695"/>
+  <p:sldSz cx="12192000" cy="6858000"/>
+  <p:notesSz cx="6858000" cy="12192000"/>
   <p:defaultTextStyle>
     <a:lvl1pPr marL="0" algn="l" defTabSz="914400" rtl="0" eaLnBrk="1" latinLnBrk="0" hangingPunct="1">
       <a:defRPr sz="1800" kern="1200">
@@ -113,6 +113,11 @@
       </a:defRPr>
     </a:lvl9pPr>
   </p:defaultTextStyle>
+  <p:extLst>
+    <p:ext uri="{EFAFB233-063F-42B5-8137-9DF3F51BA10A}">
+      <p15:sldGuideLst xmlns:p15="http://schemas.microsoft.com/office/powerpoint/2012/main"/>
+    </p:ext>
+  </p:extLst>
 </p:presentation>
 </file>
 
@@ -138,234 +143,10 @@
           <a:chExt cx="0" cy="0"/>
         </a:xfrm>
       </p:grpSpPr>
-      <p:sp>
-        <p:nvSpPr>
-          <p:cNvPr id="2" name="Header Placeholder 1"/>
-          <p:cNvSpPr>
-            <a:spLocks noGrp="1"/>
-          </p:cNvSpPr>
-          <p:nvPr>
-            <p:ph type="hdr" sz="quarter"/>
-          </p:nvPr>
-        </p:nvSpPr>
-        <p:spPr>
-          <a:xfrm>
-            <a:off x="0" y="0"/>
-            <a:ext cx="2971800" cy="458788"/>
-          </a:xfrm>
-          <a:prstGeom prst="rect">
-            <a:avLst/>
-          </a:prstGeom>
-        </p:spPr>
-        <p:txBody>
-          <a:bodyPr vert="horz" lIns="91440" tIns="45720" rIns="91440" bIns="45720" rtlCol="0"/>
-          <a:lstStyle>
-            <a:lvl1pPr algn="l">
-              <a:defRPr sz="1200"/>
-            </a:lvl1pPr>
-          </a:lstStyle>
-          <a:p>
-            <a:endParaRPr lang="en-US"/>
-          </a:p>
-        </p:txBody>
-      </p:sp>
-      <p:sp>
-        <p:nvSpPr>
-          <p:cNvPr id="3" name="Date Placeholder 2"/>
-          <p:cNvSpPr>
-            <a:spLocks noGrp="1"/>
-          </p:cNvSpPr>
-          <p:nvPr>
-            <p:ph type="dt" idx="1"/>
-          </p:nvPr>
-        </p:nvSpPr>
-        <p:spPr>
-          <a:xfrm>
-            <a:off x="3884613" y="0"/>
-            <a:ext cx="2971800" cy="458788"/>
-          </a:xfrm>
-          <a:prstGeom prst="rect">
-            <a:avLst/>
-          </a:prstGeom>
-        </p:spPr>
-        <p:txBody>
-          <a:bodyPr vert="horz" lIns="91440" tIns="45720" rIns="91440" bIns="45720" rtlCol="0"/>
-          <a:lstStyle>
-            <a:lvl1pPr algn="r">
-              <a:defRPr sz="1200"/>
-            </a:lvl1pPr>
-          </a:lstStyle>
-          <a:p>
-            <a:fld id="{5282F153-3F37-0F45-9E97-73ACFA13230C}" type="datetimeFigureOut">
-              <a:rPr lang="en-US"/>
-              <a:t>7/23/19</a:t>
-            </a:fld>
-            <a:endParaRPr lang="en-US"/>
-          </a:p>
-        </p:txBody>
-      </p:sp>
-      <p:sp>
-        <p:nvSpPr>
-          <p:cNvPr id="4" name="Slide Image Placeholder 3"/>
-          <p:cNvSpPr>
-            <a:spLocks noGrp="1" noRot="1" noChangeAspect="1"/>
-          </p:cNvSpPr>
-          <p:nvPr>
-            <p:ph type="sldImg" idx="2"/>
-          </p:nvPr>
-        </p:nvSpPr>
-        <p:spPr>
-          <a:xfrm>
-            <a:off x="685800" y="1143000"/>
-            <a:ext cx="5486400" cy="3086100"/>
-          </a:xfrm>
-          <a:prstGeom prst="rect">
-            <a:avLst/>
-          </a:prstGeom>
-          <a:noFill/>
-          <a:ln w="12700">
-            <a:solidFill>
-              <a:prstClr val="black"/>
-            </a:solidFill>
-          </a:ln>
-        </p:spPr>
-        <p:txBody>
-          <a:bodyPr vert="horz" lIns="91440" tIns="45720" rIns="91440" bIns="45720" rtlCol="0" anchor="ctr"/>
-          <a:lstStyle/>
-          <a:p>
-            <a:endParaRPr lang="en-US"/>
-          </a:p>
-        </p:txBody>
-      </p:sp>
-      <p:sp>
-        <p:nvSpPr>
-          <p:cNvPr id="5" name="Notes Placeholder 4"/>
-          <p:cNvSpPr>
-            <a:spLocks noGrp="1"/>
-          </p:cNvSpPr>
-          <p:nvPr>
-            <p:ph type="body" sz="quarter" idx="3"/>
-          </p:nvPr>
-        </p:nvSpPr>
-        <p:spPr>
-          <a:xfrm>
-            <a:off x="685800" y="4400550"/>
-            <a:ext cx="5486400" cy="3600450"/>
-          </a:xfrm>
-          <a:prstGeom prst="rect">
-            <a:avLst/>
-          </a:prstGeom>
-        </p:spPr>
-        <p:txBody>
-          <a:bodyPr vert="horz" lIns="91440" tIns="45720" rIns="91440" bIns="45720" rtlCol="0"/>
-          <a:lstStyle/>
-          <a:p>
-            <a:pPr lvl="0"/>
-            <a:r>
-              <a:rPr lang="en-US"/>
-              <a:t>Click to edit Master text styles</a:t>
-            </a:r>
-          </a:p>
-          <a:p>
-            <a:pPr lvl="1"/>
-            <a:r>
-              <a:rPr lang="en-US"/>
-              <a:t>Second level</a:t>
-            </a:r>
-          </a:p>
-          <a:p>
-            <a:pPr lvl="2"/>
-            <a:r>
-              <a:rPr lang="en-US"/>
-              <a:t>Third level</a:t>
-            </a:r>
-          </a:p>
-          <a:p>
-            <a:pPr lvl="3"/>
-            <a:r>
-              <a:rPr lang="en-US"/>
-              <a:t>Fourth level</a:t>
-            </a:r>
-          </a:p>
-          <a:p>
-            <a:pPr lvl="4"/>
-            <a:r>
-              <a:rPr lang="en-US"/>
-              <a:t>Fifth level</a:t>
-            </a:r>
-          </a:p>
-        </p:txBody>
-      </p:sp>
-      <p:sp>
-        <p:nvSpPr>
-          <p:cNvPr id="6" name="Footer Placeholder 5"/>
-          <p:cNvSpPr>
-            <a:spLocks noGrp="1"/>
-          </p:cNvSpPr>
-          <p:nvPr>
-            <p:ph type="ftr" sz="quarter" idx="4"/>
-          </p:nvPr>
-        </p:nvSpPr>
-        <p:spPr>
-          <a:xfrm>
-            <a:off x="0" y="8685213"/>
-            <a:ext cx="2971800" cy="458787"/>
-          </a:xfrm>
-          <a:prstGeom prst="rect">
-            <a:avLst/>
-          </a:prstGeom>
-        </p:spPr>
-        <p:txBody>
-          <a:bodyPr vert="horz" lIns="91440" tIns="45720" rIns="91440" bIns="45720" rtlCol="0" anchor="b"/>
-          <a:lstStyle>
-            <a:lvl1pPr algn="l">
-              <a:defRPr sz="1200"/>
-            </a:lvl1pPr>
-          </a:lstStyle>
-          <a:p>
-            <a:endParaRPr lang="en-US"/>
-          </a:p>
-        </p:txBody>
-      </p:sp>
-      <p:sp>
-        <p:nvSpPr>
-          <p:cNvPr id="7" name="Slide Number Placeholder 6"/>
-          <p:cNvSpPr>
-            <a:spLocks noGrp="1"/>
-          </p:cNvSpPr>
-          <p:nvPr>
-            <p:ph type="sldNum" sz="quarter" idx="5"/>
-          </p:nvPr>
-        </p:nvSpPr>
-        <p:spPr>
-          <a:xfrm>
-            <a:off x="3884613" y="8685213"/>
-            <a:ext cx="2971800" cy="458787"/>
-          </a:xfrm>
-          <a:prstGeom prst="rect">
-            <a:avLst/>
-          </a:prstGeom>
-        </p:spPr>
-        <p:txBody>
-          <a:bodyPr vert="horz" lIns="91440" tIns="45720" rIns="91440" bIns="45720" rtlCol="0" anchor="b"/>
-          <a:lstStyle>
-            <a:lvl1pPr algn="r">
-              <a:defRPr sz="1200"/>
-            </a:lvl1pPr>
-          </a:lstStyle>
-          <a:p>
-            <a:fld id="{CE5E9CC1-C706-0F49-92D6-E571CC5EEA8F}" type="slidenum">
-              <a:rPr lang="en-US"/>
-              <a:t>‹#›</a:t>
-            </a:fld>
-            <a:endParaRPr lang="en-US"/>
-          </a:p>
-        </p:txBody>
-      </p:sp>
     </p:spTree>
     <p:extLst>
       <p:ext uri="{BB962C8B-B14F-4D97-AF65-F5344CB8AC3E}">
-        <p14:creationId xmlns:p14="http://schemas.microsoft.com/office/powerpoint/2010/main" val="1024086991"/>
+        <p14:creationId xmlns:p14="http://schemas.microsoft.com/office/powerpoint/2010/main" val="1721726772"/>
       </p:ext>
     </p:extLst>
   </p:cSld>
@@ -509,10 +290,6 @@
           <a:bodyPr/>
           <a:lstStyle/>
           <a:p>
-            <a:r>
-              <a:rPr lang="en-US" dirty="0"/>
-              <a:t/>
-            </a:r>
             <a:endParaRPr lang="en-US" dirty="0"/>
           </a:p>
         </p:txBody>
@@ -597,10 +374,6 @@
           <a:bodyPr/>
           <a:lstStyle/>
           <a:p>
-            <a:r>
-              <a:rPr lang="en-US" dirty="0"/>
-              <a:t/>
-            </a:r>
             <a:endParaRPr lang="en-US" dirty="0"/>
           </a:p>
         </p:txBody>
@@ -685,10 +458,6 @@
           <a:bodyPr/>
           <a:lstStyle/>
           <a:p>
-            <a:r>
-              <a:rPr lang="en-US" dirty="0"/>
-              <a:t/>
-            </a:r>
             <a:endParaRPr lang="en-US" dirty="0"/>
           </a:p>
         </p:txBody>
@@ -773,10 +542,6 @@
           <a:bodyPr/>
           <a:lstStyle/>
           <a:p>
-            <a:r>
-              <a:rPr lang="en-US" dirty="0"/>
-              <a:t/>
-            </a:r>
             <a:endParaRPr lang="en-US" dirty="0"/>
           </a:p>
         </p:txBody>
@@ -861,10 +626,6 @@
           <a:bodyPr/>
           <a:lstStyle/>
           <a:p>
-            <a:r>
-              <a:rPr lang="en-US" dirty="0"/>
-              <a:t/>
-            </a:r>
             <a:endParaRPr lang="en-US" dirty="0"/>
           </a:p>
         </p:txBody>
@@ -949,10 +710,6 @@
           <a:bodyPr/>
           <a:lstStyle/>
           <a:p>
-            <a:r>
-              <a:rPr lang="en-US" dirty="0"/>
-              <a:t/>
-            </a:r>
             <a:endParaRPr lang="en-US" dirty="0"/>
           </a:p>
         </p:txBody>
@@ -1037,10 +794,6 @@
           <a:bodyPr/>
           <a:lstStyle/>
           <a:p>
-            <a:r>
-              <a:rPr lang="en-US" dirty="0"/>
-              <a:t/>
-            </a:r>
             <a:endParaRPr lang="en-US" dirty="0"/>
           </a:p>
         </p:txBody>
@@ -1125,10 +878,6 @@
           <a:bodyPr/>
           <a:lstStyle/>
           <a:p>
-            <a:r>
-              <a:rPr lang="en-US" dirty="0"/>
-              <a:t/>
-            </a:r>
             <a:endParaRPr lang="en-US" dirty="0"/>
           </a:p>
         </p:txBody>
@@ -1213,10 +962,6 @@
           <a:bodyPr/>
           <a:lstStyle/>
           <a:p>
-            <a:r>
-              <a:rPr lang="en-US" dirty="0"/>
-              <a:t/>
-            </a:r>
             <a:endParaRPr lang="en-US" dirty="0"/>
           </a:p>
         </p:txBody>
@@ -1301,10 +1046,6 @@
           <a:bodyPr/>
           <a:lstStyle/>
           <a:p>
-            <a:r>
-              <a:rPr lang="en-US" dirty="0"/>
-              <a:t/>
-            </a:r>
             <a:endParaRPr lang="en-US" dirty="0"/>
           </a:p>
         </p:txBody>
@@ -1378,6 +1119,11 @@
 <file path=ppt/slideMasters/slideMaster1.xml><?xml version="1.0" encoding="utf-8"?>
 <p:sldMaster xmlns:a="http://schemas.openxmlformats.org/drawingml/2006/main" xmlns:r="http://schemas.openxmlformats.org/officeDocument/2006/relationships" xmlns:p="http://schemas.openxmlformats.org/presentationml/2006/main">
   <p:cSld>
+    <p:bg>
+      <p:bgRef idx="1001">
+        <a:schemeClr val="bg1"/>
+      </p:bgRef>
+    </p:bg>
     <p:spTree>
       <p:nvGrpSpPr>
         <p:cNvPr id="1" name=""/>
@@ -1660,6 +1406,7 @@
         <a:solidFill>
           <a:srgbClr val="1C2541"/>
         </a:solidFill>
+        <a:effectLst/>
       </p:bgPr>
     </p:bg>
     <p:spTree>
@@ -1697,6 +1444,13 @@
           </a:solidFill>
           <a:ln/>
         </p:spPr>
+        <p:txBody>
+          <a:bodyPr/>
+          <a:lstStyle/>
+          <a:p>
+            <a:endParaRPr lang="zh-CN" altLang="en-US"/>
+          </a:p>
+        </p:txBody>
       </p:sp>
       <p:sp>
         <p:nvSpPr>
@@ -1719,6 +1473,13 @@
           </a:solidFill>
           <a:ln/>
         </p:spPr>
+        <p:txBody>
+          <a:bodyPr/>
+          <a:lstStyle/>
+          <a:p>
+            <a:endParaRPr lang="zh-CN" altLang="en-US"/>
+          </a:p>
+        </p:txBody>
       </p:sp>
       <p:sp>
         <p:nvSpPr>
@@ -1741,6 +1502,13 @@
           </a:solidFill>
           <a:ln/>
         </p:spPr>
+        <p:txBody>
+          <a:bodyPr/>
+          <a:lstStyle/>
+          <a:p>
+            <a:endParaRPr lang="zh-CN" altLang="en-US"/>
+          </a:p>
+        </p:txBody>
       </p:sp>
       <p:sp>
         <p:nvSpPr>
@@ -1763,20 +1531,9 @@
           <a:bodyPr wrap="square" rtlCol="0" anchor="ctr"/>
           <a:lstStyle/>
           <a:p>
-            <a:pPr indent="0" marL="0">
-              <a:buNone/>
-            </a:pPr>
-            <a:r>
-              <a:rPr lang="en-US" sz="1400" b="1" spc="300" kern="0" dirty="0">
-                <a:solidFill>
-                  <a:srgbClr val="D9782D"/>
-                </a:solidFill>
-                <a:latin typeface="Calibri" pitchFamily="34" charset="0"/>
-                <a:ea typeface="Calibri" pitchFamily="34" charset="-122"/>
-                <a:cs typeface="Calibri" pitchFamily="34" charset="-120"/>
-              </a:rPr>
-              <a:t>IN THE MEANTIME</a:t>
-            </a:r>
+            <a:pPr marL="0" indent="0">
+              <a:buNone/>
+            </a:pPr>
             <a:endParaRPr lang="en-US" sz="1400" dirty="0"/>
           </a:p>
         </p:txBody>
@@ -1789,7 +1546,7 @@
         </p:nvSpPr>
         <p:spPr>
           <a:xfrm>
-            <a:off x="594360" y="1783080"/>
+            <a:off x="548640" y="1188720"/>
             <a:ext cx="8961120" cy="1188720"/>
           </a:xfrm>
           <a:prstGeom prst="rect">
@@ -1802,7 +1559,7 @@
           <a:bodyPr wrap="square" rtlCol="0" anchor="ctr"/>
           <a:lstStyle/>
           <a:p>
-            <a:pPr indent="0" marL="0">
+            <a:pPr marL="0" indent="0">
               <a:buNone/>
             </a:pPr>
             <a:r>
@@ -1828,7 +1585,7 @@
         </p:nvSpPr>
         <p:spPr>
           <a:xfrm>
-            <a:off x="640080" y="2788920"/>
+            <a:off x="640080" y="2164580"/>
             <a:ext cx="8229600" cy="502920"/>
           </a:xfrm>
           <a:prstGeom prst="rect">
@@ -1841,11 +1598,11 @@
           <a:bodyPr wrap="square" rtlCol="0" anchor="ctr"/>
           <a:lstStyle/>
           <a:p>
-            <a:pPr indent="0" marL="0">
-              <a:buNone/>
-            </a:pPr>
-            <a:r>
-              <a:rPr lang="en-US" sz="1900" dirty="0">
+            <a:pPr marL="0" indent="0">
+              <a:buNone/>
+            </a:pPr>
+            <a:r>
+              <a:rPr lang="en-US" sz="2000" dirty="0">
                 <a:solidFill>
                   <a:srgbClr val="CFE0E8"/>
                 </a:solidFill>
@@ -1855,31 +1612,9 @@
               </a:rPr>
               <a:t>Shared facilities in Sydney apartment housing</a:t>
             </a:r>
-            <a:endParaRPr lang="en-US" sz="1900" dirty="0"/>
-          </a:p>
-        </p:txBody>
-      </p:sp>
-      <p:sp>
-        <p:nvSpPr>
-          <p:cNvPr id="8" name="Shape 6"/>
-          <p:cNvSpPr/>
-          <p:nvPr/>
-        </p:nvSpPr>
-        <p:spPr>
-          <a:xfrm>
-            <a:off x="640080" y="3749040"/>
-            <a:ext cx="7863840" cy="1051560"/>
-          </a:xfrm>
-          <a:prstGeom prst="roundRect">
-            <a:avLst>
-              <a:gd name="adj" fmla="val 6957"/>
-            </a:avLst>
-          </a:prstGeom>
-          <a:solidFill>
-            <a:srgbClr val="141A30"/>
-          </a:solidFill>
-          <a:ln/>
-        </p:spPr>
+            <a:endParaRPr lang="en-US" sz="2000" dirty="0"/>
+          </a:p>
+        </p:txBody>
       </p:sp>
       <p:sp>
         <p:nvSpPr>
@@ -1889,7 +1624,7 @@
         </p:nvSpPr>
         <p:spPr>
           <a:xfrm>
-            <a:off x="914400" y="3913632"/>
+            <a:off x="640080" y="3169670"/>
             <a:ext cx="7315200" cy="777240"/>
           </a:xfrm>
           <a:prstGeom prst="rect">
@@ -1902,11 +1637,11 @@
           <a:bodyPr wrap="square" rtlCol="0" anchor="ctr"/>
           <a:lstStyle/>
           <a:p>
-            <a:pPr indent="0" marL="0">
-              <a:buNone/>
-            </a:pPr>
-            <a:r>
-              <a:rPr lang="en-US" sz="2600" i="1" dirty="0">
+            <a:pPr marL="0" indent="0">
+              <a:buNone/>
+            </a:pPr>
+            <a:r>
+              <a:rPr lang="en-US" sz="3600" i="1" dirty="0">
                 <a:solidFill>
                   <a:srgbClr val="D9782D"/>
                 </a:solidFill>
@@ -1916,11 +1651,8 @@
               </a:rPr>
               <a:t>“</a:t>
             </a:r>
-            <a:pPr indent="0" marL="0">
-              <a:buNone/>
-            </a:pPr>
-            <a:r>
-              <a:rPr lang="en-US" sz="1700" i="1" dirty="0">
+            <a:r>
+              <a:rPr lang="en-US" sz="2400" i="1" dirty="0">
                 <a:solidFill>
                   <a:srgbClr val="FFFFFF"/>
                 </a:solidFill>
@@ -1928,9 +1660,31 @@
                 <a:ea typeface="Cambria" pitchFamily="34" charset="-122"/>
                 <a:cs typeface="Cambria" pitchFamily="34" charset="-120"/>
               </a:rPr>
-              <a:t>How might we reduce the disruption that uncertain waits cause to people’s daily lives?</a:t>
-            </a:r>
-            <a:endParaRPr lang="en-US" sz="2600" dirty="0"/>
+              <a:t>How might we reduce the disruption that uncertain</a:t>
+            </a:r>
+            <a:r>
+              <a:rPr lang="zh-CN" altLang="en-US" sz="2400" i="1" dirty="0">
+                <a:solidFill>
+                  <a:srgbClr val="FFFFFF"/>
+                </a:solidFill>
+                <a:latin typeface="Cambria" pitchFamily="34" charset="0"/>
+                <a:ea typeface="Cambria" pitchFamily="34" charset="-122"/>
+                <a:cs typeface="Cambria" pitchFamily="34" charset="-120"/>
+              </a:rPr>
+              <a:t> </a:t>
+            </a:r>
+            <a:r>
+              <a:rPr lang="en-US" sz="2400" i="1" dirty="0">
+                <a:solidFill>
+                  <a:srgbClr val="FFFFFF"/>
+                </a:solidFill>
+                <a:latin typeface="Cambria" pitchFamily="34" charset="0"/>
+                <a:ea typeface="Cambria" pitchFamily="34" charset="-122"/>
+                <a:cs typeface="Cambria" pitchFamily="34" charset="-120"/>
+              </a:rPr>
+              <a:t>waits cause to people’s daily lives?</a:t>
+            </a:r>
+            <a:endParaRPr lang="en-US" sz="3600" dirty="0"/>
           </a:p>
         </p:txBody>
       </p:sp>
@@ -1955,7 +1709,7 @@
           <a:bodyPr wrap="square" rtlCol="0" anchor="ctr"/>
           <a:lstStyle/>
           <a:p>
-            <a:pPr indent="0" marL="0">
+            <a:pPr marL="0" indent="0">
               <a:buNone/>
             </a:pPr>
             <a:r>
@@ -1994,7 +1748,7 @@
           <a:bodyPr wrap="square" rtlCol="0" anchor="ctr"/>
           <a:lstStyle/>
           <a:p>
-            <a:pPr indent="0" marL="0">
+            <a:pPr marL="0" indent="0">
               <a:buNone/>
             </a:pPr>
             <a:r>
@@ -2028,6 +1782,7 @@
         <a:solidFill>
           <a:srgbClr val="1C2541"/>
         </a:solidFill>
+        <a:effectLst/>
       </p:bgPr>
     </p:bg>
     <p:spTree>
@@ -2065,7 +1820,7 @@
           <a:bodyPr wrap="square" rtlCol="0" anchor="ctr"/>
           <a:lstStyle/>
           <a:p>
-            <a:pPr indent="0" marL="0">
+            <a:pPr marL="0" indent="0">
               <a:buNone/>
             </a:pPr>
             <a:r>
@@ -2104,11 +1859,11 @@
           <a:bodyPr wrap="square" rtlCol="0" anchor="ctr"/>
           <a:lstStyle/>
           <a:p>
-            <a:pPr indent="0" marL="0">
-              <a:buNone/>
-            </a:pPr>
-            <a:r>
-              <a:rPr lang="en-US" sz="1100" b="1" spc="100" kern="0" dirty="0">
+            <a:pPr marL="0" indent="0">
+              <a:buNone/>
+            </a:pPr>
+            <a:r>
+              <a:rPr lang="en-US" sz="1100" b="1" kern="0" spc="100" dirty="0">
                 <a:solidFill>
                   <a:srgbClr val="D9782D"/>
                 </a:solidFill>
@@ -2143,7 +1898,7 @@
           <a:bodyPr wrap="square" rtlCol="0" anchor="ctr"/>
           <a:lstStyle/>
           <a:p>
-            <a:pPr indent="0" marL="0">
+            <a:pPr marL="0" indent="0">
               <a:lnSpc>
                 <a:spcPct val="115000"/>
               </a:lnSpc>
@@ -2166,7 +1921,7 @@
             <a:endParaRPr lang="en-US" sz="930" dirty="0"/>
           </a:p>
           <a:p>
-            <a:pPr indent="0" marL="0">
+            <a:pPr marL="0" indent="0">
               <a:lnSpc>
                 <a:spcPct val="115000"/>
               </a:lnSpc>
@@ -2189,7 +1944,7 @@
             <a:endParaRPr lang="en-US" sz="930" dirty="0"/>
           </a:p>
           <a:p>
-            <a:pPr indent="0" marL="0">
+            <a:pPr marL="0" indent="0">
               <a:lnSpc>
                 <a:spcPct val="115000"/>
               </a:lnSpc>
@@ -2212,7 +1967,7 @@
             <a:endParaRPr lang="en-US" sz="930" dirty="0"/>
           </a:p>
           <a:p>
-            <a:pPr indent="0" marL="0">
+            <a:pPr marL="0" indent="0">
               <a:lnSpc>
                 <a:spcPct val="115000"/>
               </a:lnSpc>
@@ -2235,7 +1990,7 @@
             <a:endParaRPr lang="en-US" sz="930" dirty="0"/>
           </a:p>
           <a:p>
-            <a:pPr indent="0" marL="0">
+            <a:pPr marL="0" indent="0">
               <a:lnSpc>
                 <a:spcPct val="115000"/>
               </a:lnSpc>
@@ -2258,7 +2013,7 @@
             <a:endParaRPr lang="en-US" sz="930" dirty="0"/>
           </a:p>
           <a:p>
-            <a:pPr indent="0" marL="0">
+            <a:pPr marL="0" indent="0">
               <a:lnSpc>
                 <a:spcPct val="115000"/>
               </a:lnSpc>
@@ -2303,6 +2058,13 @@
           </a:solidFill>
           <a:ln/>
         </p:spPr>
+        <p:txBody>
+          <a:bodyPr/>
+          <a:lstStyle/>
+          <a:p>
+            <a:endParaRPr lang="zh-CN" altLang="en-US"/>
+          </a:p>
+        </p:txBody>
       </p:sp>
       <p:sp>
         <p:nvSpPr>
@@ -2325,11 +2087,11 @@
           <a:bodyPr wrap="square" rtlCol="0" anchor="ctr"/>
           <a:lstStyle/>
           <a:p>
-            <a:pPr indent="0" marL="0">
-              <a:buNone/>
-            </a:pPr>
-            <a:r>
-              <a:rPr lang="en-US" sz="1100" b="1" spc="100" kern="0" dirty="0">
+            <a:pPr marL="0" indent="0">
+              <a:buNone/>
+            </a:pPr>
+            <a:r>
+              <a:rPr lang="en-US" sz="1100" b="1" kern="0" spc="100" dirty="0">
                 <a:solidFill>
                   <a:srgbClr val="D9782D"/>
                 </a:solidFill>
@@ -2364,7 +2126,7 @@
           <a:bodyPr wrap="square" rtlCol="0" anchor="ctr"/>
           <a:lstStyle/>
           <a:p>
-            <a:pPr indent="0" marL="0">
+            <a:pPr marL="0" indent="0">
               <a:lnSpc>
                 <a:spcPct val="125000"/>
               </a:lnSpc>
@@ -2384,7 +2146,7 @@
             <a:endParaRPr lang="en-US" sz="1100" dirty="0"/>
           </a:p>
           <a:p>
-            <a:pPr indent="0" marL="0">
+            <a:pPr marL="0" indent="0">
               <a:lnSpc>
                 <a:spcPct val="125000"/>
               </a:lnSpc>
@@ -2393,7 +2155,7 @@
             <a:endParaRPr lang="en-US" sz="1100" dirty="0"/>
           </a:p>
           <a:p>
-            <a:pPr indent="0" marL="0">
+            <a:pPr marL="0" indent="0">
               <a:lnSpc>
                 <a:spcPct val="125000"/>
               </a:lnSpc>
@@ -2435,7 +2197,7 @@
           <a:bodyPr wrap="square" rtlCol="0" anchor="ctr"/>
           <a:lstStyle/>
           <a:p>
-            <a:pPr algn="l" indent="0" marL="0">
+            <a:pPr marL="0" indent="0" algn="l">
               <a:buNone/>
             </a:pPr>
             <a:r>
@@ -2474,7 +2236,7 @@
           <a:bodyPr wrap="square" rtlCol="0" anchor="ctr"/>
           <a:lstStyle/>
           <a:p>
-            <a:pPr algn="r" indent="0" marL="0">
+            <a:pPr marL="0" indent="0" algn="r">
               <a:buNone/>
             </a:pPr>
             <a:r>
@@ -2508,6 +2270,7 @@
         <a:solidFill>
           <a:srgbClr val="FFFFFF"/>
         </a:solidFill>
+        <a:effectLst/>
       </p:bgPr>
     </p:bg>
     <p:spTree>
@@ -2545,7 +2308,7 @@
           <a:bodyPr wrap="square" rtlCol="0" anchor="ctr"/>
           <a:lstStyle/>
           <a:p>
-            <a:pPr indent="0" marL="0">
+            <a:pPr marL="0" indent="0">
               <a:buNone/>
             </a:pPr>
             <a:r>
@@ -2584,45 +2347,12 @@
           <a:bodyPr wrap="square" rtlCol="0" anchor="ctr"/>
           <a:lstStyle/>
           <a:p>
-            <a:pPr indent="0" marL="0">
-              <a:buNone/>
-            </a:pPr>
-            <a:r>
-              <a:rPr lang="en-US" sz="1300" i="1" dirty="0">
-                <a:solidFill>
-                  <a:srgbClr val="5B6472"/>
-                </a:solidFill>
-                <a:latin typeface="Calibri" pitchFamily="34" charset="0"/>
-                <a:ea typeface="Calibri" pitchFamily="34" charset="-122"/>
-                <a:cs typeface="Calibri" pitchFamily="34" charset="-120"/>
-              </a:rPr>
-              <a:t>The problem area we're focused on — not a solution yet</a:t>
-            </a:r>
+            <a:pPr marL="0" indent="0">
+              <a:buNone/>
+            </a:pPr>
             <a:endParaRPr lang="en-US" sz="1300" dirty="0"/>
           </a:p>
         </p:txBody>
-      </p:sp>
-      <p:sp>
-        <p:nvSpPr>
-          <p:cNvPr id="4" name="Shape 2"/>
-          <p:cNvSpPr/>
-          <p:nvPr/>
-        </p:nvSpPr>
-        <p:spPr>
-          <a:xfrm>
-            <a:off x="640080" y="1554480"/>
-            <a:ext cx="82296" cy="777240"/>
-          </a:xfrm>
-          <a:prstGeom prst="roundRect">
-            <a:avLst>
-              <a:gd name="adj" fmla="val 22222"/>
-            </a:avLst>
-          </a:prstGeom>
-          <a:solidFill>
-            <a:srgbClr val="D9782D"/>
-          </a:solidFill>
-          <a:ln/>
-        </p:spPr>
       </p:sp>
       <p:sp>
         <p:nvSpPr>
@@ -2645,11 +2375,11 @@
           <a:bodyPr wrap="square" rtlCol="0" anchor="ctr"/>
           <a:lstStyle/>
           <a:p>
-            <a:pPr indent="0" marL="0">
-              <a:buNone/>
-            </a:pPr>
-            <a:r>
-              <a:rPr lang="en-US" sz="1500" b="1" dirty="0">
+            <a:pPr marL="0" indent="0">
+              <a:buNone/>
+            </a:pPr>
+            <a:r>
+              <a:rPr lang="en-US" b="1" dirty="0">
                 <a:solidFill>
                   <a:srgbClr val="1C2541"/>
                 </a:solidFill>
@@ -2659,7 +2389,7 @@
               </a:rPr>
               <a:t>Problem area</a:t>
             </a:r>
-            <a:endParaRPr lang="en-US" sz="1500" dirty="0"/>
+            <a:endParaRPr lang="en-US" dirty="0"/>
           </a:p>
         </p:txBody>
       </p:sp>
@@ -2671,27 +2401,27 @@
         </p:nvSpPr>
         <p:spPr>
           <a:xfrm>
-            <a:off x="868680" y="1828800"/>
-            <a:ext cx="6126480" cy="548640"/>
-          </a:xfrm>
-          <a:prstGeom prst="rect">
-            <a:avLst/>
-          </a:prstGeom>
-          <a:noFill/>
-          <a:ln/>
-        </p:spPr>
-        <p:txBody>
-          <a:bodyPr wrap="square" rtlCol="0" anchor="ctr"/>
-          <a:lstStyle/>
-          <a:p>
-            <a:pPr indent="0" marL="0">
+            <a:off x="868680" y="1810512"/>
+            <a:ext cx="6126480" cy="1115568"/>
+          </a:xfrm>
+          <a:prstGeom prst="rect">
+            <a:avLst/>
+          </a:prstGeom>
+          <a:noFill/>
+          <a:ln/>
+        </p:spPr>
+        <p:txBody>
+          <a:bodyPr wrap="square" rtlCol="0" anchor="ctr"/>
+          <a:lstStyle/>
+          <a:p>
+            <a:pPr marL="0" indent="0">
               <a:lnSpc>
                 <a:spcPct val="115000"/>
               </a:lnSpc>
               <a:buNone/>
             </a:pPr>
             <a:r>
-              <a:rPr lang="en-US" sz="1250" dirty="0">
+              <a:rPr lang="en-US" sz="1600" dirty="0">
                 <a:solidFill>
                   <a:srgbClr val="222831"/>
                 </a:solidFill>
@@ -2699,33 +2429,11 @@
                 <a:ea typeface="Calibri" pitchFamily="34" charset="-122"/>
                 <a:cs typeface="Calibri" pitchFamily="34" charset="-120"/>
               </a:rPr>
-              <a:t>When a shared facility in an apartment building fails — a lift, hot water, a door — residents can report it, but almost never learn what happens next.</a:t>
-            </a:r>
-            <a:endParaRPr lang="en-US" sz="1250" dirty="0"/>
-          </a:p>
-        </p:txBody>
-      </p:sp>
-      <p:sp>
-        <p:nvSpPr>
-          <p:cNvPr id="7" name="Shape 5"/>
-          <p:cNvSpPr/>
-          <p:nvPr/>
-        </p:nvSpPr>
-        <p:spPr>
-          <a:xfrm>
-            <a:off x="640080" y="2606040"/>
-            <a:ext cx="82296" cy="777240"/>
-          </a:xfrm>
-          <a:prstGeom prst="roundRect">
-            <a:avLst>
-              <a:gd name="adj" fmla="val 22222"/>
-            </a:avLst>
-          </a:prstGeom>
-          <a:solidFill>
-            <a:srgbClr val="D9782D"/>
-          </a:solidFill>
-          <a:ln/>
-        </p:spPr>
+              <a:t>When a shared facility in an apartment building fails, a lift, hot water, a door, residents can report it, but almost never learn what happens next.</a:t>
+            </a:r>
+            <a:endParaRPr lang="en-US" sz="1600" dirty="0"/>
+          </a:p>
+        </p:txBody>
       </p:sp>
       <p:sp>
         <p:nvSpPr>
@@ -2735,7 +2443,7 @@
         </p:nvSpPr>
         <p:spPr>
           <a:xfrm>
-            <a:off x="868680" y="2587752"/>
+            <a:off x="868680" y="3176436"/>
             <a:ext cx="6035040" cy="292608"/>
           </a:xfrm>
           <a:prstGeom prst="rect">
@@ -2748,21 +2456,20 @@
           <a:bodyPr wrap="square" rtlCol="0" anchor="ctr"/>
           <a:lstStyle/>
           <a:p>
-            <a:pPr indent="0" marL="0">
-              <a:buNone/>
-            </a:pPr>
-            <a:r>
-              <a:rPr lang="en-US" sz="1500" b="1" dirty="0">
+            <a:pPr marL="0" indent="0">
+              <a:buNone/>
+            </a:pPr>
+            <a:r>
+              <a:rPr lang="en-US" b="1" dirty="0">
                 <a:solidFill>
                   <a:srgbClr val="1C2541"/>
                 </a:solidFill>
                 <a:latin typeface="Calibri" pitchFamily="34" charset="0"/>
-                <a:ea typeface="Calibri" pitchFamily="34" charset="-122"/>
-                <a:cs typeface="Calibri" pitchFamily="34" charset="-120"/>
-              </a:rPr>
-              <a:t>Context</a:t>
-            </a:r>
-            <a:endParaRPr lang="en-US" sz="1500" dirty="0"/>
+                <a:cs typeface="Calibri" pitchFamily="34" charset="-120"/>
+              </a:rPr>
+              <a:t>Target users</a:t>
+            </a:r>
+            <a:endParaRPr lang="en-US" dirty="0"/>
           </a:p>
         </p:txBody>
       </p:sp>
@@ -2774,27 +2481,27 @@
         </p:nvSpPr>
         <p:spPr>
           <a:xfrm>
-            <a:off x="868680" y="2880360"/>
-            <a:ext cx="6126480" cy="548640"/>
-          </a:xfrm>
-          <a:prstGeom prst="rect">
-            <a:avLst/>
-          </a:prstGeom>
-          <a:noFill/>
-          <a:ln/>
-        </p:spPr>
-        <p:txBody>
-          <a:bodyPr wrap="square" rtlCol="0" anchor="ctr"/>
-          <a:lstStyle/>
-          <a:p>
-            <a:pPr indent="0" marL="0">
+            <a:off x="868680" y="3589020"/>
+            <a:ext cx="5227320" cy="924648"/>
+          </a:xfrm>
+          <a:prstGeom prst="rect">
+            <a:avLst/>
+          </a:prstGeom>
+          <a:noFill/>
+          <a:ln/>
+        </p:spPr>
+        <p:txBody>
+          <a:bodyPr wrap="square" rtlCol="0" anchor="ctr"/>
+          <a:lstStyle/>
+          <a:p>
+            <a:pPr marL="0" indent="0">
               <a:lnSpc>
                 <a:spcPct val="115000"/>
               </a:lnSpc>
               <a:buNone/>
             </a:pPr>
             <a:r>
-              <a:rPr lang="en-US" sz="1250" dirty="0">
+              <a:rPr lang="en-US" sz="1600" dirty="0">
                 <a:solidFill>
                   <a:srgbClr val="222831"/>
                 </a:solidFill>
@@ -2802,33 +2509,33 @@
                 <a:ea typeface="Calibri" pitchFamily="34" charset="-122"/>
                 <a:cs typeface="Calibri" pitchFamily="34" charset="-120"/>
               </a:rPr>
-              <a:t>Student accommodation, social housing, and residents with access needs in Sydney apartment buildings. The law requires repairs but sets no timeframe (SSMA 2015 (NSW) s106; RTA 2010 (NSW) s63).</a:t>
-            </a:r>
-            <a:endParaRPr lang="en-US" sz="1250" dirty="0"/>
-          </a:p>
-        </p:txBody>
-      </p:sp>
-      <p:sp>
-        <p:nvSpPr>
-          <p:cNvPr id="10" name="Shape 8"/>
-          <p:cNvSpPr/>
-          <p:nvPr/>
-        </p:nvSpPr>
-        <p:spPr>
-          <a:xfrm>
-            <a:off x="640080" y="3657600"/>
-            <a:ext cx="82296" cy="777240"/>
-          </a:xfrm>
-          <a:prstGeom prst="roundRect">
-            <a:avLst>
-              <a:gd name="adj" fmla="val 22222"/>
-            </a:avLst>
-          </a:prstGeom>
-          <a:solidFill>
-            <a:srgbClr val="D9782D"/>
-          </a:solidFill>
-          <a:ln/>
-        </p:spPr>
+              <a:t>Student accommodation, social housing, and especially r</a:t>
+            </a:r>
+            <a:r>
+              <a:rPr lang="en-US" sz="1600" b="1" dirty="0">
+                <a:solidFill>
+                  <a:srgbClr val="222831"/>
+                </a:solidFill>
+                <a:latin typeface="Calibri" pitchFamily="34" charset="0"/>
+                <a:ea typeface="Calibri" pitchFamily="34" charset="-122"/>
+                <a:cs typeface="Calibri" pitchFamily="34" charset="-120"/>
+              </a:rPr>
+              <a:t>esidents with access needs </a:t>
+            </a:r>
+            <a:r>
+              <a:rPr lang="en-US" sz="1600" dirty="0">
+                <a:solidFill>
+                  <a:srgbClr val="222831"/>
+                </a:solidFill>
+                <a:latin typeface="Calibri" pitchFamily="34" charset="0"/>
+                <a:ea typeface="Calibri" pitchFamily="34" charset="-122"/>
+                <a:cs typeface="Calibri" pitchFamily="34" charset="-120"/>
+              </a:rPr>
+              <a:t>in Sydney apartment buildings. The law requires repairs but sets no timeframe (SSMA 2015 (NSW) s106; RTA 2010 (NSW) s63).</a:t>
+            </a:r>
+            <a:endParaRPr lang="en-US" sz="1600" dirty="0"/>
+          </a:p>
+        </p:txBody>
       </p:sp>
       <p:sp>
         <p:nvSpPr>
@@ -2838,7 +2545,7 @@
         </p:nvSpPr>
         <p:spPr>
           <a:xfrm>
-            <a:off x="868680" y="3639312"/>
+            <a:off x="893522" y="5111496"/>
             <a:ext cx="6035040" cy="292608"/>
           </a:xfrm>
           <a:prstGeom prst="rect">
@@ -2851,11 +2558,11 @@
           <a:bodyPr wrap="square" rtlCol="0" anchor="ctr"/>
           <a:lstStyle/>
           <a:p>
-            <a:pPr indent="0" marL="0">
-              <a:buNone/>
-            </a:pPr>
-            <a:r>
-              <a:rPr lang="en-US" sz="1500" b="1" dirty="0">
+            <a:pPr marL="0" indent="0">
+              <a:buNone/>
+            </a:pPr>
+            <a:r>
+              <a:rPr lang="en-US" b="1" dirty="0">
                 <a:solidFill>
                   <a:srgbClr val="1C2541"/>
                 </a:solidFill>
@@ -2865,7 +2572,7 @@
               </a:rPr>
               <a:t>Why this</a:t>
             </a:r>
-            <a:endParaRPr lang="en-US" sz="1500" dirty="0"/>
+            <a:endParaRPr lang="en-US" dirty="0"/>
           </a:p>
         </p:txBody>
       </p:sp>
@@ -2877,27 +2584,27 @@
         </p:nvSpPr>
         <p:spPr>
           <a:xfrm>
-            <a:off x="868680" y="3931920"/>
-            <a:ext cx="6126480" cy="548640"/>
-          </a:xfrm>
-          <a:prstGeom prst="rect">
-            <a:avLst/>
-          </a:prstGeom>
-          <a:noFill/>
-          <a:ln/>
-        </p:spPr>
-        <p:txBody>
-          <a:bodyPr wrap="square" rtlCol="0" anchor="ctr"/>
-          <a:lstStyle/>
-          <a:p>
-            <a:pPr indent="0" marL="0">
+            <a:off x="893522" y="5404104"/>
+            <a:ext cx="5062728" cy="548640"/>
+          </a:xfrm>
+          <a:prstGeom prst="rect">
+            <a:avLst/>
+          </a:prstGeom>
+          <a:noFill/>
+          <a:ln/>
+        </p:spPr>
+        <p:txBody>
+          <a:bodyPr wrap="square" rtlCol="0" anchor="ctr"/>
+          <a:lstStyle/>
+          <a:p>
+            <a:pPr marL="0" indent="0">
               <a:lnSpc>
                 <a:spcPct val="115000"/>
               </a:lnSpc>
               <a:buNone/>
             </a:pPr>
             <a:r>
-              <a:rPr lang="en-US" sz="1250" dirty="0">
+              <a:rPr lang="en-US" sz="1600" dirty="0">
                 <a:solidFill>
                   <a:srgbClr val="222831"/>
                 </a:solidFill>
@@ -2907,31 +2614,9 @@
               </a:rPr>
               <a:t>What differs between a fast fix and a slow one usually isn’t resources — it’s who can ask, and be answered.</a:t>
             </a:r>
-            <a:endParaRPr lang="en-US" sz="1250" dirty="0"/>
-          </a:p>
-        </p:txBody>
-      </p:sp>
-      <p:sp>
-        <p:nvSpPr>
-          <p:cNvPr id="13" name="Shape 11"/>
-          <p:cNvSpPr/>
-          <p:nvPr/>
-        </p:nvSpPr>
-        <p:spPr>
-          <a:xfrm>
-            <a:off x="7315200" y="1554480"/>
-            <a:ext cx="4206240" cy="4206240"/>
-          </a:xfrm>
-          <a:prstGeom prst="roundRect">
-            <a:avLst>
-              <a:gd name="adj" fmla="val 2174"/>
-            </a:avLst>
-          </a:prstGeom>
-          <a:solidFill>
-            <a:srgbClr val="1C2541"/>
-          </a:solidFill>
-          <a:ln/>
-        </p:spPr>
+            <a:endParaRPr lang="en-US" sz="1600" dirty="0"/>
+          </a:p>
+        </p:txBody>
       </p:sp>
       <p:sp>
         <p:nvSpPr>
@@ -2954,20 +2639,9 @@
           <a:bodyPr wrap="square" rtlCol="0" anchor="ctr"/>
           <a:lstStyle/>
           <a:p>
-            <a:pPr indent="0" marL="0">
-              <a:buNone/>
-            </a:pPr>
-            <a:r>
-              <a:rPr lang="en-US" sz="1050" b="1" spc="150" kern="0" dirty="0">
-                <a:solidFill>
-                  <a:srgbClr val="D9782D"/>
-                </a:solidFill>
-                <a:latin typeface="Calibri" pitchFamily="34" charset="0"/>
-                <a:ea typeface="Calibri" pitchFamily="34" charset="-122"/>
-                <a:cs typeface="Calibri" pitchFamily="34" charset="-120"/>
-              </a:rPr>
-              <a:t>A CASE FROM THE RESEARCH</a:t>
-            </a:r>
+            <a:pPr marL="0" indent="0">
+              <a:buNone/>
+            </a:pPr>
             <a:endParaRPr lang="en-US" sz="1050" dirty="0"/>
           </a:p>
         </p:txBody>
@@ -2993,21 +2667,10 @@
           <a:bodyPr wrap="square" rtlCol="0" anchor="ctr"/>
           <a:lstStyle/>
           <a:p>
-            <a:pPr indent="0" marL="0">
-              <a:buNone/>
-            </a:pPr>
-            <a:r>
-              <a:rPr lang="en-US" sz="4400" b="1" dirty="0">
-                <a:solidFill>
-                  <a:srgbClr val="FFFFFF"/>
-                </a:solidFill>
-                <a:latin typeface="Cambria" pitchFamily="34" charset="0"/>
-                <a:ea typeface="Cambria" pitchFamily="34" charset="-122"/>
-                <a:cs typeface="Cambria" pitchFamily="34" charset="-120"/>
-              </a:rPr>
-              <a:t>9 days</a:t>
-            </a:r>
-            <a:endParaRPr lang="en-US" sz="4400" dirty="0"/>
+            <a:pPr marL="0" indent="0">
+              <a:buNone/>
+            </a:pPr>
+            <a:endParaRPr lang="en-US" sz="3200" dirty="0"/>
           </a:p>
         </p:txBody>
       </p:sp>
@@ -3032,46 +2695,12 @@
           <a:bodyPr wrap="square" rtlCol="0" anchor="ctr"/>
           <a:lstStyle/>
           <a:p>
-            <a:pPr indent="0" marL="0">
-              <a:buNone/>
-            </a:pPr>
-            <a:r>
-              <a:rPr lang="en-US" sz="1150" dirty="0">
-                <a:solidFill>
-                  <a:srgbClr val="CFE0E8"/>
-                </a:solidFill>
-                <a:latin typeface="Calibri" pitchFamily="34" charset="0"/>
-                <a:ea typeface="Calibri" pitchFamily="34" charset="-122"/>
-                <a:cs typeface="Calibri" pitchFamily="34" charset="-120"/>
-              </a:rPr>
-              <a:t>waiting for hot water in social housing — no update, no timeframe</a:t>
-            </a:r>
+            <a:pPr marL="0" indent="0">
+              <a:buNone/>
+            </a:pPr>
             <a:endParaRPr lang="en-US" sz="1150" dirty="0"/>
           </a:p>
         </p:txBody>
-      </p:sp>
-      <p:sp>
-        <p:nvSpPr>
-          <p:cNvPr id="17" name="Shape 15"/>
-          <p:cNvSpPr/>
-          <p:nvPr/>
-        </p:nvSpPr>
-        <p:spPr>
-          <a:xfrm>
-            <a:off x="7635240" y="3611880"/>
-            <a:ext cx="3566160" cy="0"/>
-          </a:xfrm>
-          <a:prstGeom prst="line">
-            <a:avLst/>
-          </a:prstGeom>
-          <a:noFill/>
-          <a:ln w="12700">
-            <a:solidFill>
-              <a:srgbClr val="34405E"/>
-            </a:solidFill>
-            <a:prstDash val="solid"/>
-          </a:ln>
-        </p:spPr>
       </p:sp>
       <p:sp>
         <p:nvSpPr>
@@ -3094,20 +2723,9 @@
           <a:bodyPr wrap="square" rtlCol="0" anchor="ctr"/>
           <a:lstStyle/>
           <a:p>
-            <a:pPr indent="0" marL="0">
-              <a:buNone/>
-            </a:pPr>
-            <a:r>
-              <a:rPr lang="en-US" sz="3400" b="1" dirty="0">
-                <a:solidFill>
-                  <a:srgbClr val="D9782D"/>
-                </a:solidFill>
-                <a:latin typeface="Cambria" pitchFamily="34" charset="0"/>
-                <a:ea typeface="Cambria" pitchFamily="34" charset="-122"/>
-                <a:cs typeface="Cambria" pitchFamily="34" charset="-120"/>
-              </a:rPr>
-              <a:t>2 hours</a:t>
-            </a:r>
+            <a:pPr marL="0" indent="0">
+              <a:buNone/>
+            </a:pPr>
             <a:endParaRPr lang="en-US" sz="3400" dirty="0"/>
           </a:p>
         </p:txBody>
@@ -3133,20 +2751,9 @@
           <a:bodyPr wrap="square" rtlCol="0" anchor="ctr"/>
           <a:lstStyle/>
           <a:p>
-            <a:pPr indent="0" marL="0">
-              <a:buNone/>
-            </a:pPr>
-            <a:r>
-              <a:rPr lang="en-US" sz="1150" dirty="0">
-                <a:solidFill>
-                  <a:srgbClr val="CFE0E8"/>
-                </a:solidFill>
-                <a:latin typeface="Calibri" pitchFamily="34" charset="0"/>
-                <a:ea typeface="Calibri" pitchFamily="34" charset="-122"/>
-                <a:cs typeface="Calibri" pitchFamily="34" charset="-120"/>
-              </a:rPr>
-              <a:t>once a minister’s office intervened — same repair, same capacity</a:t>
-            </a:r>
+            <a:pPr marL="0" indent="0">
+              <a:buNone/>
+            </a:pPr>
             <a:endParaRPr lang="en-US" sz="1150" dirty="0"/>
           </a:p>
         </p:txBody>
@@ -3172,20 +2779,9 @@
           <a:bodyPr wrap="square" rtlCol="0" anchor="ctr"/>
           <a:lstStyle/>
           <a:p>
-            <a:pPr indent="0" marL="0">
-              <a:buNone/>
-            </a:pPr>
-            <a:r>
-              <a:rPr lang="en-US" sz="950" i="1" dirty="0">
-                <a:solidFill>
-                  <a:srgbClr val="8894A8"/>
-                </a:solidFill>
-                <a:latin typeface="Calibri" pitchFamily="34" charset="0"/>
-                <a:ea typeface="Calibri" pitchFamily="34" charset="-122"/>
-                <a:cs typeface="Calibri" pitchFamily="34" charset="-120"/>
-              </a:rPr>
-              <a:t>Gerathy (2024); Coghill (2025)</a:t>
-            </a:r>
+            <a:pPr marL="0" indent="0">
+              <a:buNone/>
+            </a:pPr>
             <a:endParaRPr lang="en-US" sz="950" dirty="0"/>
           </a:p>
         </p:txBody>
@@ -3211,7 +2807,7 @@
           <a:bodyPr wrap="square" rtlCol="0" anchor="ctr"/>
           <a:lstStyle/>
           <a:p>
-            <a:pPr algn="l" indent="0" marL="0">
+            <a:pPr marL="0" indent="0" algn="l">
               <a:buNone/>
             </a:pPr>
             <a:r>
@@ -3250,7 +2846,7 @@
           <a:bodyPr wrap="square" rtlCol="0" anchor="ctr"/>
           <a:lstStyle/>
           <a:p>
-            <a:pPr algn="r" indent="0" marL="0">
+            <a:pPr marL="0" indent="0" algn="r">
               <a:buNone/>
             </a:pPr>
             <a:r>
@@ -3268,6 +2864,66 @@
           </a:p>
         </p:txBody>
       </p:sp>
+      <p:pic>
+        <p:nvPicPr>
+          <p:cNvPr id="25" name="图片 24">
+            <a:extLst>
+              <a:ext uri="{FF2B5EF4-FFF2-40B4-BE49-F238E27FC236}">
+                <a16:creationId xmlns:a16="http://schemas.microsoft.com/office/drawing/2014/main" id="{E85CEECE-7E18-3C72-83DD-06163809E9F3}"/>
+              </a:ext>
+            </a:extLst>
+          </p:cNvPr>
+          <p:cNvPicPr>
+            <a:picLocks noChangeAspect="1"/>
+          </p:cNvPicPr>
+          <p:nvPr/>
+        </p:nvPicPr>
+        <p:blipFill>
+          <a:blip r:embed="rId3"/>
+          <a:stretch>
+            <a:fillRect/>
+          </a:stretch>
+        </p:blipFill>
+        <p:spPr>
+          <a:xfrm>
+            <a:off x="7726680" y="505245"/>
+            <a:ext cx="3474720" cy="3095897"/>
+          </a:xfrm>
+          <a:prstGeom prst="rect">
+            <a:avLst/>
+          </a:prstGeom>
+        </p:spPr>
+      </p:pic>
+      <p:pic>
+        <p:nvPicPr>
+          <p:cNvPr id="26" name="图片 25">
+            <a:extLst>
+              <a:ext uri="{FF2B5EF4-FFF2-40B4-BE49-F238E27FC236}">
+                <a16:creationId xmlns:a16="http://schemas.microsoft.com/office/drawing/2014/main" id="{3A93AF21-B0CD-EBF2-2A11-C82258090745}"/>
+              </a:ext>
+            </a:extLst>
+          </p:cNvPr>
+          <p:cNvPicPr>
+            <a:picLocks noChangeAspect="1"/>
+          </p:cNvPicPr>
+          <p:nvPr/>
+        </p:nvPicPr>
+        <p:blipFill>
+          <a:blip r:embed="rId4"/>
+          <a:stretch>
+            <a:fillRect/>
+          </a:stretch>
+        </p:blipFill>
+        <p:spPr>
+          <a:xfrm>
+            <a:off x="6065168" y="4087369"/>
+            <a:ext cx="5965454" cy="2275760"/>
+          </a:xfrm>
+          <a:prstGeom prst="rect">
+            <a:avLst/>
+          </a:prstGeom>
+        </p:spPr>
+      </p:pic>
     </p:spTree>
   </p:cSld>
   <p:clrMapOvr>
@@ -3284,6 +2940,7 @@
         <a:solidFill>
           <a:srgbClr val="FFFFFF"/>
         </a:solidFill>
+        <a:effectLst/>
       </p:bgPr>
     </p:bg>
     <p:spTree>
@@ -3321,7 +2978,7 @@
           <a:bodyPr wrap="square" rtlCol="0" anchor="ctr"/>
           <a:lstStyle/>
           <a:p>
-            <a:pPr indent="0" marL="0">
+            <a:pPr marL="0" indent="0">
               <a:buNone/>
             </a:pPr>
             <a:r>
@@ -3360,7 +3017,7 @@
           <a:bodyPr wrap="square" rtlCol="0" anchor="ctr"/>
           <a:lstStyle/>
           <a:p>
-            <a:pPr indent="0" marL="0">
+            <a:pPr marL="0" indent="0">
               <a:buNone/>
             </a:pPr>
             <a:r>
@@ -3397,260 +3054,17 @@
           </a:solidFill>
           <a:ln/>
         </p:spPr>
+        <p:txBody>
+          <a:bodyPr/>
+          <a:lstStyle/>
+          <a:p>
+            <a:endParaRPr lang="zh-CN" altLang="en-US"/>
+          </a:p>
+        </p:txBody>
       </p:sp>
       <p:pic>
         <p:nvPicPr>
-          <p:cNvPr id="5" name="Image 0" descr="/Users/devonma/Desktop/9106/Assignment/A2b/build/icons/mic.png">    </p:cNvPr>
-          <p:cNvPicPr>
-            <a:picLocks noChangeAspect="1"/>
-          </p:cNvPicPr>
-          <p:nvPr/>
-        </p:nvPicPr>
-        <p:blipFill>
-          <a:blip r:embed="rId1"/>
-          <a:stretch>
-            <a:fillRect/>
-          </a:stretch>
-        </p:blipFill>
-        <p:spPr>
-          <a:xfrm>
-            <a:off x="787481" y="1747601"/>
-            <a:ext cx="272125" cy="272125"/>
-          </a:xfrm>
-          <a:prstGeom prst="rect">
-            <a:avLst/>
-          </a:prstGeom>
-        </p:spPr>
-      </p:pic>
-      <p:sp>
-        <p:nvSpPr>
-          <p:cNvPr id="6" name="Text 3"/>
-          <p:cNvSpPr/>
-          <p:nvPr/>
-        </p:nvSpPr>
-        <p:spPr>
-          <a:xfrm>
-            <a:off x="1417320" y="1572768"/>
-            <a:ext cx="9692640" cy="292608"/>
-          </a:xfrm>
-          <a:prstGeom prst="rect">
-            <a:avLst/>
-          </a:prstGeom>
-          <a:noFill/>
-          <a:ln/>
-        </p:spPr>
-        <p:txBody>
-          <a:bodyPr wrap="square" rtlCol="0" anchor="ctr"/>
-          <a:lstStyle/>
-          <a:p>
-            <a:pPr indent="0" marL="0">
-              <a:buNone/>
-            </a:pPr>
-            <a:r>
-              <a:rPr lang="en-US" sz="1450" b="1" dirty="0">
-                <a:solidFill>
-                  <a:srgbClr val="1C2541"/>
-                </a:solidFill>
-                <a:latin typeface="Calibri" pitchFamily="34" charset="0"/>
-                <a:ea typeface="Calibri" pitchFamily="34" charset="-122"/>
-                <a:cs typeface="Calibri" pitchFamily="34" charset="-120"/>
-              </a:rPr>
-              <a:t>~12 semi-structured interviews</a:t>
-            </a:r>
-            <a:endParaRPr lang="en-US" sz="1450" dirty="0"/>
-          </a:p>
-        </p:txBody>
-      </p:sp>
-      <p:sp>
-        <p:nvSpPr>
-          <p:cNvPr id="7" name="Text 4"/>
-          <p:cNvSpPr/>
-          <p:nvPr/>
-        </p:nvSpPr>
-        <p:spPr>
-          <a:xfrm>
-            <a:off x="1417320" y="1874520"/>
-            <a:ext cx="9875520" cy="502920"/>
-          </a:xfrm>
-          <a:prstGeom prst="rect">
-            <a:avLst/>
-          </a:prstGeom>
-          <a:noFill/>
-          <a:ln/>
-        </p:spPr>
-        <p:txBody>
-          <a:bodyPr wrap="square" rtlCol="0" anchor="ctr"/>
-          <a:lstStyle/>
-          <a:p>
-            <a:pPr indent="0" marL="0">
-              <a:lnSpc>
-                <a:spcPct val="110000"/>
-              </a:lnSpc>
-              <a:buNone/>
-            </a:pPr>
-            <a:r>
-              <a:rPr lang="en-US" sz="1200" dirty="0">
-                <a:solidFill>
-                  <a:srgbClr val="222831"/>
-                </a:solidFill>
-                <a:latin typeface="Calibri" pitchFamily="34" charset="0"/>
-                <a:ea typeface="Calibri" pitchFamily="34" charset="-122"/>
-                <a:cs typeface="Calibri" pitchFamily="34" charset="-120"/>
-              </a:rPr>
-              <a:t>Across the 4 team members, each following the same protocol: last failure → who was told → what they were told about duration → what they did while it was broken → how they judged whether the wait was reasonable.</a:t>
-            </a:r>
-            <a:endParaRPr lang="en-US" sz="1200" dirty="0"/>
-          </a:p>
-        </p:txBody>
-      </p:sp>
-      <p:sp>
-        <p:nvSpPr>
-          <p:cNvPr id="8" name="Shape 5"/>
-          <p:cNvSpPr/>
-          <p:nvPr/>
-        </p:nvSpPr>
-        <p:spPr>
-          <a:xfrm>
-            <a:off x="640080" y="2770632"/>
-            <a:ext cx="566928" cy="566928"/>
-          </a:xfrm>
-          <a:prstGeom prst="ellipse">
-            <a:avLst/>
-          </a:prstGeom>
-          <a:solidFill>
-            <a:srgbClr val="1C2541"/>
-          </a:solidFill>
-          <a:ln/>
-        </p:spPr>
-      </p:sp>
-      <p:pic>
-        <p:nvPicPr>
-          <p:cNvPr id="9" name="Image 1" descr="/Users/devonma/Desktop/9106/Assignment/A2b/build/icons/users.png">    </p:cNvPr>
-          <p:cNvPicPr>
-            <a:picLocks noChangeAspect="1"/>
-          </p:cNvPicPr>
-          <p:nvPr/>
-        </p:nvPicPr>
-        <p:blipFill>
-          <a:blip r:embed="rId2"/>
-          <a:stretch>
-            <a:fillRect/>
-          </a:stretch>
-        </p:blipFill>
-        <p:spPr>
-          <a:xfrm>
-            <a:off x="787481" y="2918033"/>
-            <a:ext cx="272125" cy="272125"/>
-          </a:xfrm>
-          <a:prstGeom prst="rect">
-            <a:avLst/>
-          </a:prstGeom>
-        </p:spPr>
-      </p:pic>
-      <p:sp>
-        <p:nvSpPr>
-          <p:cNvPr id="10" name="Text 6"/>
-          <p:cNvSpPr/>
-          <p:nvPr/>
-        </p:nvSpPr>
-        <p:spPr>
-          <a:xfrm>
-            <a:off x="1417320" y="2743200"/>
-            <a:ext cx="9692640" cy="292608"/>
-          </a:xfrm>
-          <a:prstGeom prst="rect">
-            <a:avLst/>
-          </a:prstGeom>
-          <a:noFill/>
-          <a:ln/>
-        </p:spPr>
-        <p:txBody>
-          <a:bodyPr wrap="square" rtlCol="0" anchor="ctr"/>
-          <a:lstStyle/>
-          <a:p>
-            <a:pPr indent="0" marL="0">
-              <a:buNone/>
-            </a:pPr>
-            <a:r>
-              <a:rPr lang="en-US" sz="1450" b="1" dirty="0">
-                <a:solidFill>
-                  <a:srgbClr val="1C2541"/>
-                </a:solidFill>
-                <a:latin typeface="Calibri" pitchFamily="34" charset="0"/>
-                <a:ea typeface="Calibri" pitchFamily="34" charset="-122"/>
-                <a:cs typeface="Calibri" pitchFamily="34" charset="-120"/>
-              </a:rPr>
-              <a:t>Purposive sampling</a:t>
-            </a:r>
-            <a:endParaRPr lang="en-US" sz="1450" dirty="0"/>
-          </a:p>
-        </p:txBody>
-      </p:sp>
-      <p:sp>
-        <p:nvSpPr>
-          <p:cNvPr id="11" name="Text 7"/>
-          <p:cNvSpPr/>
-          <p:nvPr/>
-        </p:nvSpPr>
-        <p:spPr>
-          <a:xfrm>
-            <a:off x="1417320" y="3044952"/>
-            <a:ext cx="9875520" cy="502920"/>
-          </a:xfrm>
-          <a:prstGeom prst="rect">
-            <a:avLst/>
-          </a:prstGeom>
-          <a:noFill/>
-          <a:ln/>
-        </p:spPr>
-        <p:txBody>
-          <a:bodyPr wrap="square" rtlCol="0" anchor="ctr"/>
-          <a:lstStyle/>
-          <a:p>
-            <a:pPr indent="0" marL="0">
-              <a:lnSpc>
-                <a:spcPct val="110000"/>
-              </a:lnSpc>
-              <a:buNone/>
-            </a:pPr>
-            <a:r>
-              <a:rPr lang="en-US" sz="1200" dirty="0">
-                <a:solidFill>
-                  <a:srgbClr val="222831"/>
-                </a:solidFill>
-                <a:latin typeface="Calibri" pitchFamily="34" charset="0"/>
-                <a:ea typeface="Calibri" pitchFamily="34" charset="-122"/>
-                <a:cs typeface="Calibri" pitchFamily="34" charset="-120"/>
-              </a:rPr>
-              <a:t>Participants who had experienced a shared-facility breakdown in the past 12 months, across housing types — so a shared finding reflects structure, not one provider’s failure.</a:t>
-            </a:r>
-            <a:endParaRPr lang="en-US" sz="1200" dirty="0"/>
-          </a:p>
-        </p:txBody>
-      </p:sp>
-      <p:sp>
-        <p:nvSpPr>
-          <p:cNvPr id="12" name="Shape 8"/>
-          <p:cNvSpPr/>
-          <p:nvPr/>
-        </p:nvSpPr>
-        <p:spPr>
-          <a:xfrm>
-            <a:off x="640080" y="3941064"/>
-            <a:ext cx="566928" cy="566928"/>
-          </a:xfrm>
-          <a:prstGeom prst="ellipse">
-            <a:avLst/>
-          </a:prstGeom>
-          <a:solidFill>
-            <a:srgbClr val="1C2541"/>
-          </a:solidFill>
-          <a:ln/>
-        </p:spPr>
-      </p:sp>
-      <p:pic>
-        <p:nvPicPr>
-          <p:cNvPr id="13" name="Image 2" descr="/Users/devonma/Desktop/9106/Assignment/A2b/build/icons/home.png">    </p:cNvPr>
+          <p:cNvPr id="5" name="Image 0" descr="/Users/devonma/Desktop/9106/Assignment/A2b/build/icons/mic.png"/>
           <p:cNvPicPr>
             <a:picLocks noChangeAspect="1"/>
           </p:cNvPicPr>
@@ -3664,7 +3078,7 @@
         </p:blipFill>
         <p:spPr>
           <a:xfrm>
-            <a:off x="787481" y="4088465"/>
+            <a:off x="787481" y="1747601"/>
             <a:ext cx="272125" cy="272125"/>
           </a:xfrm>
           <a:prstGeom prst="rect">
@@ -3674,13 +3088,13 @@
       </p:pic>
       <p:sp>
         <p:nvSpPr>
-          <p:cNvPr id="14" name="Text 9"/>
-          <p:cNvSpPr/>
-          <p:nvPr/>
-        </p:nvSpPr>
-        <p:spPr>
-          <a:xfrm>
-            <a:off x="1417320" y="3913632"/>
+          <p:cNvPr id="6" name="Text 3"/>
+          <p:cNvSpPr/>
+          <p:nvPr/>
+        </p:nvSpPr>
+        <p:spPr>
+          <a:xfrm>
+            <a:off x="1417320" y="1572768"/>
             <a:ext cx="9692640" cy="292608"/>
           </a:xfrm>
           <a:prstGeom prst="rect">
@@ -3693,7 +3107,7 @@
           <a:bodyPr wrap="square" rtlCol="0" anchor="ctr"/>
           <a:lstStyle/>
           <a:p>
-            <a:pPr indent="0" marL="0">
+            <a:pPr marL="0" indent="0">
               <a:buNone/>
             </a:pPr>
             <a:r>
@@ -3705,7 +3119,7 @@
                 <a:ea typeface="Calibri" pitchFamily="34" charset="-122"/>
                 <a:cs typeface="Calibri" pitchFamily="34" charset="-120"/>
               </a:rPr>
-              <a:t>Recruitment</a:t>
+              <a:t>~12 semi-structured interviews</a:t>
             </a:r>
             <a:endParaRPr lang="en-US" sz="1450" dirty="0"/>
           </a:p>
@@ -3713,13 +3127,13 @@
       </p:sp>
       <p:sp>
         <p:nvSpPr>
-          <p:cNvPr id="15" name="Text 10"/>
-          <p:cNvSpPr/>
-          <p:nvPr/>
-        </p:nvSpPr>
-        <p:spPr>
-          <a:xfrm>
-            <a:off x="1417320" y="4215384"/>
+          <p:cNvPr id="7" name="Text 4"/>
+          <p:cNvSpPr/>
+          <p:nvPr/>
+        </p:nvSpPr>
+        <p:spPr>
+          <a:xfrm>
+            <a:off x="1417320" y="1874520"/>
             <a:ext cx="9875520" cy="502920"/>
           </a:xfrm>
           <a:prstGeom prst="rect">
@@ -3732,7 +3146,7 @@
           <a:bodyPr wrap="square" rtlCol="0" anchor="ctr"/>
           <a:lstStyle/>
           <a:p>
-            <a:pPr indent="0" marL="0">
+            <a:pPr marL="0" indent="0">
               <a:lnSpc>
                 <a:spcPct val="110000"/>
               </a:lnSpc>
@@ -3747,7 +3161,7 @@
                 <a:ea typeface="Calibri" pitchFamily="34" charset="-122"/>
                 <a:cs typeface="Calibri" pitchFamily="34" charset="-120"/>
               </a:rPr>
-              <a:t>University networks, personal contacts, and student/disability support networks — without identifying anyone by impairment.</a:t>
+              <a:t>Across the 4 team members, each following the same protocol: last failure → who was told → what they were told about duration → what they did while it was broken → how they judged whether the wait was reasonable.</a:t>
             </a:r>
             <a:endParaRPr lang="en-US" sz="1200" dirty="0"/>
           </a:p>
@@ -3755,13 +3169,13 @@
       </p:sp>
       <p:sp>
         <p:nvSpPr>
-          <p:cNvPr id="16" name="Shape 11"/>
-          <p:cNvSpPr/>
-          <p:nvPr/>
-        </p:nvSpPr>
-        <p:spPr>
-          <a:xfrm>
-            <a:off x="640080" y="5111496"/>
+          <p:cNvPr id="8" name="Shape 5"/>
+          <p:cNvSpPr/>
+          <p:nvPr/>
+        </p:nvSpPr>
+        <p:spPr>
+          <a:xfrm>
+            <a:off x="640080" y="2770632"/>
             <a:ext cx="566928" cy="566928"/>
           </a:xfrm>
           <a:prstGeom prst="ellipse">
@@ -3772,10 +3186,17 @@
           </a:solidFill>
           <a:ln/>
         </p:spPr>
+        <p:txBody>
+          <a:bodyPr/>
+          <a:lstStyle/>
+          <a:p>
+            <a:endParaRPr lang="zh-CN" altLang="en-US"/>
+          </a:p>
+        </p:txBody>
       </p:sp>
       <p:pic>
         <p:nvPicPr>
-          <p:cNvPr id="17" name="Image 3" descr="/Users/devonma/Desktop/9106/Assignment/A2b/build/icons/book.png">    </p:cNvPr>
+          <p:cNvPr id="9" name="Image 1" descr="/Users/devonma/Desktop/9106/Assignment/A2b/build/icons/users.png"/>
           <p:cNvPicPr>
             <a:picLocks noChangeAspect="1"/>
           </p:cNvPicPr>
@@ -3789,7 +3210,7 @@
         </p:blipFill>
         <p:spPr>
           <a:xfrm>
-            <a:off x="787481" y="5258897"/>
+            <a:off x="787481" y="2918033"/>
             <a:ext cx="272125" cy="272125"/>
           </a:xfrm>
           <a:prstGeom prst="rect">
@@ -3799,13 +3220,13 @@
       </p:pic>
       <p:sp>
         <p:nvSpPr>
-          <p:cNvPr id="18" name="Text 12"/>
-          <p:cNvSpPr/>
-          <p:nvPr/>
-        </p:nvSpPr>
-        <p:spPr>
-          <a:xfrm>
-            <a:off x="1417320" y="5084064"/>
+          <p:cNvPr id="10" name="Text 6"/>
+          <p:cNvSpPr/>
+          <p:nvPr/>
+        </p:nvSpPr>
+        <p:spPr>
+          <a:xfrm>
+            <a:off x="1417320" y="2743200"/>
             <a:ext cx="9692640" cy="292608"/>
           </a:xfrm>
           <a:prstGeom prst="rect">
@@ -3818,7 +3239,7 @@
           <a:bodyPr wrap="square" rtlCol="0" anchor="ctr"/>
           <a:lstStyle/>
           <a:p>
-            <a:pPr indent="0" marL="0">
+            <a:pPr marL="0" indent="0">
               <a:buNone/>
             </a:pPr>
             <a:r>
@@ -3830,7 +3251,7 @@
                 <a:ea typeface="Calibri" pitchFamily="34" charset="-122"/>
                 <a:cs typeface="Calibri" pitchFamily="34" charset="-120"/>
               </a:rPr>
-              <a:t>Secondary research in parallel</a:t>
+              <a:t>Purposive sampling</a:t>
             </a:r>
             <a:endParaRPr lang="en-US" sz="1450" dirty="0"/>
           </a:p>
@@ -3838,13 +3259,13 @@
       </p:sp>
       <p:sp>
         <p:nvSpPr>
-          <p:cNvPr id="19" name="Text 13"/>
-          <p:cNvSpPr/>
-          <p:nvPr/>
-        </p:nvSpPr>
-        <p:spPr>
-          <a:xfrm>
-            <a:off x="1417320" y="5385816"/>
+          <p:cNvPr id="11" name="Text 7"/>
+          <p:cNvSpPr/>
+          <p:nvPr/>
+        </p:nvSpPr>
+        <p:spPr>
+          <a:xfrm>
+            <a:off x="1417320" y="3044952"/>
             <a:ext cx="9875520" cy="502920"/>
           </a:xfrm>
           <a:prstGeom prst="rect">
@@ -3857,7 +3278,7 @@
           <a:bodyPr wrap="square" rtlCol="0" anchor="ctr"/>
           <a:lstStyle/>
           <a:p>
-            <a:pPr indent="0" marL="0">
+            <a:pPr marL="0" indent="0">
               <a:lnSpc>
                 <a:spcPct val="110000"/>
               </a:lnSpc>
@@ -3872,6 +3293,270 @@
                 <a:ea typeface="Calibri" pitchFamily="34" charset="-122"/>
                 <a:cs typeface="Calibri" pitchFamily="34" charset="-120"/>
               </a:rPr>
+              <a:t>Participants who had experienced a shared-facility breakdown in the past 12 months, across housing types — so a shared finding reflects structure, not one provider’s failure.</a:t>
+            </a:r>
+            <a:endParaRPr lang="en-US" sz="1200" dirty="0"/>
+          </a:p>
+        </p:txBody>
+      </p:sp>
+      <p:sp>
+        <p:nvSpPr>
+          <p:cNvPr id="12" name="Shape 8"/>
+          <p:cNvSpPr/>
+          <p:nvPr/>
+        </p:nvSpPr>
+        <p:spPr>
+          <a:xfrm>
+            <a:off x="640080" y="3941064"/>
+            <a:ext cx="566928" cy="566928"/>
+          </a:xfrm>
+          <a:prstGeom prst="ellipse">
+            <a:avLst/>
+          </a:prstGeom>
+          <a:solidFill>
+            <a:srgbClr val="1C2541"/>
+          </a:solidFill>
+          <a:ln/>
+        </p:spPr>
+        <p:txBody>
+          <a:bodyPr/>
+          <a:lstStyle/>
+          <a:p>
+            <a:endParaRPr lang="zh-CN" altLang="en-US"/>
+          </a:p>
+        </p:txBody>
+      </p:sp>
+      <p:pic>
+        <p:nvPicPr>
+          <p:cNvPr id="13" name="Image 2" descr="/Users/devonma/Desktop/9106/Assignment/A2b/build/icons/home.png"/>
+          <p:cNvPicPr>
+            <a:picLocks noChangeAspect="1"/>
+          </p:cNvPicPr>
+          <p:nvPr/>
+        </p:nvPicPr>
+        <p:blipFill>
+          <a:blip r:embed="rId5"/>
+          <a:stretch>
+            <a:fillRect/>
+          </a:stretch>
+        </p:blipFill>
+        <p:spPr>
+          <a:xfrm>
+            <a:off x="787481" y="4088465"/>
+            <a:ext cx="272125" cy="272125"/>
+          </a:xfrm>
+          <a:prstGeom prst="rect">
+            <a:avLst/>
+          </a:prstGeom>
+        </p:spPr>
+      </p:pic>
+      <p:sp>
+        <p:nvSpPr>
+          <p:cNvPr id="14" name="Text 9"/>
+          <p:cNvSpPr/>
+          <p:nvPr/>
+        </p:nvSpPr>
+        <p:spPr>
+          <a:xfrm>
+            <a:off x="1417320" y="3913632"/>
+            <a:ext cx="9692640" cy="292608"/>
+          </a:xfrm>
+          <a:prstGeom prst="rect">
+            <a:avLst/>
+          </a:prstGeom>
+          <a:noFill/>
+          <a:ln/>
+        </p:spPr>
+        <p:txBody>
+          <a:bodyPr wrap="square" rtlCol="0" anchor="ctr"/>
+          <a:lstStyle/>
+          <a:p>
+            <a:pPr marL="0" indent="0">
+              <a:buNone/>
+            </a:pPr>
+            <a:r>
+              <a:rPr lang="en-US" sz="1450" b="1" dirty="0">
+                <a:solidFill>
+                  <a:srgbClr val="1C2541"/>
+                </a:solidFill>
+                <a:latin typeface="Calibri" pitchFamily="34" charset="0"/>
+                <a:ea typeface="Calibri" pitchFamily="34" charset="-122"/>
+                <a:cs typeface="Calibri" pitchFamily="34" charset="-120"/>
+              </a:rPr>
+              <a:t>Recruitment</a:t>
+            </a:r>
+            <a:endParaRPr lang="en-US" sz="1450" dirty="0"/>
+          </a:p>
+        </p:txBody>
+      </p:sp>
+      <p:sp>
+        <p:nvSpPr>
+          <p:cNvPr id="15" name="Text 10"/>
+          <p:cNvSpPr/>
+          <p:nvPr/>
+        </p:nvSpPr>
+        <p:spPr>
+          <a:xfrm>
+            <a:off x="1417320" y="4215384"/>
+            <a:ext cx="9875520" cy="502920"/>
+          </a:xfrm>
+          <a:prstGeom prst="rect">
+            <a:avLst/>
+          </a:prstGeom>
+          <a:noFill/>
+          <a:ln/>
+        </p:spPr>
+        <p:txBody>
+          <a:bodyPr wrap="square" rtlCol="0" anchor="ctr"/>
+          <a:lstStyle/>
+          <a:p>
+            <a:pPr marL="0" indent="0">
+              <a:lnSpc>
+                <a:spcPct val="110000"/>
+              </a:lnSpc>
+              <a:buNone/>
+            </a:pPr>
+            <a:r>
+              <a:rPr lang="en-US" sz="1200" dirty="0">
+                <a:solidFill>
+                  <a:srgbClr val="222831"/>
+                </a:solidFill>
+                <a:latin typeface="Calibri" pitchFamily="34" charset="0"/>
+                <a:ea typeface="Calibri" pitchFamily="34" charset="-122"/>
+                <a:cs typeface="Calibri" pitchFamily="34" charset="-120"/>
+              </a:rPr>
+              <a:t>University networks, personal contacts, and student/disability support networks — without identifying anyone by impairment.</a:t>
+            </a:r>
+            <a:endParaRPr lang="en-US" sz="1200" dirty="0"/>
+          </a:p>
+        </p:txBody>
+      </p:sp>
+      <p:sp>
+        <p:nvSpPr>
+          <p:cNvPr id="16" name="Shape 11"/>
+          <p:cNvSpPr/>
+          <p:nvPr/>
+        </p:nvSpPr>
+        <p:spPr>
+          <a:xfrm>
+            <a:off x="640080" y="5111496"/>
+            <a:ext cx="566928" cy="566928"/>
+          </a:xfrm>
+          <a:prstGeom prst="ellipse">
+            <a:avLst/>
+          </a:prstGeom>
+          <a:solidFill>
+            <a:srgbClr val="1C2541"/>
+          </a:solidFill>
+          <a:ln/>
+        </p:spPr>
+        <p:txBody>
+          <a:bodyPr/>
+          <a:lstStyle/>
+          <a:p>
+            <a:endParaRPr lang="zh-CN" altLang="en-US"/>
+          </a:p>
+        </p:txBody>
+      </p:sp>
+      <p:pic>
+        <p:nvPicPr>
+          <p:cNvPr id="17" name="Image 3" descr="/Users/devonma/Desktop/9106/Assignment/A2b/build/icons/book.png"/>
+          <p:cNvPicPr>
+            <a:picLocks noChangeAspect="1"/>
+          </p:cNvPicPr>
+          <p:nvPr/>
+        </p:nvPicPr>
+        <p:blipFill>
+          <a:blip r:embed="rId6"/>
+          <a:stretch>
+            <a:fillRect/>
+          </a:stretch>
+        </p:blipFill>
+        <p:spPr>
+          <a:xfrm>
+            <a:off x="787481" y="5258897"/>
+            <a:ext cx="272125" cy="272125"/>
+          </a:xfrm>
+          <a:prstGeom prst="rect">
+            <a:avLst/>
+          </a:prstGeom>
+        </p:spPr>
+      </p:pic>
+      <p:sp>
+        <p:nvSpPr>
+          <p:cNvPr id="18" name="Text 12"/>
+          <p:cNvSpPr/>
+          <p:nvPr/>
+        </p:nvSpPr>
+        <p:spPr>
+          <a:xfrm>
+            <a:off x="1417320" y="5084064"/>
+            <a:ext cx="9692640" cy="292608"/>
+          </a:xfrm>
+          <a:prstGeom prst="rect">
+            <a:avLst/>
+          </a:prstGeom>
+          <a:noFill/>
+          <a:ln/>
+        </p:spPr>
+        <p:txBody>
+          <a:bodyPr wrap="square" rtlCol="0" anchor="ctr"/>
+          <a:lstStyle/>
+          <a:p>
+            <a:pPr marL="0" indent="0">
+              <a:buNone/>
+            </a:pPr>
+            <a:r>
+              <a:rPr lang="en-US" sz="1450" b="1" dirty="0">
+                <a:solidFill>
+                  <a:srgbClr val="1C2541"/>
+                </a:solidFill>
+                <a:latin typeface="Calibri" pitchFamily="34" charset="0"/>
+                <a:ea typeface="Calibri" pitchFamily="34" charset="-122"/>
+                <a:cs typeface="Calibri" pitchFamily="34" charset="-120"/>
+              </a:rPr>
+              <a:t>Secondary research in parallel</a:t>
+            </a:r>
+            <a:endParaRPr lang="en-US" sz="1450" dirty="0"/>
+          </a:p>
+        </p:txBody>
+      </p:sp>
+      <p:sp>
+        <p:nvSpPr>
+          <p:cNvPr id="19" name="Text 13"/>
+          <p:cNvSpPr/>
+          <p:nvPr/>
+        </p:nvSpPr>
+        <p:spPr>
+          <a:xfrm>
+            <a:off x="1417320" y="5385816"/>
+            <a:ext cx="9875520" cy="502920"/>
+          </a:xfrm>
+          <a:prstGeom prst="rect">
+            <a:avLst/>
+          </a:prstGeom>
+          <a:noFill/>
+          <a:ln/>
+        </p:spPr>
+        <p:txBody>
+          <a:bodyPr wrap="square" rtlCol="0" anchor="ctr"/>
+          <a:lstStyle/>
+          <a:p>
+            <a:pPr marL="0" indent="0">
+              <a:lnSpc>
+                <a:spcPct val="110000"/>
+              </a:lnSpc>
+              <a:buNone/>
+            </a:pPr>
+            <a:r>
+              <a:rPr lang="en-US" sz="1200" dirty="0">
+                <a:solidFill>
+                  <a:srgbClr val="222831"/>
+                </a:solidFill>
+                <a:latin typeface="Calibri" pitchFamily="34" charset="0"/>
+                <a:ea typeface="Calibri" pitchFamily="34" charset="-122"/>
+                <a:cs typeface="Calibri" pitchFamily="34" charset="-120"/>
+              </a:rPr>
               <a:t>Queueing psychology (Maister, 1985; Larson, 1987), legal repair obligations, and reported cases.</a:t>
             </a:r>
             <a:endParaRPr lang="en-US" sz="1200" dirty="0"/>
@@ -3899,7 +3584,7 @@
           <a:bodyPr wrap="square" rtlCol="0" anchor="ctr"/>
           <a:lstStyle/>
           <a:p>
-            <a:pPr algn="l" indent="0" marL="0">
+            <a:pPr marL="0" indent="0" algn="l">
               <a:buNone/>
             </a:pPr>
             <a:r>
@@ -3938,7 +3623,7 @@
           <a:bodyPr wrap="square" rtlCol="0" anchor="ctr"/>
           <a:lstStyle/>
           <a:p>
-            <a:pPr algn="r" indent="0" marL="0">
+            <a:pPr marL="0" indent="0" algn="r">
               <a:buNone/>
             </a:pPr>
             <a:r>
@@ -3966,12 +3651,13 @@
 
 <file path=ppt/slides/slide4.xml><?xml version="1.0" encoding="utf-8"?>
 <p:sld xmlns:a="http://schemas.openxmlformats.org/drawingml/2006/main" xmlns:r="http://schemas.openxmlformats.org/officeDocument/2006/relationships" xmlns:p="http://schemas.openxmlformats.org/presentationml/2006/main">
-  <p:cSld name="Slide 4">
+  <p:cSld name="Slide 5">
     <p:bg>
       <p:bgPr>
         <a:solidFill>
           <a:srgbClr val="FFFFFF"/>
         </a:solidFill>
+        <a:effectLst/>
       </p:bgPr>
     </p:bg>
     <p:spTree>
@@ -3996,24 +3682,24 @@
         </p:nvSpPr>
         <p:spPr>
           <a:xfrm>
-            <a:off x="640080" y="411480"/>
-            <a:ext cx="7315200" cy="502920"/>
-          </a:xfrm>
-          <a:prstGeom prst="rect">
-            <a:avLst/>
-          </a:prstGeom>
-          <a:noFill/>
-          <a:ln/>
-        </p:spPr>
-        <p:txBody>
-          <a:bodyPr wrap="square" rtlCol="0" anchor="ctr"/>
-          <a:lstStyle/>
-          <a:p>
-            <a:pPr indent="0" marL="0">
-              <a:buNone/>
-            </a:pPr>
-            <a:r>
-              <a:rPr lang="en-US" sz="2800" b="1" dirty="0">
+            <a:off x="640080" y="384048"/>
+            <a:ext cx="8229600" cy="502920"/>
+          </a:xfrm>
+          <a:prstGeom prst="rect">
+            <a:avLst/>
+          </a:prstGeom>
+          <a:noFill/>
+          <a:ln/>
+        </p:spPr>
+        <p:txBody>
+          <a:bodyPr wrap="square" rtlCol="0" anchor="ctr"/>
+          <a:lstStyle/>
+          <a:p>
+            <a:pPr marL="0" indent="0">
+              <a:buNone/>
+            </a:pPr>
+            <a:r>
+              <a:rPr lang="en-US" sz="2600" b="1" dirty="0">
                 <a:solidFill>
                   <a:srgbClr val="1C2541"/>
                 </a:solidFill>
@@ -4021,9 +3707,9 @@
                 <a:ea typeface="Cambria" pitchFamily="34" charset="-122"/>
                 <a:cs typeface="Cambria" pitchFamily="34" charset="-120"/>
               </a:rPr>
-              <a:t>Data Analysis</a:t>
-            </a:r>
-            <a:endParaRPr lang="en-US" sz="2800" dirty="0"/>
+              <a:t>Personas Extracted from Interviews</a:t>
+            </a:r>
+            <a:endParaRPr lang="en-US" sz="2600" dirty="0"/>
           </a:p>
         </p:txBody>
       </p:sp>
@@ -4035,34 +3721,23 @@
         </p:nvSpPr>
         <p:spPr>
           <a:xfrm>
-            <a:off x="640080" y="886968"/>
-            <a:ext cx="8229600" cy="320040"/>
-          </a:xfrm>
-          <a:prstGeom prst="rect">
-            <a:avLst/>
-          </a:prstGeom>
-          <a:noFill/>
-          <a:ln/>
-        </p:spPr>
-        <p:txBody>
-          <a:bodyPr wrap="square" rtlCol="0" anchor="ctr"/>
-          <a:lstStyle/>
-          <a:p>
-            <a:pPr indent="0" marL="0">
-              <a:buNone/>
-            </a:pPr>
-            <a:r>
-              <a:rPr lang="en-US" sz="1300" i="1" dirty="0">
-                <a:solidFill>
-                  <a:srgbClr val="5B6472"/>
-                </a:solidFill>
-                <a:latin typeface="Calibri" pitchFamily="34" charset="0"/>
-                <a:ea typeface="Calibri" pitchFamily="34" charset="-122"/>
-                <a:cs typeface="Calibri" pitchFamily="34" charset="-120"/>
-              </a:rPr>
-              <a:t>What the affinity map, across ~12 interviews, surfaced</a:t>
-            </a:r>
-            <a:endParaRPr lang="en-US" sz="1300" dirty="0"/>
+            <a:off x="640080" y="859536"/>
+            <a:ext cx="9144000" cy="320040"/>
+          </a:xfrm>
+          <a:prstGeom prst="rect">
+            <a:avLst/>
+          </a:prstGeom>
+          <a:noFill/>
+          <a:ln/>
+        </p:spPr>
+        <p:txBody>
+          <a:bodyPr wrap="square" rtlCol="0" anchor="ctr"/>
+          <a:lstStyle/>
+          <a:p>
+            <a:pPr marL="0" indent="0">
+              <a:buNone/>
+            </a:pPr>
+            <a:endParaRPr lang="en-US" sz="1250" dirty="0"/>
           </a:p>
         </p:txBody>
       </p:sp>
@@ -4074,12 +3749,12 @@
         </p:nvSpPr>
         <p:spPr>
           <a:xfrm>
-            <a:off x="640080" y="1417320"/>
-            <a:ext cx="2697480" cy="1170432"/>
+            <a:off x="640080" y="1371600"/>
+            <a:ext cx="5349240" cy="4800600"/>
           </a:xfrm>
           <a:prstGeom prst="roundRect">
             <a:avLst>
-              <a:gd name="adj" fmla="val 6250"/>
+              <a:gd name="adj" fmla="val 1905"/>
             </a:avLst>
           </a:prstGeom>
           <a:solidFill>
@@ -4087,6 +3762,13 @@
           </a:solidFill>
           <a:ln/>
         </p:spPr>
+        <p:txBody>
+          <a:bodyPr/>
+          <a:lstStyle/>
+          <a:p>
+            <a:endParaRPr lang="zh-CN" altLang="en-US" dirty="0"/>
+          </a:p>
+        </p:txBody>
       </p:sp>
       <p:sp>
         <p:nvSpPr>
@@ -4096,86 +3778,177 @@
         </p:nvSpPr>
         <p:spPr>
           <a:xfrm>
-            <a:off x="777240" y="1554480"/>
-            <a:ext cx="365760" cy="365760"/>
+            <a:off x="960120" y="1691640"/>
+            <a:ext cx="822960" cy="822960"/>
           </a:xfrm>
           <a:prstGeom prst="ellipse">
             <a:avLst/>
           </a:prstGeom>
           <a:solidFill>
-            <a:srgbClr val="D9782D"/>
+            <a:srgbClr val="1C2541"/>
           </a:solidFill>
           <a:ln/>
         </p:spPr>
-      </p:sp>
-      <p:sp>
-        <p:nvSpPr>
-          <p:cNvPr id="6" name="Text 4"/>
-          <p:cNvSpPr/>
-          <p:nvPr/>
-        </p:nvSpPr>
-        <p:spPr>
-          <a:xfrm>
-            <a:off x="777240" y="1554480"/>
-            <a:ext cx="365760" cy="365760"/>
-          </a:xfrm>
-          <a:prstGeom prst="rect">
-            <a:avLst/>
-          </a:prstGeom>
-          <a:noFill/>
-          <a:ln/>
-        </p:spPr>
-        <p:txBody>
-          <a:bodyPr wrap="square" rtlCol="0" anchor="ctr"/>
-          <a:lstStyle/>
-          <a:p>
-            <a:pPr algn="ctr" indent="0" marL="0">
-              <a:buNone/>
-            </a:pPr>
-            <a:r>
-              <a:rPr lang="en-US" sz="1300" b="1" dirty="0">
-                <a:solidFill>
-                  <a:srgbClr val="FFFFFF"/>
-                </a:solidFill>
-                <a:latin typeface="Calibri" pitchFamily="34" charset="0"/>
-                <a:ea typeface="Calibri" pitchFamily="34" charset="-122"/>
-                <a:cs typeface="Calibri" pitchFamily="34" charset="-120"/>
-              </a:rPr>
-              <a:t>1</a:t>
-            </a:r>
-            <a:endParaRPr lang="en-US" sz="1300" dirty="0"/>
-          </a:p>
-        </p:txBody>
-      </p:sp>
-      <p:sp>
-        <p:nvSpPr>
-          <p:cNvPr id="7" name="Text 5"/>
-          <p:cNvSpPr/>
-          <p:nvPr/>
-        </p:nvSpPr>
-        <p:spPr>
-          <a:xfrm>
-            <a:off x="777240" y="1984248"/>
-            <a:ext cx="2423160" cy="530352"/>
-          </a:xfrm>
-          <a:prstGeom prst="rect">
-            <a:avLst/>
-          </a:prstGeom>
-          <a:noFill/>
-          <a:ln/>
-        </p:spPr>
-        <p:txBody>
-          <a:bodyPr wrap="square" rtlCol="0" anchor="ctr"/>
-          <a:lstStyle/>
-          <a:p>
-            <a:pPr indent="0" marL="0">
+        <p:txBody>
+          <a:bodyPr/>
+          <a:lstStyle/>
+          <a:p>
+            <a:endParaRPr lang="zh-CN" altLang="en-US"/>
+          </a:p>
+        </p:txBody>
+      </p:sp>
+      <p:pic>
+        <p:nvPicPr>
+          <p:cNvPr id="6" name="Image 0" descr="/Users/devonma/Desktop/9106/Assignment/A2b/build/icons/users.png"/>
+          <p:cNvPicPr>
+            <a:picLocks noChangeAspect="1"/>
+          </p:cNvPicPr>
+          <p:nvPr/>
+        </p:nvPicPr>
+        <p:blipFill>
+          <a:blip r:embed="rId3"/>
+          <a:stretch>
+            <a:fillRect/>
+          </a:stretch>
+        </p:blipFill>
+        <p:spPr>
+          <a:xfrm>
+            <a:off x="1161288" y="1892808"/>
+            <a:ext cx="420624" cy="420624"/>
+          </a:xfrm>
+          <a:prstGeom prst="rect">
+            <a:avLst/>
+          </a:prstGeom>
+        </p:spPr>
+      </p:pic>
+      <p:sp>
+        <p:nvSpPr>
+          <p:cNvPr id="7" name="Text 4"/>
+          <p:cNvSpPr/>
+          <p:nvPr/>
+        </p:nvSpPr>
+        <p:spPr>
+          <a:xfrm>
+            <a:off x="1965960" y="1691640"/>
+            <a:ext cx="3794760" cy="256032"/>
+          </a:xfrm>
+          <a:prstGeom prst="rect">
+            <a:avLst/>
+          </a:prstGeom>
+          <a:noFill/>
+          <a:ln/>
+        </p:spPr>
+        <p:txBody>
+          <a:bodyPr wrap="square" rtlCol="0" anchor="ctr"/>
+          <a:lstStyle/>
+          <a:p>
+            <a:pPr marL="0" indent="0">
+              <a:buNone/>
+            </a:pPr>
+            <a:r>
+              <a:rPr lang="en-US" sz="1050" b="1" kern="0" spc="100" dirty="0">
+                <a:solidFill>
+                  <a:srgbClr val="D9782D"/>
+                </a:solidFill>
+                <a:latin typeface="Calibri" pitchFamily="34" charset="0"/>
+                <a:ea typeface="Calibri" pitchFamily="34" charset="-122"/>
+                <a:cs typeface="Calibri" pitchFamily="34" charset="-120"/>
+              </a:rPr>
+              <a:t>PERSONA 1</a:t>
+            </a:r>
+            <a:endParaRPr lang="en-US" sz="1050" dirty="0"/>
+          </a:p>
+        </p:txBody>
+      </p:sp>
+      <p:sp>
+        <p:nvSpPr>
+          <p:cNvPr id="8" name="Text 5"/>
+          <p:cNvSpPr/>
+          <p:nvPr/>
+        </p:nvSpPr>
+        <p:spPr>
+          <a:xfrm>
+            <a:off x="1965960" y="1920240"/>
+            <a:ext cx="3794760" cy="365760"/>
+          </a:xfrm>
+          <a:prstGeom prst="rect">
+            <a:avLst/>
+          </a:prstGeom>
+          <a:noFill/>
+          <a:ln/>
+        </p:spPr>
+        <p:txBody>
+          <a:bodyPr wrap="square" rtlCol="0" anchor="ctr"/>
+          <a:lstStyle/>
+          <a:p>
+            <a:pPr marL="0" indent="0">
+              <a:buNone/>
+            </a:pPr>
+            <a:r>
+              <a:rPr lang="en-US" dirty="0"/>
+              <a:t>The one need additional access but end with waiting quiet</a:t>
+            </a:r>
+            <a:endParaRPr lang="en-US" sz="1800" dirty="0"/>
+          </a:p>
+        </p:txBody>
+      </p:sp>
+      <p:sp>
+        <p:nvSpPr>
+          <p:cNvPr id="9" name="Text 6"/>
+          <p:cNvSpPr/>
+          <p:nvPr/>
+        </p:nvSpPr>
+        <p:spPr>
+          <a:xfrm>
+            <a:off x="1965960" y="2258568"/>
+            <a:ext cx="3794760" cy="320040"/>
+          </a:xfrm>
+          <a:prstGeom prst="rect">
+            <a:avLst/>
+          </a:prstGeom>
+          <a:noFill/>
+          <a:ln/>
+        </p:spPr>
+        <p:txBody>
+          <a:bodyPr wrap="square" rtlCol="0" anchor="ctr"/>
+          <a:lstStyle/>
+          <a:p>
+            <a:pPr marL="0" indent="0">
+              <a:buNone/>
+            </a:pPr>
+            <a:endParaRPr lang="en-US" sz="1100" dirty="0"/>
+          </a:p>
+        </p:txBody>
+      </p:sp>
+      <p:sp>
+        <p:nvSpPr>
+          <p:cNvPr id="10" name="Text 7"/>
+          <p:cNvSpPr/>
+          <p:nvPr/>
+        </p:nvSpPr>
+        <p:spPr>
+          <a:xfrm>
+            <a:off x="960120" y="2743200"/>
+            <a:ext cx="4709160" cy="960120"/>
+          </a:xfrm>
+          <a:prstGeom prst="rect">
+            <a:avLst/>
+          </a:prstGeom>
+          <a:noFill/>
+          <a:ln/>
+        </p:spPr>
+        <p:txBody>
+          <a:bodyPr wrap="square" rtlCol="0" anchor="ctr"/>
+          <a:lstStyle/>
+          <a:p>
+            <a:pPr marL="0" indent="0">
               <a:lnSpc>
-                <a:spcPct val="105000"/>
+                <a:spcPct val="115000"/>
               </a:lnSpc>
               <a:buNone/>
             </a:pPr>
             <a:r>
-              <a:rPr lang="en-US" sz="1050" dirty="0">
+              <a:rPr lang="en-US" sz="1600" dirty="0">
                 <a:solidFill>
                   <a:srgbClr val="222831"/>
                 </a:solidFill>
@@ -4183,26 +3956,150 @@
                 <a:ea typeface="Calibri" pitchFamily="34" charset="-122"/>
                 <a:cs typeface="Calibri" pitchFamily="34" charset="-120"/>
               </a:rPr>
-              <a:t>Unclear standards for how issues are detected and resolved</a:t>
-            </a:r>
-            <a:endParaRPr lang="en-US" sz="1050" dirty="0"/>
-          </a:p>
-        </p:txBody>
-      </p:sp>
-      <p:sp>
-        <p:nvSpPr>
-          <p:cNvPr id="8" name="Shape 6"/>
-          <p:cNvSpPr/>
-          <p:nvPr/>
-        </p:nvSpPr>
-        <p:spPr>
-          <a:xfrm>
-            <a:off x="3502152" y="1417320"/>
-            <a:ext cx="2697480" cy="1170432"/>
+              <a:t>Has lived in many countries, mostly in apartments near campus; meets repair problems occasionally. He rarely report issues to the building management.</a:t>
+            </a:r>
+            <a:endParaRPr lang="en-US" sz="1600" dirty="0"/>
+          </a:p>
+        </p:txBody>
+      </p:sp>
+      <p:sp>
+        <p:nvSpPr>
+          <p:cNvPr id="11" name="Text 8"/>
+          <p:cNvSpPr/>
+          <p:nvPr/>
+        </p:nvSpPr>
+        <p:spPr>
+          <a:xfrm>
+            <a:off x="960120" y="3749040"/>
+            <a:ext cx="4709160" cy="1051560"/>
+          </a:xfrm>
+          <a:prstGeom prst="rect">
+            <a:avLst/>
+          </a:prstGeom>
+          <a:noFill/>
+          <a:ln/>
+        </p:spPr>
+        <p:txBody>
+          <a:bodyPr wrap="square" rtlCol="0" anchor="ctr"/>
+          <a:lstStyle/>
+          <a:p>
+            <a:pPr marL="0" indent="0">
+              <a:lnSpc>
+                <a:spcPct val="115000"/>
+              </a:lnSpc>
+              <a:buNone/>
+            </a:pPr>
+            <a:r>
+              <a:rPr lang="en-US" sz="1200" b="1" dirty="0">
+                <a:solidFill>
+                  <a:srgbClr val="1C2541"/>
+                </a:solidFill>
+                <a:latin typeface="Calibri" pitchFamily="34" charset="0"/>
+                <a:ea typeface="Calibri" pitchFamily="34" charset="-122"/>
+                <a:cs typeface="Calibri" pitchFamily="34" charset="-120"/>
+              </a:rPr>
+              <a:t>Frustration  </a:t>
+            </a:r>
+            <a:r>
+              <a:rPr lang="en-US" sz="1200" dirty="0">
+                <a:solidFill>
+                  <a:srgbClr val="222831"/>
+                </a:solidFill>
+                <a:latin typeface="Calibri" pitchFamily="34" charset="0"/>
+                <a:ea typeface="Calibri" pitchFamily="34" charset="-122"/>
+                <a:cs typeface="Calibri" pitchFamily="34" charset="-120"/>
+              </a:rPr>
+              <a:t>Doesn’t know who’s responsible or whether asking again would help — nothing is ever confirmed, so continuing to raise it starts to feel pointless.</a:t>
+            </a:r>
+            <a:endParaRPr lang="en-US" sz="1200" dirty="0"/>
+          </a:p>
+        </p:txBody>
+      </p:sp>
+      <p:sp>
+        <p:nvSpPr>
+          <p:cNvPr id="12" name="Shape 9"/>
+          <p:cNvSpPr/>
+          <p:nvPr/>
+        </p:nvSpPr>
+        <p:spPr>
+          <a:xfrm>
+            <a:off x="960120" y="4892040"/>
+            <a:ext cx="4709160" cy="1051560"/>
           </a:xfrm>
           <a:prstGeom prst="roundRect">
             <a:avLst>
-              <a:gd name="adj" fmla="val 6250"/>
+              <a:gd name="adj" fmla="val 5217"/>
+            </a:avLst>
+          </a:prstGeom>
+          <a:solidFill>
+            <a:srgbClr val="1C2541"/>
+          </a:solidFill>
+          <a:ln/>
+        </p:spPr>
+        <p:txBody>
+          <a:bodyPr/>
+          <a:lstStyle/>
+          <a:p>
+            <a:endParaRPr lang="zh-CN" altLang="en-US"/>
+          </a:p>
+        </p:txBody>
+      </p:sp>
+      <p:sp>
+        <p:nvSpPr>
+          <p:cNvPr id="13" name="Text 10"/>
+          <p:cNvSpPr/>
+          <p:nvPr/>
+        </p:nvSpPr>
+        <p:spPr>
+          <a:xfrm>
+            <a:off x="1143000" y="4956048"/>
+            <a:ext cx="4343400" cy="914400"/>
+          </a:xfrm>
+          <a:prstGeom prst="rect">
+            <a:avLst/>
+          </a:prstGeom>
+          <a:noFill/>
+          <a:ln/>
+        </p:spPr>
+        <p:txBody>
+          <a:bodyPr wrap="square" rtlCol="0" anchor="ctr"/>
+          <a:lstStyle/>
+          <a:p>
+            <a:pPr marL="0" indent="0">
+              <a:lnSpc>
+                <a:spcPct val="115000"/>
+              </a:lnSpc>
+              <a:buNone/>
+            </a:pPr>
+            <a:r>
+              <a:rPr lang="en-US" sz="1100" i="1" dirty="0">
+                <a:solidFill>
+                  <a:srgbClr val="FFFFFF"/>
+                </a:solidFill>
+                <a:latin typeface="Cambria" pitchFamily="34" charset="0"/>
+                <a:ea typeface="Cambria" pitchFamily="34" charset="-122"/>
+                <a:cs typeface="Cambria" pitchFamily="34" charset="-120"/>
+              </a:rPr>
+              <a:t>“I reported it once. After that I just stopped asking, I didn’t know who to ask, or if it would even matter.”</a:t>
+            </a:r>
+            <a:endParaRPr lang="en-US" sz="1100" dirty="0"/>
+          </a:p>
+        </p:txBody>
+      </p:sp>
+      <p:sp>
+        <p:nvSpPr>
+          <p:cNvPr id="14" name="Shape 11"/>
+          <p:cNvSpPr/>
+          <p:nvPr/>
+        </p:nvSpPr>
+        <p:spPr>
+          <a:xfrm>
+            <a:off x="6217920" y="1371600"/>
+            <a:ext cx="5349240" cy="4800600"/>
+          </a:xfrm>
+          <a:prstGeom prst="roundRect">
+            <a:avLst>
+              <a:gd name="adj" fmla="val 1905"/>
             </a:avLst>
           </a:prstGeom>
           <a:solidFill>
@@ -4210,801 +4107,291 @@
           </a:solidFill>
           <a:ln/>
         </p:spPr>
-      </p:sp>
-      <p:sp>
-        <p:nvSpPr>
-          <p:cNvPr id="9" name="Shape 7"/>
-          <p:cNvSpPr/>
-          <p:nvPr/>
-        </p:nvSpPr>
-        <p:spPr>
-          <a:xfrm>
-            <a:off x="3639312" y="1554480"/>
-            <a:ext cx="365760" cy="365760"/>
+        <p:txBody>
+          <a:bodyPr/>
+          <a:lstStyle/>
+          <a:p>
+            <a:endParaRPr lang="zh-CN" altLang="en-US"/>
+          </a:p>
+        </p:txBody>
+      </p:sp>
+      <p:sp>
+        <p:nvSpPr>
+          <p:cNvPr id="15" name="Shape 12"/>
+          <p:cNvSpPr/>
+          <p:nvPr/>
+        </p:nvSpPr>
+        <p:spPr>
+          <a:xfrm>
+            <a:off x="6537960" y="1691640"/>
+            <a:ext cx="822960" cy="822960"/>
           </a:xfrm>
           <a:prstGeom prst="ellipse">
             <a:avLst/>
-          </a:prstGeom>
-          <a:solidFill>
-            <a:srgbClr val="D9782D"/>
-          </a:solidFill>
-          <a:ln/>
-        </p:spPr>
-      </p:sp>
-      <p:sp>
-        <p:nvSpPr>
-          <p:cNvPr id="10" name="Text 8"/>
-          <p:cNvSpPr/>
-          <p:nvPr/>
-        </p:nvSpPr>
-        <p:spPr>
-          <a:xfrm>
-            <a:off x="3639312" y="1554480"/>
-            <a:ext cx="365760" cy="365760"/>
-          </a:xfrm>
-          <a:prstGeom prst="rect">
-            <a:avLst/>
-          </a:prstGeom>
-          <a:noFill/>
-          <a:ln/>
-        </p:spPr>
-        <p:txBody>
-          <a:bodyPr wrap="square" rtlCol="0" anchor="ctr"/>
-          <a:lstStyle/>
-          <a:p>
-            <a:pPr algn="ctr" indent="0" marL="0">
-              <a:buNone/>
-            </a:pPr>
-            <a:r>
-              <a:rPr lang="en-US" sz="1300" b="1" dirty="0">
-                <a:solidFill>
-                  <a:srgbClr val="FFFFFF"/>
-                </a:solidFill>
-                <a:latin typeface="Calibri" pitchFamily="34" charset="0"/>
-                <a:ea typeface="Calibri" pitchFamily="34" charset="-122"/>
-                <a:cs typeface="Calibri" pitchFamily="34" charset="-120"/>
-              </a:rPr>
-              <a:t>2</a:t>
-            </a:r>
-            <a:endParaRPr lang="en-US" sz="1300" dirty="0"/>
-          </a:p>
-        </p:txBody>
-      </p:sp>
-      <p:sp>
-        <p:nvSpPr>
-          <p:cNvPr id="11" name="Text 9"/>
-          <p:cNvSpPr/>
-          <p:nvPr/>
-        </p:nvSpPr>
-        <p:spPr>
-          <a:xfrm>
-            <a:off x="3639312" y="1984248"/>
-            <a:ext cx="2423160" cy="530352"/>
-          </a:xfrm>
-          <a:prstGeom prst="rect">
-            <a:avLst/>
-          </a:prstGeom>
-          <a:noFill/>
-          <a:ln/>
-        </p:spPr>
-        <p:txBody>
-          <a:bodyPr wrap="square" rtlCol="0" anchor="ctr"/>
-          <a:lstStyle/>
-          <a:p>
-            <a:pPr indent="0" marL="0">
-              <a:lnSpc>
-                <a:spcPct val="105000"/>
-              </a:lnSpc>
-              <a:buNone/>
-            </a:pPr>
-            <a:r>
-              <a:rPr lang="en-US" sz="1050" dirty="0">
-                <a:solidFill>
-                  <a:srgbClr val="222831"/>
-                </a:solidFill>
-                <a:latin typeface="Calibri" pitchFamily="34" charset="0"/>
-                <a:ea typeface="Calibri" pitchFamily="34" charset="-122"/>
-                <a:cs typeface="Calibri" pitchFamily="34" charset="-120"/>
-              </a:rPr>
-              <a:t>The wait disrupts other plans in residents’ lives</a:t>
-            </a:r>
-            <a:endParaRPr lang="en-US" sz="1050" dirty="0"/>
-          </a:p>
-        </p:txBody>
-      </p:sp>
-      <p:sp>
-        <p:nvSpPr>
-          <p:cNvPr id="12" name="Shape 10"/>
-          <p:cNvSpPr/>
-          <p:nvPr/>
-        </p:nvSpPr>
-        <p:spPr>
-          <a:xfrm>
-            <a:off x="6364224" y="1417320"/>
-            <a:ext cx="2697480" cy="1170432"/>
-          </a:xfrm>
-          <a:prstGeom prst="roundRect">
-            <a:avLst>
-              <a:gd name="adj" fmla="val 6250"/>
-            </a:avLst>
-          </a:prstGeom>
-          <a:solidFill>
-            <a:srgbClr val="F4F5F7"/>
-          </a:solidFill>
-          <a:ln/>
-        </p:spPr>
-      </p:sp>
-      <p:sp>
-        <p:nvSpPr>
-          <p:cNvPr id="13" name="Shape 11"/>
-          <p:cNvSpPr/>
-          <p:nvPr/>
-        </p:nvSpPr>
-        <p:spPr>
-          <a:xfrm>
-            <a:off x="6501384" y="1554480"/>
-            <a:ext cx="365760" cy="365760"/>
-          </a:xfrm>
-          <a:prstGeom prst="ellipse">
-            <a:avLst/>
-          </a:prstGeom>
-          <a:solidFill>
-            <a:srgbClr val="D9782D"/>
-          </a:solidFill>
-          <a:ln/>
-        </p:spPr>
-      </p:sp>
-      <p:sp>
-        <p:nvSpPr>
-          <p:cNvPr id="14" name="Text 12"/>
-          <p:cNvSpPr/>
-          <p:nvPr/>
-        </p:nvSpPr>
-        <p:spPr>
-          <a:xfrm>
-            <a:off x="6501384" y="1554480"/>
-            <a:ext cx="365760" cy="365760"/>
-          </a:xfrm>
-          <a:prstGeom prst="rect">
-            <a:avLst/>
-          </a:prstGeom>
-          <a:noFill/>
-          <a:ln/>
-        </p:spPr>
-        <p:txBody>
-          <a:bodyPr wrap="square" rtlCol="0" anchor="ctr"/>
-          <a:lstStyle/>
-          <a:p>
-            <a:pPr algn="ctr" indent="0" marL="0">
-              <a:buNone/>
-            </a:pPr>
-            <a:r>
-              <a:rPr lang="en-US" sz="1300" b="1" dirty="0">
-                <a:solidFill>
-                  <a:srgbClr val="FFFFFF"/>
-                </a:solidFill>
-                <a:latin typeface="Calibri" pitchFamily="34" charset="0"/>
-                <a:ea typeface="Calibri" pitchFamily="34" charset="-122"/>
-                <a:cs typeface="Calibri" pitchFamily="34" charset="-120"/>
-              </a:rPr>
-              <a:t>3</a:t>
-            </a:r>
-            <a:endParaRPr lang="en-US" sz="1300" dirty="0"/>
-          </a:p>
-        </p:txBody>
-      </p:sp>
-      <p:sp>
-        <p:nvSpPr>
-          <p:cNvPr id="15" name="Text 13"/>
-          <p:cNvSpPr/>
-          <p:nvPr/>
-        </p:nvSpPr>
-        <p:spPr>
-          <a:xfrm>
-            <a:off x="6501384" y="1984248"/>
-            <a:ext cx="2423160" cy="530352"/>
-          </a:xfrm>
-          <a:prstGeom prst="rect">
-            <a:avLst/>
-          </a:prstGeom>
-          <a:noFill/>
-          <a:ln/>
-        </p:spPr>
-        <p:txBody>
-          <a:bodyPr wrap="square" rtlCol="0" anchor="ctr"/>
-          <a:lstStyle/>
-          <a:p>
-            <a:pPr indent="0" marL="0">
-              <a:lnSpc>
-                <a:spcPct val="105000"/>
-              </a:lnSpc>
-              <a:buNone/>
-            </a:pPr>
-            <a:r>
-              <a:rPr lang="en-US" sz="1050" dirty="0">
-                <a:solidFill>
-                  <a:srgbClr val="222831"/>
-                </a:solidFill>
-                <a:latin typeface="Calibri" pitchFamily="34" charset="0"/>
-                <a:ea typeface="Calibri" pitchFamily="34" charset="-122"/>
-                <a:cs typeface="Calibri" pitchFamily="34" charset="-120"/>
-              </a:rPr>
-              <a:t>Status is never updated</a:t>
-            </a:r>
-            <a:endParaRPr lang="en-US" sz="1050" dirty="0"/>
-          </a:p>
-        </p:txBody>
-      </p:sp>
-      <p:sp>
-        <p:nvSpPr>
-          <p:cNvPr id="16" name="Shape 14"/>
-          <p:cNvSpPr/>
-          <p:nvPr/>
-        </p:nvSpPr>
-        <p:spPr>
-          <a:xfrm>
-            <a:off x="9226296" y="1417320"/>
-            <a:ext cx="2697480" cy="1170432"/>
-          </a:xfrm>
-          <a:prstGeom prst="roundRect">
-            <a:avLst>
-              <a:gd name="adj" fmla="val 6250"/>
-            </a:avLst>
-          </a:prstGeom>
-          <a:solidFill>
-            <a:srgbClr val="F4F5F7"/>
-          </a:solidFill>
-          <a:ln/>
-        </p:spPr>
-      </p:sp>
-      <p:sp>
-        <p:nvSpPr>
-          <p:cNvPr id="17" name="Shape 15"/>
-          <p:cNvSpPr/>
-          <p:nvPr/>
-        </p:nvSpPr>
-        <p:spPr>
-          <a:xfrm>
-            <a:off x="9363456" y="1554480"/>
-            <a:ext cx="365760" cy="365760"/>
-          </a:xfrm>
-          <a:prstGeom prst="ellipse">
-            <a:avLst/>
-          </a:prstGeom>
-          <a:solidFill>
-            <a:srgbClr val="D9782D"/>
-          </a:solidFill>
-          <a:ln/>
-        </p:spPr>
-      </p:sp>
-      <p:sp>
-        <p:nvSpPr>
-          <p:cNvPr id="18" name="Text 16"/>
-          <p:cNvSpPr/>
-          <p:nvPr/>
-        </p:nvSpPr>
-        <p:spPr>
-          <a:xfrm>
-            <a:off x="9363456" y="1554480"/>
-            <a:ext cx="365760" cy="365760"/>
-          </a:xfrm>
-          <a:prstGeom prst="rect">
-            <a:avLst/>
-          </a:prstGeom>
-          <a:noFill/>
-          <a:ln/>
-        </p:spPr>
-        <p:txBody>
-          <a:bodyPr wrap="square" rtlCol="0" anchor="ctr"/>
-          <a:lstStyle/>
-          <a:p>
-            <a:pPr algn="ctr" indent="0" marL="0">
-              <a:buNone/>
-            </a:pPr>
-            <a:r>
-              <a:rPr lang="en-US" sz="1300" b="1" dirty="0">
-                <a:solidFill>
-                  <a:srgbClr val="FFFFFF"/>
-                </a:solidFill>
-                <a:latin typeface="Calibri" pitchFamily="34" charset="0"/>
-                <a:ea typeface="Calibri" pitchFamily="34" charset="-122"/>
-                <a:cs typeface="Calibri" pitchFamily="34" charset="-120"/>
-              </a:rPr>
-              <a:t>4</a:t>
-            </a:r>
-            <a:endParaRPr lang="en-US" sz="1300" dirty="0"/>
-          </a:p>
-        </p:txBody>
-      </p:sp>
-      <p:sp>
-        <p:nvSpPr>
-          <p:cNvPr id="19" name="Text 17"/>
-          <p:cNvSpPr/>
-          <p:nvPr/>
-        </p:nvSpPr>
-        <p:spPr>
-          <a:xfrm>
-            <a:off x="9363456" y="1984248"/>
-            <a:ext cx="2423160" cy="530352"/>
-          </a:xfrm>
-          <a:prstGeom prst="rect">
-            <a:avLst/>
-          </a:prstGeom>
-          <a:noFill/>
-          <a:ln/>
-        </p:spPr>
-        <p:txBody>
-          <a:bodyPr wrap="square" rtlCol="0" anchor="ctr"/>
-          <a:lstStyle/>
-          <a:p>
-            <a:pPr indent="0" marL="0">
-              <a:lnSpc>
-                <a:spcPct val="105000"/>
-              </a:lnSpc>
-              <a:buNone/>
-            </a:pPr>
-            <a:r>
-              <a:rPr lang="en-US" sz="1050" dirty="0">
-                <a:solidFill>
-                  <a:srgbClr val="222831"/>
-                </a:solidFill>
-                <a:latin typeface="Calibri" pitchFamily="34" charset="0"/>
-                <a:ea typeface="Calibri" pitchFamily="34" charset="-122"/>
-                <a:cs typeface="Calibri" pitchFamily="34" charset="-120"/>
-              </a:rPr>
-              <a:t>Waits run longer than residents were led to expect</a:t>
-            </a:r>
-            <a:endParaRPr lang="en-US" sz="1050" dirty="0"/>
-          </a:p>
-        </p:txBody>
-      </p:sp>
-      <p:sp>
-        <p:nvSpPr>
-          <p:cNvPr id="20" name="Shape 18"/>
-          <p:cNvSpPr/>
-          <p:nvPr/>
-        </p:nvSpPr>
-        <p:spPr>
-          <a:xfrm>
-            <a:off x="640080" y="2752344"/>
-            <a:ext cx="2697480" cy="1170432"/>
-          </a:xfrm>
-          <a:prstGeom prst="roundRect">
-            <a:avLst>
-              <a:gd name="adj" fmla="val 6250"/>
-            </a:avLst>
-          </a:prstGeom>
-          <a:solidFill>
-            <a:srgbClr val="F4F5F7"/>
-          </a:solidFill>
-          <a:ln/>
-        </p:spPr>
-      </p:sp>
-      <p:sp>
-        <p:nvSpPr>
-          <p:cNvPr id="21" name="Shape 19"/>
-          <p:cNvSpPr/>
-          <p:nvPr/>
-        </p:nvSpPr>
-        <p:spPr>
-          <a:xfrm>
-            <a:off x="777240" y="2889504"/>
-            <a:ext cx="365760" cy="365760"/>
-          </a:xfrm>
-          <a:prstGeom prst="ellipse">
-            <a:avLst/>
-          </a:prstGeom>
-          <a:solidFill>
-            <a:srgbClr val="D9782D"/>
-          </a:solidFill>
-          <a:ln/>
-        </p:spPr>
-      </p:sp>
-      <p:sp>
-        <p:nvSpPr>
-          <p:cNvPr id="22" name="Text 20"/>
-          <p:cNvSpPr/>
-          <p:nvPr/>
-        </p:nvSpPr>
-        <p:spPr>
-          <a:xfrm>
-            <a:off x="777240" y="2889504"/>
-            <a:ext cx="365760" cy="365760"/>
-          </a:xfrm>
-          <a:prstGeom prst="rect">
-            <a:avLst/>
-          </a:prstGeom>
-          <a:noFill/>
-          <a:ln/>
-        </p:spPr>
-        <p:txBody>
-          <a:bodyPr wrap="square" rtlCol="0" anchor="ctr"/>
-          <a:lstStyle/>
-          <a:p>
-            <a:pPr algn="ctr" indent="0" marL="0">
-              <a:buNone/>
-            </a:pPr>
-            <a:r>
-              <a:rPr lang="en-US" sz="1300" b="1" dirty="0">
-                <a:solidFill>
-                  <a:srgbClr val="FFFFFF"/>
-                </a:solidFill>
-                <a:latin typeface="Calibri" pitchFamily="34" charset="0"/>
-                <a:ea typeface="Calibri" pitchFamily="34" charset="-122"/>
-                <a:cs typeface="Calibri" pitchFamily="34" charset="-120"/>
-              </a:rPr>
-              <a:t>5</a:t>
-            </a:r>
-            <a:endParaRPr lang="en-US" sz="1300" dirty="0"/>
-          </a:p>
-        </p:txBody>
-      </p:sp>
-      <p:sp>
-        <p:nvSpPr>
-          <p:cNvPr id="23" name="Text 21"/>
-          <p:cNvSpPr/>
-          <p:nvPr/>
-        </p:nvSpPr>
-        <p:spPr>
-          <a:xfrm>
-            <a:off x="777240" y="3319272"/>
-            <a:ext cx="2423160" cy="530352"/>
-          </a:xfrm>
-          <a:prstGeom prst="rect">
-            <a:avLst/>
-          </a:prstGeom>
-          <a:noFill/>
-          <a:ln/>
-        </p:spPr>
-        <p:txBody>
-          <a:bodyPr wrap="square" rtlCol="0" anchor="ctr"/>
-          <a:lstStyle/>
-          <a:p>
-            <a:pPr indent="0" marL="0">
-              <a:lnSpc>
-                <a:spcPct val="105000"/>
-              </a:lnSpc>
-              <a:buNone/>
-            </a:pPr>
-            <a:r>
-              <a:rPr lang="en-US" sz="1050" dirty="0">
-                <a:solidFill>
-                  <a:srgbClr val="222831"/>
-                </a:solidFill>
-                <a:latin typeface="Calibri" pitchFamily="34" charset="0"/>
-                <a:ea typeface="Calibri" pitchFamily="34" charset="-122"/>
-                <a:cs typeface="Calibri" pitchFamily="34" charset="-120"/>
-              </a:rPr>
-              <a:t>Replies are unhelpful, or there’s no reply at all</a:t>
-            </a:r>
-            <a:endParaRPr lang="en-US" sz="1050" dirty="0"/>
-          </a:p>
-        </p:txBody>
-      </p:sp>
-      <p:sp>
-        <p:nvSpPr>
-          <p:cNvPr id="24" name="Shape 22"/>
-          <p:cNvSpPr/>
-          <p:nvPr/>
-        </p:nvSpPr>
-        <p:spPr>
-          <a:xfrm>
-            <a:off x="3502152" y="2752344"/>
-            <a:ext cx="2697480" cy="1170432"/>
-          </a:xfrm>
-          <a:prstGeom prst="roundRect">
-            <a:avLst>
-              <a:gd name="adj" fmla="val 6250"/>
-            </a:avLst>
-          </a:prstGeom>
-          <a:solidFill>
-            <a:srgbClr val="F4F5F7"/>
-          </a:solidFill>
-          <a:ln/>
-        </p:spPr>
-      </p:sp>
-      <p:sp>
-        <p:nvSpPr>
-          <p:cNvPr id="25" name="Shape 23"/>
-          <p:cNvSpPr/>
-          <p:nvPr/>
-        </p:nvSpPr>
-        <p:spPr>
-          <a:xfrm>
-            <a:off x="3639312" y="2889504"/>
-            <a:ext cx="365760" cy="365760"/>
-          </a:xfrm>
-          <a:prstGeom prst="ellipse">
-            <a:avLst/>
-          </a:prstGeom>
-          <a:solidFill>
-            <a:srgbClr val="D9782D"/>
-          </a:solidFill>
-          <a:ln/>
-        </p:spPr>
-      </p:sp>
-      <p:sp>
-        <p:nvSpPr>
-          <p:cNvPr id="26" name="Text 24"/>
-          <p:cNvSpPr/>
-          <p:nvPr/>
-        </p:nvSpPr>
-        <p:spPr>
-          <a:xfrm>
-            <a:off x="3639312" y="2889504"/>
-            <a:ext cx="365760" cy="365760"/>
-          </a:xfrm>
-          <a:prstGeom prst="rect">
-            <a:avLst/>
-          </a:prstGeom>
-          <a:noFill/>
-          <a:ln/>
-        </p:spPr>
-        <p:txBody>
-          <a:bodyPr wrap="square" rtlCol="0" anchor="ctr"/>
-          <a:lstStyle/>
-          <a:p>
-            <a:pPr algn="ctr" indent="0" marL="0">
-              <a:buNone/>
-            </a:pPr>
-            <a:r>
-              <a:rPr lang="en-US" sz="1300" b="1" dirty="0">
-                <a:solidFill>
-                  <a:srgbClr val="FFFFFF"/>
-                </a:solidFill>
-                <a:latin typeface="Calibri" pitchFamily="34" charset="0"/>
-                <a:ea typeface="Calibri" pitchFamily="34" charset="-122"/>
-                <a:cs typeface="Calibri" pitchFamily="34" charset="-120"/>
-              </a:rPr>
-              <a:t>6</a:t>
-            </a:r>
-            <a:endParaRPr lang="en-US" sz="1300" dirty="0"/>
-          </a:p>
-        </p:txBody>
-      </p:sp>
-      <p:sp>
-        <p:nvSpPr>
-          <p:cNvPr id="27" name="Text 25"/>
-          <p:cNvSpPr/>
-          <p:nvPr/>
-        </p:nvSpPr>
-        <p:spPr>
-          <a:xfrm>
-            <a:off x="3639312" y="3319272"/>
-            <a:ext cx="2423160" cy="530352"/>
-          </a:xfrm>
-          <a:prstGeom prst="rect">
-            <a:avLst/>
-          </a:prstGeom>
-          <a:noFill/>
-          <a:ln/>
-        </p:spPr>
-        <p:txBody>
-          <a:bodyPr wrap="square" rtlCol="0" anchor="ctr"/>
-          <a:lstStyle/>
-          <a:p>
-            <a:pPr indent="0" marL="0">
-              <a:lnSpc>
-                <a:spcPct val="105000"/>
-              </a:lnSpc>
-              <a:buNone/>
-            </a:pPr>
-            <a:r>
-              <a:rPr lang="en-US" sz="1050" dirty="0">
-                <a:solidFill>
-                  <a:srgbClr val="222831"/>
-                </a:solidFill>
-                <a:latin typeface="Calibri" pitchFamily="34" charset="0"/>
-                <a:ea typeface="Calibri" pitchFamily="34" charset="-122"/>
-                <a:cs typeface="Calibri" pitchFamily="34" charset="-120"/>
-              </a:rPr>
-              <a:t>Who’s actually responsible is unclear</a:t>
-            </a:r>
-            <a:endParaRPr lang="en-US" sz="1050" dirty="0"/>
-          </a:p>
-        </p:txBody>
-      </p:sp>
-      <p:sp>
-        <p:nvSpPr>
-          <p:cNvPr id="28" name="Shape 26"/>
-          <p:cNvSpPr/>
-          <p:nvPr/>
-        </p:nvSpPr>
-        <p:spPr>
-          <a:xfrm>
-            <a:off x="6364224" y="2752344"/>
-            <a:ext cx="2697480" cy="1170432"/>
-          </a:xfrm>
-          <a:prstGeom prst="roundRect">
-            <a:avLst>
-              <a:gd name="adj" fmla="val 6250"/>
-            </a:avLst>
-          </a:prstGeom>
-          <a:solidFill>
-            <a:srgbClr val="F4F5F7"/>
-          </a:solidFill>
-          <a:ln/>
-        </p:spPr>
-      </p:sp>
-      <p:sp>
-        <p:nvSpPr>
-          <p:cNvPr id="29" name="Shape 27"/>
-          <p:cNvSpPr/>
-          <p:nvPr/>
-        </p:nvSpPr>
-        <p:spPr>
-          <a:xfrm>
-            <a:off x="6501384" y="2889504"/>
-            <a:ext cx="365760" cy="365760"/>
-          </a:xfrm>
-          <a:prstGeom prst="ellipse">
-            <a:avLst/>
-          </a:prstGeom>
-          <a:solidFill>
-            <a:srgbClr val="D9782D"/>
-          </a:solidFill>
-          <a:ln/>
-        </p:spPr>
-      </p:sp>
-      <p:sp>
-        <p:nvSpPr>
-          <p:cNvPr id="30" name="Text 28"/>
-          <p:cNvSpPr/>
-          <p:nvPr/>
-        </p:nvSpPr>
-        <p:spPr>
-          <a:xfrm>
-            <a:off x="6501384" y="2889504"/>
-            <a:ext cx="365760" cy="365760"/>
-          </a:xfrm>
-          <a:prstGeom prst="rect">
-            <a:avLst/>
-          </a:prstGeom>
-          <a:noFill/>
-          <a:ln/>
-        </p:spPr>
-        <p:txBody>
-          <a:bodyPr wrap="square" rtlCol="0" anchor="ctr"/>
-          <a:lstStyle/>
-          <a:p>
-            <a:pPr algn="ctr" indent="0" marL="0">
-              <a:buNone/>
-            </a:pPr>
-            <a:r>
-              <a:rPr lang="en-US" sz="1300" b="1" dirty="0">
-                <a:solidFill>
-                  <a:srgbClr val="FFFFFF"/>
-                </a:solidFill>
-                <a:latin typeface="Calibri" pitchFamily="34" charset="0"/>
-                <a:ea typeface="Calibri" pitchFamily="34" charset="-122"/>
-                <a:cs typeface="Calibri" pitchFamily="34" charset="-120"/>
-              </a:rPr>
-              <a:t>7</a:t>
-            </a:r>
-            <a:endParaRPr lang="en-US" sz="1300" dirty="0"/>
-          </a:p>
-        </p:txBody>
-      </p:sp>
-      <p:sp>
-        <p:nvSpPr>
-          <p:cNvPr id="31" name="Text 29"/>
-          <p:cNvSpPr/>
-          <p:nvPr/>
-        </p:nvSpPr>
-        <p:spPr>
-          <a:xfrm>
-            <a:off x="6501384" y="3319272"/>
-            <a:ext cx="2423160" cy="530352"/>
-          </a:xfrm>
-          <a:prstGeom prst="rect">
-            <a:avLst/>
-          </a:prstGeom>
-          <a:noFill/>
-          <a:ln/>
-        </p:spPr>
-        <p:txBody>
-          <a:bodyPr wrap="square" rtlCol="0" anchor="ctr"/>
-          <a:lstStyle/>
-          <a:p>
-            <a:pPr indent="0" marL="0">
-              <a:lnSpc>
-                <a:spcPct val="105000"/>
-              </a:lnSpc>
-              <a:buNone/>
-            </a:pPr>
-            <a:r>
-              <a:rPr lang="en-US" sz="1050" dirty="0">
-                <a:solidFill>
-                  <a:srgbClr val="222831"/>
-                </a:solidFill>
-                <a:latin typeface="Calibri" pitchFamily="34" charset="0"/>
-                <a:ea typeface="Calibri" pitchFamily="34" charset="-122"/>
-                <a:cs typeface="Calibri" pitchFamily="34" charset="-120"/>
-              </a:rPr>
-              <a:t>Residents check status repeatedly, with no better information each time</a:t>
-            </a:r>
-            <a:endParaRPr lang="en-US" sz="1050" dirty="0"/>
-          </a:p>
-        </p:txBody>
-      </p:sp>
-      <p:sp>
-        <p:nvSpPr>
-          <p:cNvPr id="32" name="Shape 30"/>
-          <p:cNvSpPr/>
-          <p:nvPr/>
-        </p:nvSpPr>
-        <p:spPr>
-          <a:xfrm>
-            <a:off x="640080" y="4142232"/>
-            <a:ext cx="2697480" cy="850392"/>
-          </a:xfrm>
-          <a:prstGeom prst="roundRect">
-            <a:avLst>
-              <a:gd name="adj" fmla="val 8602"/>
-            </a:avLst>
           </a:prstGeom>
           <a:solidFill>
             <a:srgbClr val="1C2541"/>
           </a:solidFill>
           <a:ln/>
         </p:spPr>
-      </p:sp>
-      <p:sp>
-        <p:nvSpPr>
-          <p:cNvPr id="33" name="Text 31"/>
-          <p:cNvSpPr/>
-          <p:nvPr/>
-        </p:nvSpPr>
-        <p:spPr>
-          <a:xfrm>
-            <a:off x="777240" y="4251960"/>
-            <a:ext cx="2423160" cy="548640"/>
-          </a:xfrm>
-          <a:prstGeom prst="rect">
-            <a:avLst/>
-          </a:prstGeom>
-          <a:noFill/>
-          <a:ln/>
-        </p:spPr>
-        <p:txBody>
-          <a:bodyPr wrap="square" rtlCol="0" anchor="ctr"/>
-          <a:lstStyle/>
-          <a:p>
-            <a:pPr indent="0" marL="0">
+        <p:txBody>
+          <a:bodyPr/>
+          <a:lstStyle/>
+          <a:p>
+            <a:endParaRPr lang="zh-CN" altLang="en-US"/>
+          </a:p>
+        </p:txBody>
+      </p:sp>
+      <p:pic>
+        <p:nvPicPr>
+          <p:cNvPr id="16" name="Image 1" descr="/Users/devonma/Desktop/9106/Assignment/A2b/build/icons/users.png"/>
+          <p:cNvPicPr>
+            <a:picLocks noChangeAspect="1"/>
+          </p:cNvPicPr>
+          <p:nvPr/>
+        </p:nvPicPr>
+        <p:blipFill>
+          <a:blip r:embed="rId3"/>
+          <a:stretch>
+            <a:fillRect/>
+          </a:stretch>
+        </p:blipFill>
+        <p:spPr>
+          <a:xfrm>
+            <a:off x="6739128" y="1892808"/>
+            <a:ext cx="420624" cy="420624"/>
+          </a:xfrm>
+          <a:prstGeom prst="rect">
+            <a:avLst/>
+          </a:prstGeom>
+        </p:spPr>
+      </p:pic>
+      <p:sp>
+        <p:nvSpPr>
+          <p:cNvPr id="17" name="Text 13"/>
+          <p:cNvSpPr/>
+          <p:nvPr/>
+        </p:nvSpPr>
+        <p:spPr>
+          <a:xfrm>
+            <a:off x="7543800" y="1691640"/>
+            <a:ext cx="3794760" cy="256032"/>
+          </a:xfrm>
+          <a:prstGeom prst="rect">
+            <a:avLst/>
+          </a:prstGeom>
+          <a:noFill/>
+          <a:ln/>
+        </p:spPr>
+        <p:txBody>
+          <a:bodyPr wrap="square" rtlCol="0" anchor="ctr"/>
+          <a:lstStyle/>
+          <a:p>
+            <a:pPr marL="0" indent="0">
+              <a:buNone/>
+            </a:pPr>
+            <a:r>
+              <a:rPr lang="en-US" sz="1050" b="1" kern="0" spc="100" dirty="0">
+                <a:solidFill>
+                  <a:srgbClr val="D9782D"/>
+                </a:solidFill>
+                <a:latin typeface="Calibri" pitchFamily="34" charset="0"/>
+                <a:ea typeface="Calibri" pitchFamily="34" charset="-122"/>
+                <a:cs typeface="Calibri" pitchFamily="34" charset="-120"/>
+              </a:rPr>
+              <a:t>PERSONA 2</a:t>
+            </a:r>
+            <a:endParaRPr lang="en-US" sz="1050" dirty="0"/>
+          </a:p>
+        </p:txBody>
+      </p:sp>
+      <p:sp>
+        <p:nvSpPr>
+          <p:cNvPr id="18" name="Text 14"/>
+          <p:cNvSpPr/>
+          <p:nvPr/>
+        </p:nvSpPr>
+        <p:spPr>
+          <a:xfrm>
+            <a:off x="7543800" y="1920240"/>
+            <a:ext cx="3794760" cy="365760"/>
+          </a:xfrm>
+          <a:prstGeom prst="rect">
+            <a:avLst/>
+          </a:prstGeom>
+          <a:noFill/>
+          <a:ln/>
+        </p:spPr>
+        <p:txBody>
+          <a:bodyPr wrap="square" rtlCol="0" anchor="ctr"/>
+          <a:lstStyle/>
+          <a:p>
+            <a:pPr marL="0" indent="0">
+              <a:buNone/>
+            </a:pPr>
+            <a:r>
+              <a:rPr lang="en-US" sz="1800" b="1" dirty="0">
+                <a:solidFill>
+                  <a:srgbClr val="1C2541"/>
+                </a:solidFill>
+                <a:latin typeface="Cambria" pitchFamily="34" charset="0"/>
+                <a:ea typeface="Cambria" pitchFamily="34" charset="-122"/>
+                <a:cs typeface="Cambria" pitchFamily="34" charset="-120"/>
+              </a:rPr>
+              <a:t>Persistent Asker</a:t>
+            </a:r>
+            <a:endParaRPr lang="en-US" sz="1800" dirty="0"/>
+          </a:p>
+        </p:txBody>
+      </p:sp>
+      <p:sp>
+        <p:nvSpPr>
+          <p:cNvPr id="19" name="Text 15"/>
+          <p:cNvSpPr/>
+          <p:nvPr/>
+        </p:nvSpPr>
+        <p:spPr>
+          <a:xfrm>
+            <a:off x="7543800" y="2258568"/>
+            <a:ext cx="3794760" cy="320040"/>
+          </a:xfrm>
+          <a:prstGeom prst="rect">
+            <a:avLst/>
+          </a:prstGeom>
+          <a:noFill/>
+          <a:ln/>
+        </p:spPr>
+        <p:txBody>
+          <a:bodyPr wrap="square" rtlCol="0" anchor="ctr"/>
+          <a:lstStyle/>
+          <a:p>
+            <a:pPr marL="0" indent="0">
+              <a:buNone/>
+            </a:pPr>
+            <a:endParaRPr lang="en-US" sz="1100" dirty="0"/>
+          </a:p>
+        </p:txBody>
+      </p:sp>
+      <p:sp>
+        <p:nvSpPr>
+          <p:cNvPr id="20" name="Text 16"/>
+          <p:cNvSpPr/>
+          <p:nvPr/>
+        </p:nvSpPr>
+        <p:spPr>
+          <a:xfrm>
+            <a:off x="6537960" y="2743200"/>
+            <a:ext cx="4709160" cy="960120"/>
+          </a:xfrm>
+          <a:prstGeom prst="rect">
+            <a:avLst/>
+          </a:prstGeom>
+          <a:noFill/>
+          <a:ln/>
+        </p:spPr>
+        <p:txBody>
+          <a:bodyPr wrap="square" rtlCol="0" anchor="ctr"/>
+          <a:lstStyle/>
+          <a:p>
+            <a:pPr marL="0" indent="0">
               <a:lnSpc>
-                <a:spcPct val="105000"/>
+                <a:spcPct val="115000"/>
               </a:lnSpc>
               <a:buNone/>
             </a:pPr>
             <a:r>
-              <a:rPr lang="en-US" sz="1100" b="1" dirty="0">
-                <a:solidFill>
-                  <a:srgbClr val="D9782D"/>
-                </a:solidFill>
-                <a:latin typeface="Calibri" pitchFamily="34" charset="0"/>
-                <a:ea typeface="Calibri" pitchFamily="34" charset="-122"/>
-                <a:cs typeface="Calibri" pitchFamily="34" charset="-120"/>
-              </a:rPr>
-              <a:t>7 patterns from real interviews</a:t>
-            </a:r>
-            <a:endParaRPr lang="en-US" sz="1100" dirty="0"/>
-          </a:p>
-        </p:txBody>
-      </p:sp>
-      <p:sp>
-        <p:nvSpPr>
-          <p:cNvPr id="34" name="Shape 32"/>
-          <p:cNvSpPr/>
-          <p:nvPr/>
-        </p:nvSpPr>
-        <p:spPr>
-          <a:xfrm>
-            <a:off x="8915400" y="1417320"/>
-            <a:ext cx="2651760" cy="4617720"/>
+              <a:rPr lang="en-US" sz="1600" b="1" dirty="0">
+                <a:solidFill>
+                  <a:srgbClr val="1C2541"/>
+                </a:solidFill>
+                <a:latin typeface="Calibri" pitchFamily="34" charset="0"/>
+                <a:ea typeface="Calibri" pitchFamily="34" charset="-122"/>
+                <a:cs typeface="Calibri" pitchFamily="34" charset="-120"/>
+              </a:rPr>
+              <a:t>Student in USYD, </a:t>
+            </a:r>
+            <a:r>
+              <a:rPr lang="en-US" sz="1600" dirty="0">
+                <a:solidFill>
+                  <a:srgbClr val="222831"/>
+                </a:solidFill>
+                <a:latin typeface="Calibri" pitchFamily="34" charset="0"/>
+                <a:ea typeface="Calibri" pitchFamily="34" charset="-122"/>
+                <a:cs typeface="Calibri" pitchFamily="34" charset="-120"/>
+              </a:rPr>
+              <a:t>Keeps raising the fault through the proper channels rather than letting it go, treats it as something that should be resolved, not lived with.</a:t>
+            </a:r>
+            <a:endParaRPr lang="en-US" sz="1600" dirty="0"/>
+          </a:p>
+        </p:txBody>
+      </p:sp>
+      <p:sp>
+        <p:nvSpPr>
+          <p:cNvPr id="21" name="Text 17"/>
+          <p:cNvSpPr/>
+          <p:nvPr/>
+        </p:nvSpPr>
+        <p:spPr>
+          <a:xfrm>
+            <a:off x="6537960" y="3749040"/>
+            <a:ext cx="4709160" cy="1051560"/>
+          </a:xfrm>
+          <a:prstGeom prst="rect">
+            <a:avLst/>
+          </a:prstGeom>
+          <a:noFill/>
+          <a:ln/>
+        </p:spPr>
+        <p:txBody>
+          <a:bodyPr wrap="square" rtlCol="0" anchor="ctr"/>
+          <a:lstStyle/>
+          <a:p>
+            <a:pPr marL="0" indent="0">
+              <a:lnSpc>
+                <a:spcPct val="115000"/>
+              </a:lnSpc>
+              <a:buNone/>
+            </a:pPr>
+            <a:r>
+              <a:rPr lang="en-US" sz="1200" b="1" dirty="0">
+                <a:solidFill>
+                  <a:srgbClr val="1C2541"/>
+                </a:solidFill>
+                <a:latin typeface="Calibri" pitchFamily="34" charset="0"/>
+                <a:ea typeface="Calibri" pitchFamily="34" charset="-122"/>
+                <a:cs typeface="Calibri" pitchFamily="34" charset="-120"/>
+              </a:rPr>
+              <a:t>Frustration  </a:t>
+            </a:r>
+            <a:r>
+              <a:rPr lang="en-US" sz="1200" dirty="0">
+                <a:solidFill>
+                  <a:srgbClr val="222831"/>
+                </a:solidFill>
+                <a:latin typeface="Calibri" pitchFamily="34" charset="0"/>
+                <a:ea typeface="Calibri" pitchFamily="34" charset="-122"/>
+                <a:cs typeface="Calibri" pitchFamily="34" charset="-120"/>
+              </a:rPr>
+              <a:t>Keeps raising the issue and keeps hearing “we’re looking into it” — no timeframe, no name attached; the effort never converts into clarity.</a:t>
+            </a:r>
+            <a:endParaRPr lang="en-US" sz="1200" dirty="0"/>
+          </a:p>
+        </p:txBody>
+      </p:sp>
+      <p:sp>
+        <p:nvSpPr>
+          <p:cNvPr id="22" name="Shape 18"/>
+          <p:cNvSpPr/>
+          <p:nvPr/>
+        </p:nvSpPr>
+        <p:spPr>
+          <a:xfrm>
+            <a:off x="6537960" y="4892040"/>
+            <a:ext cx="4709160" cy="1051560"/>
           </a:xfrm>
           <a:prstGeom prst="roundRect">
             <a:avLst>
-              <a:gd name="adj" fmla="val 3448"/>
+              <a:gd name="adj" fmla="val 5217"/>
             </a:avLst>
           </a:prstGeom>
           <a:solidFill>
@@ -5012,75 +4399,43 @@
           </a:solidFill>
           <a:ln/>
         </p:spPr>
-      </p:sp>
-      <p:sp>
-        <p:nvSpPr>
-          <p:cNvPr id="35" name="Text 33"/>
-          <p:cNvSpPr/>
-          <p:nvPr/>
-        </p:nvSpPr>
-        <p:spPr>
-          <a:xfrm>
-            <a:off x="9144000" y="1691640"/>
-            <a:ext cx="2194560" cy="274320"/>
-          </a:xfrm>
-          <a:prstGeom prst="rect">
-            <a:avLst/>
-          </a:prstGeom>
-          <a:noFill/>
-          <a:ln/>
-        </p:spPr>
-        <p:txBody>
-          <a:bodyPr wrap="square" rtlCol="0" anchor="ctr"/>
-          <a:lstStyle/>
-          <a:p>
-            <a:pPr indent="0" marL="0">
-              <a:buNone/>
-            </a:pPr>
-            <a:r>
-              <a:rPr lang="en-US" sz="1050" b="1" spc="100" kern="0" dirty="0">
-                <a:solidFill>
-                  <a:srgbClr val="D9782D"/>
-                </a:solidFill>
-                <a:latin typeface="Calibri" pitchFamily="34" charset="0"/>
-                <a:ea typeface="Calibri" pitchFamily="34" charset="-122"/>
-                <a:cs typeface="Calibri" pitchFamily="34" charset="-120"/>
-              </a:rPr>
-              <a:t>WHAT THIS TOLD US</a:t>
-            </a:r>
-            <a:endParaRPr lang="en-US" sz="1050" dirty="0"/>
-          </a:p>
-        </p:txBody>
-      </p:sp>
-      <p:sp>
-        <p:nvSpPr>
-          <p:cNvPr id="36" name="Text 34"/>
-          <p:cNvSpPr/>
-          <p:nvPr/>
-        </p:nvSpPr>
-        <p:spPr>
-          <a:xfrm>
-            <a:off x="9144000" y="2011680"/>
-            <a:ext cx="2240280" cy="1920240"/>
-          </a:xfrm>
-          <a:prstGeom prst="rect">
-            <a:avLst/>
-          </a:prstGeom>
-          <a:noFill/>
-          <a:ln/>
-        </p:spPr>
-        <p:txBody>
-          <a:bodyPr wrap="square" rtlCol="0" anchor="ctr"/>
-          <a:lstStyle/>
-          <a:p>
-            <a:pPr indent="0" marL="0">
+        <p:txBody>
+          <a:bodyPr/>
+          <a:lstStyle/>
+          <a:p>
+            <a:endParaRPr lang="zh-CN" altLang="en-US"/>
+          </a:p>
+        </p:txBody>
+      </p:sp>
+      <p:sp>
+        <p:nvSpPr>
+          <p:cNvPr id="23" name="Text 19"/>
+          <p:cNvSpPr/>
+          <p:nvPr/>
+        </p:nvSpPr>
+        <p:spPr>
+          <a:xfrm>
+            <a:off x="6720840" y="4956048"/>
+            <a:ext cx="4343400" cy="914400"/>
+          </a:xfrm>
+          <a:prstGeom prst="rect">
+            <a:avLst/>
+          </a:prstGeom>
+          <a:noFill/>
+          <a:ln/>
+        </p:spPr>
+        <p:txBody>
+          <a:bodyPr wrap="square" rtlCol="0" anchor="ctr"/>
+          <a:lstStyle/>
+          <a:p>
+            <a:pPr marL="0" indent="0">
               <a:lnSpc>
-                <a:spcPct val="125000"/>
+                <a:spcPct val="115000"/>
               </a:lnSpc>
               <a:buNone/>
             </a:pPr>
             <a:r>
-              <a:rPr lang="en-US" sz="1350" i="1" dirty="0">
+              <a:rPr lang="en-US" sz="1100" i="1" dirty="0">
                 <a:solidFill>
                   <a:srgbClr val="FFFFFF"/>
                 </a:solidFill>
@@ -5088,57 +4443,15 @@
                 <a:ea typeface="Cambria" pitchFamily="34" charset="-122"/>
                 <a:cs typeface="Cambria" pitchFamily="34" charset="-120"/>
               </a:rPr>
-              <a:t>The pain isn’t the repair delay itself — it’s the absence of visible status, a named responsible party, and any expectation to hold onto.</a:t>
-            </a:r>
-            <a:endParaRPr lang="en-US" sz="1350" dirty="0"/>
-          </a:p>
-        </p:txBody>
-      </p:sp>
-      <p:sp>
-        <p:nvSpPr>
-          <p:cNvPr id="37" name="Text 35"/>
-          <p:cNvSpPr/>
-          <p:nvPr/>
-        </p:nvSpPr>
-        <p:spPr>
-          <a:xfrm>
-            <a:off x="9144000" y="4023360"/>
-            <a:ext cx="2240280" cy="1737360"/>
-          </a:xfrm>
-          <a:prstGeom prst="rect">
-            <a:avLst/>
-          </a:prstGeom>
-          <a:noFill/>
-          <a:ln/>
-        </p:spPr>
-        <p:txBody>
-          <a:bodyPr wrap="square" rtlCol="0" anchor="ctr"/>
-          <a:lstStyle/>
-          <a:p>
-            <a:pPr indent="0" marL="0">
-              <a:lnSpc>
-                <a:spcPct val="120000"/>
-              </a:lnSpc>
-              <a:buNone/>
-            </a:pPr>
-            <a:r>
-              <a:rPr lang="en-US" sz="1150" dirty="0">
-                <a:solidFill>
-                  <a:srgbClr val="CFE0E8"/>
-                </a:solidFill>
-                <a:latin typeface="Calibri" pitchFamily="34" charset="0"/>
-                <a:ea typeface="Calibri" pitchFamily="34" charset="-122"/>
-                <a:cs typeface="Calibri" pitchFamily="34" charset="-120"/>
-              </a:rPr>
-              <a:t>This narrowed our direction from “the repair” to “the information and influence around the wait.”</a:t>
-            </a:r>
-            <a:endParaRPr lang="en-US" sz="1150" dirty="0"/>
-          </a:p>
-        </p:txBody>
-      </p:sp>
-      <p:sp>
-        <p:nvSpPr>
-          <p:cNvPr id="38" name="Text 36"/>
+              <a:t>“I called three times. Every time it was ‘someone will look into it.’ Nobody ever told me who, or when.”</a:t>
+            </a:r>
+            <a:endParaRPr lang="en-US" sz="1100" dirty="0"/>
+          </a:p>
+        </p:txBody>
+      </p:sp>
+      <p:sp>
+        <p:nvSpPr>
+          <p:cNvPr id="24" name="Text 20"/>
           <p:cNvSpPr/>
           <p:nvPr/>
         </p:nvSpPr>
@@ -5157,7 +4470,7 @@
           <a:bodyPr wrap="square" rtlCol="0" anchor="ctr"/>
           <a:lstStyle/>
           <a:p>
-            <a:pPr algn="l" indent="0" marL="0">
+            <a:pPr marL="0" indent="0" algn="l">
               <a:buNone/>
             </a:pPr>
             <a:r>
@@ -5177,7 +4490,7 @@
       </p:sp>
       <p:sp>
         <p:nvSpPr>
-          <p:cNvPr id="39" name="Text 37"/>
+          <p:cNvPr id="25" name="Text 21"/>
           <p:cNvSpPr/>
           <p:nvPr/>
         </p:nvSpPr>
@@ -5196,7 +4509,7 @@
           <a:bodyPr wrap="square" rtlCol="0" anchor="ctr"/>
           <a:lstStyle/>
           <a:p>
-            <a:pPr algn="r" indent="0" marL="0">
+            <a:pPr marL="0" indent="0" algn="r">
               <a:buNone/>
             </a:pPr>
             <a:r>
@@ -5208,7 +4521,7 @@
                 <a:ea typeface="Calibri" pitchFamily="34" charset="-122"/>
                 <a:cs typeface="Calibri" pitchFamily="34" charset="-120"/>
               </a:rPr>
-              <a:t>4</a:t>
+              <a:t>5</a:t>
             </a:r>
             <a:endParaRPr lang="en-US" sz="900" dirty="0"/>
           </a:p>
@@ -5224,12 +4537,13 @@
 
 <file path=ppt/slides/slide5.xml><?xml version="1.0" encoding="utf-8"?>
 <p:sld xmlns:a="http://schemas.openxmlformats.org/drawingml/2006/main" xmlns:r="http://schemas.openxmlformats.org/officeDocument/2006/relationships" xmlns:p="http://schemas.openxmlformats.org/presentationml/2006/main">
-  <p:cSld name="Slide 5">
+  <p:cSld name="Slide 4">
     <p:bg>
       <p:bgPr>
         <a:solidFill>
           <a:srgbClr val="FFFFFF"/>
         </a:solidFill>
+        <a:effectLst/>
       </p:bgPr>
     </p:bg>
     <p:spTree>
@@ -5254,24 +4568,24 @@
         </p:nvSpPr>
         <p:spPr>
           <a:xfrm>
-            <a:off x="640080" y="384048"/>
-            <a:ext cx="8229600" cy="502920"/>
-          </a:xfrm>
-          <a:prstGeom prst="rect">
-            <a:avLst/>
-          </a:prstGeom>
-          <a:noFill/>
-          <a:ln/>
-        </p:spPr>
-        <p:txBody>
-          <a:bodyPr wrap="square" rtlCol="0" anchor="ctr"/>
-          <a:lstStyle/>
-          <a:p>
-            <a:pPr indent="0" marL="0">
-              <a:buNone/>
-            </a:pPr>
-            <a:r>
-              <a:rPr lang="en-US" sz="2600" b="1" dirty="0">
+            <a:off x="640080" y="411480"/>
+            <a:ext cx="7315200" cy="502920"/>
+          </a:xfrm>
+          <a:prstGeom prst="rect">
+            <a:avLst/>
+          </a:prstGeom>
+          <a:noFill/>
+          <a:ln/>
+        </p:spPr>
+        <p:txBody>
+          <a:bodyPr wrap="square" rtlCol="0" anchor="ctr"/>
+          <a:lstStyle/>
+          <a:p>
+            <a:pPr marL="0" indent="0">
+              <a:buNone/>
+            </a:pPr>
+            <a:r>
+              <a:rPr lang="en-US" sz="2800" b="1" dirty="0">
                 <a:solidFill>
                   <a:srgbClr val="1C2541"/>
                 </a:solidFill>
@@ -5279,9 +4593,9 @@
                 <a:ea typeface="Cambria" pitchFamily="34" charset="-122"/>
                 <a:cs typeface="Cambria" pitchFamily="34" charset="-120"/>
               </a:rPr>
-              <a:t>Data Synthesis — Personas</a:t>
-            </a:r>
-            <a:endParaRPr lang="en-US" sz="2600" dirty="0"/>
+              <a:t>Data Analysis – Affinity Map Told us:</a:t>
+            </a:r>
+            <a:endParaRPr lang="en-US" sz="2800" dirty="0"/>
           </a:p>
         </p:txBody>
       </p:sp>
@@ -5293,34 +4607,23 @@
         </p:nvSpPr>
         <p:spPr>
           <a:xfrm>
-            <a:off x="640080" y="859536"/>
-            <a:ext cx="9144000" cy="320040"/>
-          </a:xfrm>
-          <a:prstGeom prst="rect">
-            <a:avLst/>
-          </a:prstGeom>
-          <a:noFill/>
-          <a:ln/>
-        </p:spPr>
-        <p:txBody>
-          <a:bodyPr wrap="square" rtlCol="0" anchor="ctr"/>
-          <a:lstStyle/>
-          <a:p>
-            <a:pPr indent="0" marL="0">
-              <a:buNone/>
-            </a:pPr>
-            <a:r>
-              <a:rPr lang="en-US" sz="1250" i="1" dirty="0">
-                <a:solidFill>
-                  <a:srgbClr val="5B6472"/>
-                </a:solidFill>
-                <a:latin typeface="Calibri" pitchFamily="34" charset="0"/>
-                <a:ea typeface="Calibri" pitchFamily="34" charset="-122"/>
-                <a:cs typeface="Calibri" pitchFamily="34" charset="-120"/>
-              </a:rPr>
-              <a:t>Two clusters, not a spread — opposite behaviours, same root gap</a:t>
-            </a:r>
-            <a:endParaRPr lang="en-US" sz="1250" dirty="0"/>
+            <a:off x="640080" y="886968"/>
+            <a:ext cx="8229600" cy="320040"/>
+          </a:xfrm>
+          <a:prstGeom prst="rect">
+            <a:avLst/>
+          </a:prstGeom>
+          <a:noFill/>
+          <a:ln/>
+        </p:spPr>
+        <p:txBody>
+          <a:bodyPr wrap="square" rtlCol="0" anchor="ctr"/>
+          <a:lstStyle/>
+          <a:p>
+            <a:pPr marL="0" indent="0">
+              <a:buNone/>
+            </a:pPr>
+            <a:endParaRPr lang="en-US" sz="1300" dirty="0"/>
           </a:p>
         </p:txBody>
       </p:sp>
@@ -5332,12 +4635,12 @@
         </p:nvSpPr>
         <p:spPr>
           <a:xfrm>
-            <a:off x="640080" y="1371600"/>
-            <a:ext cx="5349240" cy="4800600"/>
+            <a:off x="640080" y="1417320"/>
+            <a:ext cx="2697480" cy="1170432"/>
           </a:xfrm>
           <a:prstGeom prst="roundRect">
             <a:avLst>
-              <a:gd name="adj" fmla="val 1905"/>
+              <a:gd name="adj" fmla="val 6250"/>
             </a:avLst>
           </a:prstGeom>
           <a:solidFill>
@@ -5345,6 +4648,13 @@
           </a:solidFill>
           <a:ln/>
         </p:spPr>
+        <p:txBody>
+          <a:bodyPr/>
+          <a:lstStyle/>
+          <a:p>
+            <a:endParaRPr lang="zh-CN" altLang="en-US"/>
+          </a:p>
+        </p:txBody>
       </p:sp>
       <p:sp>
         <p:nvSpPr>
@@ -5354,709 +4664,1082 @@
         </p:nvSpPr>
         <p:spPr>
           <a:xfrm>
-            <a:off x="960120" y="1691640"/>
-            <a:ext cx="822960" cy="822960"/>
+            <a:off x="777240" y="1554480"/>
+            <a:ext cx="365760" cy="365760"/>
           </a:xfrm>
           <a:prstGeom prst="ellipse">
             <a:avLst/>
           </a:prstGeom>
           <a:solidFill>
-            <a:srgbClr val="1C2541"/>
+            <a:srgbClr val="D9782D"/>
           </a:solidFill>
           <a:ln/>
         </p:spPr>
-      </p:sp>
-      <p:pic>
-        <p:nvPicPr>
-          <p:cNvPr id="6" name="Image 0" descr="/Users/devonma/Desktop/9106/Assignment/A2b/build/icons/users.png">    </p:cNvPr>
-          <p:cNvPicPr>
-            <a:picLocks noChangeAspect="1"/>
-          </p:cNvPicPr>
-          <p:nvPr/>
-        </p:nvPicPr>
-        <p:blipFill>
-          <a:blip r:embed="rId1"/>
-          <a:stretch>
-            <a:fillRect/>
-          </a:stretch>
-        </p:blipFill>
-        <p:spPr>
-          <a:xfrm>
-            <a:off x="1161288" y="1892808"/>
-            <a:ext cx="420624" cy="420624"/>
-          </a:xfrm>
-          <a:prstGeom prst="rect">
-            <a:avLst/>
-          </a:prstGeom>
-        </p:spPr>
-      </p:pic>
-      <p:sp>
-        <p:nvSpPr>
-          <p:cNvPr id="7" name="Text 4"/>
-          <p:cNvSpPr/>
-          <p:nvPr/>
-        </p:nvSpPr>
-        <p:spPr>
-          <a:xfrm>
-            <a:off x="1965960" y="1691640"/>
-            <a:ext cx="3794760" cy="256032"/>
-          </a:xfrm>
-          <a:prstGeom prst="rect">
-            <a:avLst/>
-          </a:prstGeom>
-          <a:noFill/>
-          <a:ln/>
-        </p:spPr>
-        <p:txBody>
-          <a:bodyPr wrap="square" rtlCol="0" anchor="ctr"/>
-          <a:lstStyle/>
-          <a:p>
-            <a:pPr indent="0" marL="0">
-              <a:buNone/>
-            </a:pPr>
-            <a:r>
-              <a:rPr lang="en-US" sz="1050" b="1" spc="100" kern="0" dirty="0">
-                <a:solidFill>
-                  <a:srgbClr val="D9782D"/>
-                </a:solidFill>
-                <a:latin typeface="Calibri" pitchFamily="34" charset="0"/>
-                <a:ea typeface="Calibri" pitchFamily="34" charset="-122"/>
-                <a:cs typeface="Calibri" pitchFamily="34" charset="-120"/>
-              </a:rPr>
-              <a:t>PERSONA A — THE QUIET ENDER</a:t>
-            </a:r>
-            <a:endParaRPr lang="en-US" sz="1050" dirty="0"/>
-          </a:p>
-        </p:txBody>
-      </p:sp>
-      <p:sp>
-        <p:nvSpPr>
-          <p:cNvPr id="8" name="Text 5"/>
-          <p:cNvSpPr/>
-          <p:nvPr/>
-        </p:nvSpPr>
-        <p:spPr>
-          <a:xfrm>
-            <a:off x="1965960" y="1920240"/>
-            <a:ext cx="3794760" cy="365760"/>
-          </a:xfrm>
-          <a:prstGeom prst="rect">
-            <a:avLst/>
-          </a:prstGeom>
-          <a:noFill/>
-          <a:ln/>
-        </p:spPr>
-        <p:txBody>
-          <a:bodyPr wrap="square" rtlCol="0" anchor="ctr"/>
-          <a:lstStyle/>
-          <a:p>
-            <a:pPr indent="0" marL="0">
-              <a:buNone/>
-            </a:pPr>
-            <a:r>
-              <a:rPr lang="en-US" sz="1800" b="1" dirty="0">
-                <a:solidFill>
-                  <a:srgbClr val="1C2541"/>
-                </a:solidFill>
+        <p:txBody>
+          <a:bodyPr/>
+          <a:lstStyle/>
+          <a:p>
+            <a:endParaRPr lang="zh-CN" altLang="en-US"/>
+          </a:p>
+        </p:txBody>
+      </p:sp>
+      <p:sp>
+        <p:nvSpPr>
+          <p:cNvPr id="6" name="Text 4"/>
+          <p:cNvSpPr/>
+          <p:nvPr/>
+        </p:nvSpPr>
+        <p:spPr>
+          <a:xfrm>
+            <a:off x="777240" y="1554480"/>
+            <a:ext cx="365760" cy="365760"/>
+          </a:xfrm>
+          <a:prstGeom prst="rect">
+            <a:avLst/>
+          </a:prstGeom>
+          <a:noFill/>
+          <a:ln/>
+        </p:spPr>
+        <p:txBody>
+          <a:bodyPr wrap="square" rtlCol="0" anchor="ctr"/>
+          <a:lstStyle/>
+          <a:p>
+            <a:pPr marL="0" indent="0" algn="ctr">
+              <a:buNone/>
+            </a:pPr>
+            <a:r>
+              <a:rPr lang="en-US" sz="1300" b="1" dirty="0">
+                <a:solidFill>
+                  <a:srgbClr val="FFFFFF"/>
+                </a:solidFill>
+                <a:latin typeface="Calibri" pitchFamily="34" charset="0"/>
+                <a:ea typeface="Calibri" pitchFamily="34" charset="-122"/>
+                <a:cs typeface="Calibri" pitchFamily="34" charset="-120"/>
+              </a:rPr>
+              <a:t>1</a:t>
+            </a:r>
+            <a:endParaRPr lang="en-US" sz="1300" dirty="0"/>
+          </a:p>
+        </p:txBody>
+      </p:sp>
+      <p:sp>
+        <p:nvSpPr>
+          <p:cNvPr id="7" name="Text 5"/>
+          <p:cNvSpPr/>
+          <p:nvPr/>
+        </p:nvSpPr>
+        <p:spPr>
+          <a:xfrm>
+            <a:off x="1280160" y="1444752"/>
+            <a:ext cx="1920240" cy="1069848"/>
+          </a:xfrm>
+          <a:prstGeom prst="rect">
+            <a:avLst/>
+          </a:prstGeom>
+          <a:noFill/>
+          <a:ln/>
+        </p:spPr>
+        <p:txBody>
+          <a:bodyPr wrap="square" rtlCol="0" anchor="ctr"/>
+          <a:lstStyle/>
+          <a:p>
+            <a:pPr marL="0" indent="0">
+              <a:lnSpc>
+                <a:spcPct val="105000"/>
+              </a:lnSpc>
+              <a:buNone/>
+            </a:pPr>
+            <a:r>
+              <a:rPr lang="en-US" sz="1400" dirty="0">
+                <a:solidFill>
+                  <a:srgbClr val="222831"/>
+                </a:solidFill>
+                <a:latin typeface="Calibri" pitchFamily="34" charset="0"/>
+                <a:ea typeface="Calibri" pitchFamily="34" charset="-122"/>
+                <a:cs typeface="Calibri" pitchFamily="34" charset="-120"/>
+              </a:rPr>
+              <a:t>Unclear standards for how issues are detected and resolved</a:t>
+            </a:r>
+            <a:endParaRPr lang="en-US" sz="1400" dirty="0"/>
+          </a:p>
+        </p:txBody>
+      </p:sp>
+      <p:sp>
+        <p:nvSpPr>
+          <p:cNvPr id="8" name="Shape 6"/>
+          <p:cNvSpPr/>
+          <p:nvPr/>
+        </p:nvSpPr>
+        <p:spPr>
+          <a:xfrm>
+            <a:off x="640080" y="2926080"/>
+            <a:ext cx="2697480" cy="1170432"/>
+          </a:xfrm>
+          <a:prstGeom prst="roundRect">
+            <a:avLst>
+              <a:gd name="adj" fmla="val 6250"/>
+            </a:avLst>
+          </a:prstGeom>
+          <a:solidFill>
+            <a:srgbClr val="F4F5F7"/>
+          </a:solidFill>
+          <a:ln/>
+        </p:spPr>
+        <p:txBody>
+          <a:bodyPr/>
+          <a:lstStyle/>
+          <a:p>
+            <a:endParaRPr lang="zh-CN" altLang="en-US"/>
+          </a:p>
+        </p:txBody>
+      </p:sp>
+      <p:sp>
+        <p:nvSpPr>
+          <p:cNvPr id="9" name="Shape 7"/>
+          <p:cNvSpPr/>
+          <p:nvPr/>
+        </p:nvSpPr>
+        <p:spPr>
+          <a:xfrm>
+            <a:off x="777240" y="3063240"/>
+            <a:ext cx="365760" cy="365760"/>
+          </a:xfrm>
+          <a:prstGeom prst="ellipse">
+            <a:avLst/>
+          </a:prstGeom>
+          <a:solidFill>
+            <a:srgbClr val="D9782D"/>
+          </a:solidFill>
+          <a:ln/>
+        </p:spPr>
+        <p:txBody>
+          <a:bodyPr/>
+          <a:lstStyle/>
+          <a:p>
+            <a:endParaRPr lang="zh-CN" altLang="en-US"/>
+          </a:p>
+        </p:txBody>
+      </p:sp>
+      <p:sp>
+        <p:nvSpPr>
+          <p:cNvPr id="10" name="Text 8"/>
+          <p:cNvSpPr/>
+          <p:nvPr/>
+        </p:nvSpPr>
+        <p:spPr>
+          <a:xfrm>
+            <a:off x="777240" y="3063240"/>
+            <a:ext cx="365760" cy="365760"/>
+          </a:xfrm>
+          <a:prstGeom prst="rect">
+            <a:avLst/>
+          </a:prstGeom>
+          <a:noFill/>
+          <a:ln/>
+        </p:spPr>
+        <p:txBody>
+          <a:bodyPr wrap="square" rtlCol="0" anchor="ctr"/>
+          <a:lstStyle/>
+          <a:p>
+            <a:pPr marL="0" indent="0" algn="ctr">
+              <a:buNone/>
+            </a:pPr>
+            <a:r>
+              <a:rPr lang="en-US" sz="1300" b="1" dirty="0">
+                <a:solidFill>
+                  <a:srgbClr val="FFFFFF"/>
+                </a:solidFill>
+                <a:latin typeface="Calibri" pitchFamily="34" charset="0"/>
+                <a:ea typeface="Calibri" pitchFamily="34" charset="-122"/>
+                <a:cs typeface="Calibri" pitchFamily="34" charset="-120"/>
+              </a:rPr>
+              <a:t>2</a:t>
+            </a:r>
+            <a:endParaRPr lang="en-US" sz="1300" dirty="0"/>
+          </a:p>
+        </p:txBody>
+      </p:sp>
+      <p:sp>
+        <p:nvSpPr>
+          <p:cNvPr id="11" name="Text 9"/>
+          <p:cNvSpPr/>
+          <p:nvPr/>
+        </p:nvSpPr>
+        <p:spPr>
+          <a:xfrm>
+            <a:off x="1280160" y="3063240"/>
+            <a:ext cx="1920240" cy="960120"/>
+          </a:xfrm>
+          <a:prstGeom prst="rect">
+            <a:avLst/>
+          </a:prstGeom>
+          <a:noFill/>
+          <a:ln/>
+        </p:spPr>
+        <p:txBody>
+          <a:bodyPr wrap="square" rtlCol="0" anchor="ctr"/>
+          <a:lstStyle/>
+          <a:p>
+            <a:pPr marL="0" indent="0">
+              <a:lnSpc>
+                <a:spcPct val="105000"/>
+              </a:lnSpc>
+              <a:buNone/>
+            </a:pPr>
+            <a:r>
+              <a:rPr lang="en-US" sz="1600" dirty="0">
+                <a:solidFill>
+                  <a:srgbClr val="222831"/>
+                </a:solidFill>
+                <a:latin typeface="Calibri" pitchFamily="34" charset="0"/>
+                <a:ea typeface="Calibri" pitchFamily="34" charset="-122"/>
+                <a:cs typeface="Calibri" pitchFamily="34" charset="-120"/>
+              </a:rPr>
+              <a:t>The wait disrupts other plans in residents’ lives</a:t>
+            </a:r>
+            <a:endParaRPr lang="en-US" sz="1600" dirty="0"/>
+          </a:p>
+        </p:txBody>
+      </p:sp>
+      <p:sp>
+        <p:nvSpPr>
+          <p:cNvPr id="12" name="Shape 10"/>
+          <p:cNvSpPr/>
+          <p:nvPr/>
+        </p:nvSpPr>
+        <p:spPr>
+          <a:xfrm>
+            <a:off x="640080" y="4434840"/>
+            <a:ext cx="2697480" cy="1170432"/>
+          </a:xfrm>
+          <a:prstGeom prst="roundRect">
+            <a:avLst>
+              <a:gd name="adj" fmla="val 6250"/>
+            </a:avLst>
+          </a:prstGeom>
+          <a:solidFill>
+            <a:srgbClr val="F4F5F7"/>
+          </a:solidFill>
+          <a:ln/>
+        </p:spPr>
+        <p:txBody>
+          <a:bodyPr/>
+          <a:lstStyle/>
+          <a:p>
+            <a:endParaRPr lang="zh-CN" altLang="en-US"/>
+          </a:p>
+        </p:txBody>
+      </p:sp>
+      <p:sp>
+        <p:nvSpPr>
+          <p:cNvPr id="13" name="Shape 11"/>
+          <p:cNvSpPr/>
+          <p:nvPr/>
+        </p:nvSpPr>
+        <p:spPr>
+          <a:xfrm>
+            <a:off x="777240" y="4572000"/>
+            <a:ext cx="365760" cy="365760"/>
+          </a:xfrm>
+          <a:prstGeom prst="ellipse">
+            <a:avLst/>
+          </a:prstGeom>
+          <a:solidFill>
+            <a:srgbClr val="D9782D"/>
+          </a:solidFill>
+          <a:ln/>
+        </p:spPr>
+        <p:txBody>
+          <a:bodyPr/>
+          <a:lstStyle/>
+          <a:p>
+            <a:endParaRPr lang="zh-CN" altLang="en-US"/>
+          </a:p>
+        </p:txBody>
+      </p:sp>
+      <p:sp>
+        <p:nvSpPr>
+          <p:cNvPr id="14" name="Text 12"/>
+          <p:cNvSpPr/>
+          <p:nvPr/>
+        </p:nvSpPr>
+        <p:spPr>
+          <a:xfrm>
+            <a:off x="777240" y="4572000"/>
+            <a:ext cx="365760" cy="365760"/>
+          </a:xfrm>
+          <a:prstGeom prst="rect">
+            <a:avLst/>
+          </a:prstGeom>
+          <a:noFill/>
+          <a:ln/>
+        </p:spPr>
+        <p:txBody>
+          <a:bodyPr wrap="square" rtlCol="0" anchor="ctr"/>
+          <a:lstStyle/>
+          <a:p>
+            <a:pPr marL="0" indent="0" algn="ctr">
+              <a:buNone/>
+            </a:pPr>
+            <a:r>
+              <a:rPr lang="en-US" sz="1300" b="1" dirty="0">
+                <a:solidFill>
+                  <a:srgbClr val="FFFFFF"/>
+                </a:solidFill>
+                <a:latin typeface="Calibri" pitchFamily="34" charset="0"/>
+                <a:ea typeface="Calibri" pitchFamily="34" charset="-122"/>
+                <a:cs typeface="Calibri" pitchFamily="34" charset="-120"/>
+              </a:rPr>
+              <a:t>3</a:t>
+            </a:r>
+            <a:endParaRPr lang="en-US" sz="1300" dirty="0"/>
+          </a:p>
+        </p:txBody>
+      </p:sp>
+      <p:sp>
+        <p:nvSpPr>
+          <p:cNvPr id="15" name="Text 13"/>
+          <p:cNvSpPr/>
+          <p:nvPr/>
+        </p:nvSpPr>
+        <p:spPr>
+          <a:xfrm>
+            <a:off x="1143000" y="4572000"/>
+            <a:ext cx="2057400" cy="960120"/>
+          </a:xfrm>
+          <a:prstGeom prst="rect">
+            <a:avLst/>
+          </a:prstGeom>
+          <a:noFill/>
+          <a:ln/>
+        </p:spPr>
+        <p:txBody>
+          <a:bodyPr wrap="square" rtlCol="0" anchor="ctr"/>
+          <a:lstStyle/>
+          <a:p>
+            <a:pPr marL="0" indent="0">
+              <a:lnSpc>
+                <a:spcPct val="105000"/>
+              </a:lnSpc>
+              <a:buNone/>
+            </a:pPr>
+            <a:r>
+              <a:rPr lang="en-US" sz="1600" dirty="0">
+                <a:solidFill>
+                  <a:srgbClr val="222831"/>
+                </a:solidFill>
+                <a:latin typeface="Calibri" pitchFamily="34" charset="0"/>
+                <a:ea typeface="Calibri" pitchFamily="34" charset="-122"/>
+                <a:cs typeface="Calibri" pitchFamily="34" charset="-120"/>
+              </a:rPr>
+              <a:t>Status is never updated</a:t>
+            </a:r>
+            <a:endParaRPr lang="en-US" sz="1600" dirty="0"/>
+          </a:p>
+        </p:txBody>
+      </p:sp>
+      <p:sp>
+        <p:nvSpPr>
+          <p:cNvPr id="16" name="Shape 14"/>
+          <p:cNvSpPr/>
+          <p:nvPr/>
+        </p:nvSpPr>
+        <p:spPr>
+          <a:xfrm>
+            <a:off x="3566160" y="1428222"/>
+            <a:ext cx="2697480" cy="1170432"/>
+          </a:xfrm>
+          <a:prstGeom prst="roundRect">
+            <a:avLst>
+              <a:gd name="adj" fmla="val 6250"/>
+            </a:avLst>
+          </a:prstGeom>
+          <a:solidFill>
+            <a:srgbClr val="F4F5F7"/>
+          </a:solidFill>
+          <a:ln/>
+        </p:spPr>
+        <p:txBody>
+          <a:bodyPr/>
+          <a:lstStyle/>
+          <a:p>
+            <a:endParaRPr lang="zh-CN" altLang="en-US"/>
+          </a:p>
+        </p:txBody>
+      </p:sp>
+      <p:sp>
+        <p:nvSpPr>
+          <p:cNvPr id="17" name="Shape 15"/>
+          <p:cNvSpPr/>
+          <p:nvPr/>
+        </p:nvSpPr>
+        <p:spPr>
+          <a:xfrm>
+            <a:off x="3703320" y="1565382"/>
+            <a:ext cx="365760" cy="365760"/>
+          </a:xfrm>
+          <a:prstGeom prst="ellipse">
+            <a:avLst/>
+          </a:prstGeom>
+          <a:solidFill>
+            <a:srgbClr val="D9782D"/>
+          </a:solidFill>
+          <a:ln/>
+        </p:spPr>
+        <p:txBody>
+          <a:bodyPr/>
+          <a:lstStyle/>
+          <a:p>
+            <a:endParaRPr lang="zh-CN" altLang="en-US"/>
+          </a:p>
+        </p:txBody>
+      </p:sp>
+      <p:sp>
+        <p:nvSpPr>
+          <p:cNvPr id="18" name="Text 16"/>
+          <p:cNvSpPr/>
+          <p:nvPr/>
+        </p:nvSpPr>
+        <p:spPr>
+          <a:xfrm>
+            <a:off x="3703320" y="1565382"/>
+            <a:ext cx="365760" cy="365760"/>
+          </a:xfrm>
+          <a:prstGeom prst="rect">
+            <a:avLst/>
+          </a:prstGeom>
+          <a:noFill/>
+          <a:ln/>
+        </p:spPr>
+        <p:txBody>
+          <a:bodyPr wrap="square" rtlCol="0" anchor="ctr"/>
+          <a:lstStyle/>
+          <a:p>
+            <a:pPr marL="0" indent="0" algn="ctr">
+              <a:buNone/>
+            </a:pPr>
+            <a:r>
+              <a:rPr lang="en-US" sz="1300" b="1" dirty="0">
+                <a:solidFill>
+                  <a:srgbClr val="FFFFFF"/>
+                </a:solidFill>
+                <a:latin typeface="Calibri" pitchFamily="34" charset="0"/>
+                <a:ea typeface="Calibri" pitchFamily="34" charset="-122"/>
+                <a:cs typeface="Calibri" pitchFamily="34" charset="-120"/>
+              </a:rPr>
+              <a:t>4</a:t>
+            </a:r>
+            <a:endParaRPr lang="en-US" sz="1300" dirty="0"/>
+          </a:p>
+        </p:txBody>
+      </p:sp>
+      <p:sp>
+        <p:nvSpPr>
+          <p:cNvPr id="19" name="Text 17"/>
+          <p:cNvSpPr/>
+          <p:nvPr/>
+        </p:nvSpPr>
+        <p:spPr>
+          <a:xfrm>
+            <a:off x="4206240" y="1534434"/>
+            <a:ext cx="1920240" cy="991068"/>
+          </a:xfrm>
+          <a:prstGeom prst="rect">
+            <a:avLst/>
+          </a:prstGeom>
+          <a:noFill/>
+          <a:ln/>
+        </p:spPr>
+        <p:txBody>
+          <a:bodyPr wrap="square" rtlCol="0" anchor="ctr"/>
+          <a:lstStyle/>
+          <a:p>
+            <a:pPr marL="0" indent="0">
+              <a:lnSpc>
+                <a:spcPct val="105000"/>
+              </a:lnSpc>
+              <a:buNone/>
+            </a:pPr>
+            <a:r>
+              <a:rPr lang="en-US" sz="1600" dirty="0">
+                <a:solidFill>
+                  <a:srgbClr val="222831"/>
+                </a:solidFill>
+                <a:latin typeface="Calibri" pitchFamily="34" charset="0"/>
+                <a:ea typeface="Calibri" pitchFamily="34" charset="-122"/>
+                <a:cs typeface="Calibri" pitchFamily="34" charset="-120"/>
+              </a:rPr>
+              <a:t>Waits run longer than residents were led to expect</a:t>
+            </a:r>
+            <a:endParaRPr lang="en-US" sz="1600" dirty="0"/>
+          </a:p>
+        </p:txBody>
+      </p:sp>
+      <p:sp>
+        <p:nvSpPr>
+          <p:cNvPr id="20" name="Shape 18"/>
+          <p:cNvSpPr/>
+          <p:nvPr/>
+        </p:nvSpPr>
+        <p:spPr>
+          <a:xfrm>
+            <a:off x="3566160" y="2926080"/>
+            <a:ext cx="2697480" cy="1170432"/>
+          </a:xfrm>
+          <a:prstGeom prst="roundRect">
+            <a:avLst>
+              <a:gd name="adj" fmla="val 6250"/>
+            </a:avLst>
+          </a:prstGeom>
+          <a:solidFill>
+            <a:srgbClr val="F4F5F7"/>
+          </a:solidFill>
+          <a:ln/>
+        </p:spPr>
+        <p:txBody>
+          <a:bodyPr/>
+          <a:lstStyle/>
+          <a:p>
+            <a:endParaRPr lang="zh-CN" altLang="en-US"/>
+          </a:p>
+        </p:txBody>
+      </p:sp>
+      <p:sp>
+        <p:nvSpPr>
+          <p:cNvPr id="21" name="Shape 19"/>
+          <p:cNvSpPr/>
+          <p:nvPr/>
+        </p:nvSpPr>
+        <p:spPr>
+          <a:xfrm>
+            <a:off x="3703320" y="3063240"/>
+            <a:ext cx="365760" cy="365760"/>
+          </a:xfrm>
+          <a:prstGeom prst="ellipse">
+            <a:avLst/>
+          </a:prstGeom>
+          <a:solidFill>
+            <a:srgbClr val="D9782D"/>
+          </a:solidFill>
+          <a:ln/>
+        </p:spPr>
+        <p:txBody>
+          <a:bodyPr/>
+          <a:lstStyle/>
+          <a:p>
+            <a:endParaRPr lang="zh-CN" altLang="en-US"/>
+          </a:p>
+        </p:txBody>
+      </p:sp>
+      <p:sp>
+        <p:nvSpPr>
+          <p:cNvPr id="22" name="Text 20"/>
+          <p:cNvSpPr/>
+          <p:nvPr/>
+        </p:nvSpPr>
+        <p:spPr>
+          <a:xfrm>
+            <a:off x="3703320" y="3063240"/>
+            <a:ext cx="365760" cy="365760"/>
+          </a:xfrm>
+          <a:prstGeom prst="rect">
+            <a:avLst/>
+          </a:prstGeom>
+          <a:noFill/>
+          <a:ln/>
+        </p:spPr>
+        <p:txBody>
+          <a:bodyPr wrap="square" rtlCol="0" anchor="ctr"/>
+          <a:lstStyle/>
+          <a:p>
+            <a:pPr marL="0" indent="0" algn="ctr">
+              <a:buNone/>
+            </a:pPr>
+            <a:r>
+              <a:rPr lang="en-US" sz="1300" b="1" dirty="0">
+                <a:solidFill>
+                  <a:srgbClr val="FFFFFF"/>
+                </a:solidFill>
+                <a:latin typeface="Calibri" pitchFamily="34" charset="0"/>
+                <a:ea typeface="Calibri" pitchFamily="34" charset="-122"/>
+                <a:cs typeface="Calibri" pitchFamily="34" charset="-120"/>
+              </a:rPr>
+              <a:t>5</a:t>
+            </a:r>
+            <a:endParaRPr lang="en-US" sz="1300" dirty="0"/>
+          </a:p>
+        </p:txBody>
+      </p:sp>
+      <p:sp>
+        <p:nvSpPr>
+          <p:cNvPr id="23" name="Text 21"/>
+          <p:cNvSpPr/>
+          <p:nvPr/>
+        </p:nvSpPr>
+        <p:spPr>
+          <a:xfrm>
+            <a:off x="4206240" y="3165582"/>
+            <a:ext cx="1920240" cy="857778"/>
+          </a:xfrm>
+          <a:prstGeom prst="rect">
+            <a:avLst/>
+          </a:prstGeom>
+          <a:noFill/>
+          <a:ln/>
+        </p:spPr>
+        <p:txBody>
+          <a:bodyPr wrap="square" rtlCol="0" anchor="ctr"/>
+          <a:lstStyle/>
+          <a:p>
+            <a:pPr marL="0" indent="0">
+              <a:lnSpc>
+                <a:spcPct val="105000"/>
+              </a:lnSpc>
+              <a:buNone/>
+            </a:pPr>
+            <a:r>
+              <a:rPr lang="en-US" sz="1600" dirty="0">
+                <a:solidFill>
+                  <a:srgbClr val="222831"/>
+                </a:solidFill>
+                <a:latin typeface="Calibri" pitchFamily="34" charset="0"/>
+                <a:ea typeface="Calibri" pitchFamily="34" charset="-122"/>
+                <a:cs typeface="Calibri" pitchFamily="34" charset="-120"/>
+              </a:rPr>
+              <a:t>Replies are unhelpful, or there’s no reply at all</a:t>
+            </a:r>
+            <a:endParaRPr lang="en-US" sz="1600" dirty="0"/>
+          </a:p>
+        </p:txBody>
+      </p:sp>
+      <p:sp>
+        <p:nvSpPr>
+          <p:cNvPr id="24" name="Shape 22"/>
+          <p:cNvSpPr/>
+          <p:nvPr/>
+        </p:nvSpPr>
+        <p:spPr>
+          <a:xfrm>
+            <a:off x="3566160" y="4454886"/>
+            <a:ext cx="2697480" cy="1170432"/>
+          </a:xfrm>
+          <a:prstGeom prst="roundRect">
+            <a:avLst>
+              <a:gd name="adj" fmla="val 6250"/>
+            </a:avLst>
+          </a:prstGeom>
+          <a:solidFill>
+            <a:srgbClr val="F4F5F7"/>
+          </a:solidFill>
+          <a:ln/>
+        </p:spPr>
+        <p:txBody>
+          <a:bodyPr/>
+          <a:lstStyle/>
+          <a:p>
+            <a:endParaRPr lang="zh-CN" altLang="en-US"/>
+          </a:p>
+        </p:txBody>
+      </p:sp>
+      <p:sp>
+        <p:nvSpPr>
+          <p:cNvPr id="25" name="Shape 23"/>
+          <p:cNvSpPr/>
+          <p:nvPr/>
+        </p:nvSpPr>
+        <p:spPr>
+          <a:xfrm>
+            <a:off x="3703320" y="4592046"/>
+            <a:ext cx="365760" cy="365760"/>
+          </a:xfrm>
+          <a:prstGeom prst="ellipse">
+            <a:avLst/>
+          </a:prstGeom>
+          <a:solidFill>
+            <a:srgbClr val="D9782D"/>
+          </a:solidFill>
+          <a:ln/>
+        </p:spPr>
+        <p:txBody>
+          <a:bodyPr/>
+          <a:lstStyle/>
+          <a:p>
+            <a:endParaRPr lang="zh-CN" altLang="en-US"/>
+          </a:p>
+        </p:txBody>
+      </p:sp>
+      <p:sp>
+        <p:nvSpPr>
+          <p:cNvPr id="26" name="Text 24"/>
+          <p:cNvSpPr/>
+          <p:nvPr/>
+        </p:nvSpPr>
+        <p:spPr>
+          <a:xfrm>
+            <a:off x="3703320" y="4592046"/>
+            <a:ext cx="365760" cy="365760"/>
+          </a:xfrm>
+          <a:prstGeom prst="rect">
+            <a:avLst/>
+          </a:prstGeom>
+          <a:noFill/>
+          <a:ln/>
+        </p:spPr>
+        <p:txBody>
+          <a:bodyPr wrap="square" rtlCol="0" anchor="ctr"/>
+          <a:lstStyle/>
+          <a:p>
+            <a:pPr marL="0" indent="0" algn="ctr">
+              <a:buNone/>
+            </a:pPr>
+            <a:r>
+              <a:rPr lang="en-US" sz="1300" b="1" dirty="0">
+                <a:solidFill>
+                  <a:srgbClr val="FFFFFF"/>
+                </a:solidFill>
+                <a:latin typeface="Calibri" pitchFamily="34" charset="0"/>
+                <a:ea typeface="Calibri" pitchFamily="34" charset="-122"/>
+                <a:cs typeface="Calibri" pitchFamily="34" charset="-120"/>
+              </a:rPr>
+              <a:t>6</a:t>
+            </a:r>
+            <a:endParaRPr lang="en-US" sz="1300" dirty="0"/>
+          </a:p>
+        </p:txBody>
+      </p:sp>
+      <p:sp>
+        <p:nvSpPr>
+          <p:cNvPr id="27" name="Text 25"/>
+          <p:cNvSpPr/>
+          <p:nvPr/>
+        </p:nvSpPr>
+        <p:spPr>
+          <a:xfrm>
+            <a:off x="4206240" y="4592046"/>
+            <a:ext cx="1920240" cy="960120"/>
+          </a:xfrm>
+          <a:prstGeom prst="rect">
+            <a:avLst/>
+          </a:prstGeom>
+          <a:noFill/>
+          <a:ln/>
+        </p:spPr>
+        <p:txBody>
+          <a:bodyPr wrap="square" rtlCol="0" anchor="ctr"/>
+          <a:lstStyle/>
+          <a:p>
+            <a:pPr marL="0" indent="0">
+              <a:lnSpc>
+                <a:spcPct val="105000"/>
+              </a:lnSpc>
+              <a:buNone/>
+            </a:pPr>
+            <a:r>
+              <a:rPr lang="en-US" sz="1400" dirty="0">
+                <a:solidFill>
+                  <a:srgbClr val="222831"/>
+                </a:solidFill>
+                <a:latin typeface="Calibri" pitchFamily="34" charset="0"/>
+                <a:ea typeface="Calibri" pitchFamily="34" charset="-122"/>
+                <a:cs typeface="Calibri" pitchFamily="34" charset="-120"/>
+              </a:rPr>
+              <a:t>Who’s actually responsible is unclear</a:t>
+            </a:r>
+            <a:endParaRPr lang="en-US" sz="1400" dirty="0"/>
+          </a:p>
+        </p:txBody>
+      </p:sp>
+      <p:sp>
+        <p:nvSpPr>
+          <p:cNvPr id="28" name="Shape 26"/>
+          <p:cNvSpPr/>
+          <p:nvPr/>
+        </p:nvSpPr>
+        <p:spPr>
+          <a:xfrm>
+            <a:off x="6492240" y="1435608"/>
+            <a:ext cx="2697480" cy="1170432"/>
+          </a:xfrm>
+          <a:prstGeom prst="roundRect">
+            <a:avLst>
+              <a:gd name="adj" fmla="val 6250"/>
+            </a:avLst>
+          </a:prstGeom>
+          <a:solidFill>
+            <a:srgbClr val="F4F5F7"/>
+          </a:solidFill>
+          <a:ln/>
+        </p:spPr>
+        <p:txBody>
+          <a:bodyPr/>
+          <a:lstStyle/>
+          <a:p>
+            <a:endParaRPr lang="zh-CN" altLang="en-US"/>
+          </a:p>
+        </p:txBody>
+      </p:sp>
+      <p:sp>
+        <p:nvSpPr>
+          <p:cNvPr id="29" name="Shape 27"/>
+          <p:cNvSpPr/>
+          <p:nvPr/>
+        </p:nvSpPr>
+        <p:spPr>
+          <a:xfrm>
+            <a:off x="6629400" y="1572768"/>
+            <a:ext cx="365760" cy="365760"/>
+          </a:xfrm>
+          <a:prstGeom prst="ellipse">
+            <a:avLst/>
+          </a:prstGeom>
+          <a:solidFill>
+            <a:srgbClr val="D9782D"/>
+          </a:solidFill>
+          <a:ln/>
+        </p:spPr>
+        <p:txBody>
+          <a:bodyPr/>
+          <a:lstStyle/>
+          <a:p>
+            <a:endParaRPr lang="zh-CN" altLang="en-US"/>
+          </a:p>
+        </p:txBody>
+      </p:sp>
+      <p:sp>
+        <p:nvSpPr>
+          <p:cNvPr id="30" name="Text 28"/>
+          <p:cNvSpPr/>
+          <p:nvPr/>
+        </p:nvSpPr>
+        <p:spPr>
+          <a:xfrm>
+            <a:off x="6629400" y="1572768"/>
+            <a:ext cx="365760" cy="365760"/>
+          </a:xfrm>
+          <a:prstGeom prst="rect">
+            <a:avLst/>
+          </a:prstGeom>
+          <a:noFill/>
+          <a:ln/>
+        </p:spPr>
+        <p:txBody>
+          <a:bodyPr wrap="square" rtlCol="0" anchor="ctr"/>
+          <a:lstStyle/>
+          <a:p>
+            <a:pPr marL="0" indent="0" algn="ctr">
+              <a:buNone/>
+            </a:pPr>
+            <a:r>
+              <a:rPr lang="en-US" sz="1300" b="1" dirty="0">
+                <a:solidFill>
+                  <a:srgbClr val="FFFFFF"/>
+                </a:solidFill>
+                <a:latin typeface="Calibri" pitchFamily="34" charset="0"/>
+                <a:ea typeface="Calibri" pitchFamily="34" charset="-122"/>
+                <a:cs typeface="Calibri" pitchFamily="34" charset="-120"/>
+              </a:rPr>
+              <a:t>7</a:t>
+            </a:r>
+            <a:endParaRPr lang="en-US" sz="1300" dirty="0"/>
+          </a:p>
+        </p:txBody>
+      </p:sp>
+      <p:sp>
+        <p:nvSpPr>
+          <p:cNvPr id="31" name="Text 29"/>
+          <p:cNvSpPr/>
+          <p:nvPr/>
+        </p:nvSpPr>
+        <p:spPr>
+          <a:xfrm>
+            <a:off x="7223760" y="1572768"/>
+            <a:ext cx="1828800" cy="960120"/>
+          </a:xfrm>
+          <a:prstGeom prst="rect">
+            <a:avLst/>
+          </a:prstGeom>
+          <a:noFill/>
+          <a:ln/>
+        </p:spPr>
+        <p:txBody>
+          <a:bodyPr wrap="square" rtlCol="0" anchor="ctr"/>
+          <a:lstStyle/>
+          <a:p>
+            <a:pPr marL="0" indent="0">
+              <a:lnSpc>
+                <a:spcPct val="105000"/>
+              </a:lnSpc>
+              <a:buNone/>
+            </a:pPr>
+            <a:r>
+              <a:rPr lang="en-US" sz="1400" dirty="0">
+                <a:solidFill>
+                  <a:srgbClr val="222831"/>
+                </a:solidFill>
+                <a:latin typeface="Calibri" pitchFamily="34" charset="0"/>
+                <a:ea typeface="Calibri" pitchFamily="34" charset="-122"/>
+                <a:cs typeface="Calibri" pitchFamily="34" charset="-120"/>
+              </a:rPr>
+              <a:t>Residents check status repeatedly, with no better information each time</a:t>
+            </a:r>
+            <a:endParaRPr lang="en-US" sz="1400" dirty="0"/>
+          </a:p>
+        </p:txBody>
+      </p:sp>
+      <p:sp>
+        <p:nvSpPr>
+          <p:cNvPr id="33" name="Text 31"/>
+          <p:cNvSpPr/>
+          <p:nvPr/>
+        </p:nvSpPr>
+        <p:spPr>
+          <a:xfrm>
+            <a:off x="6995160" y="356616"/>
+            <a:ext cx="4892040" cy="729762"/>
+          </a:xfrm>
+          <a:prstGeom prst="rect">
+            <a:avLst/>
+          </a:prstGeom>
+          <a:noFill/>
+          <a:ln/>
+        </p:spPr>
+        <p:txBody>
+          <a:bodyPr wrap="square" rtlCol="0" anchor="ctr"/>
+          <a:lstStyle/>
+          <a:p>
+            <a:pPr>
+              <a:lnSpc>
+                <a:spcPct val="105000"/>
+              </a:lnSpc>
+            </a:pPr>
+            <a:r>
+              <a:rPr lang="en-US" altLang="zh-CN" sz="1600" b="1" i="1" dirty="0">
                 <a:latin typeface="Cambria" pitchFamily="34" charset="0"/>
                 <a:ea typeface="Cambria" pitchFamily="34" charset="-122"/>
                 <a:cs typeface="Cambria" pitchFamily="34" charset="-120"/>
               </a:rPr>
-              <a:t>BC</a:t>
-            </a:r>
-            <a:endParaRPr lang="en-US" sz="1800" dirty="0"/>
-          </a:p>
-        </p:txBody>
-      </p:sp>
-      <p:sp>
-        <p:nvSpPr>
-          <p:cNvPr id="9" name="Text 6"/>
-          <p:cNvSpPr/>
-          <p:nvPr/>
-        </p:nvSpPr>
-        <p:spPr>
-          <a:xfrm>
-            <a:off x="1965960" y="2258568"/>
-            <a:ext cx="3794760" cy="320040"/>
-          </a:xfrm>
-          <a:prstGeom prst="rect">
-            <a:avLst/>
-          </a:prstGeom>
-          <a:noFill/>
-          <a:ln/>
-        </p:spPr>
-        <p:txBody>
-          <a:bodyPr wrap="square" rtlCol="0" anchor="ctr"/>
-          <a:lstStyle/>
-          <a:p>
-            <a:pPr indent="0" marL="0">
-              <a:buNone/>
-            </a:pPr>
-            <a:r>
-              <a:rPr lang="en-US" sz="1100" dirty="0">
-                <a:solidFill>
-                  <a:srgbClr val="5B6472"/>
-                </a:solidFill>
-                <a:latin typeface="Calibri" pitchFamily="34" charset="0"/>
-                <a:ea typeface="Calibri" pitchFamily="34" charset="-122"/>
-                <a:cs typeface="Calibri" pitchFamily="34" charset="-120"/>
-              </a:rPr>
-              <a:t>International student, 25, apartment tenant</a:t>
-            </a:r>
+              <a:t>The pain comes from the absence of visible status, a responsible party, and any expectation to hold onto.</a:t>
+            </a:r>
+            <a:endParaRPr lang="en-US" altLang="zh-CN" sz="1600" b="1" dirty="0"/>
+          </a:p>
+          <a:p>
+            <a:pPr marL="0" indent="0">
+              <a:lnSpc>
+                <a:spcPct val="105000"/>
+              </a:lnSpc>
+              <a:buNone/>
+            </a:pPr>
             <a:endParaRPr lang="en-US" sz="1100" dirty="0"/>
           </a:p>
         </p:txBody>
       </p:sp>
       <p:sp>
         <p:nvSpPr>
-          <p:cNvPr id="10" name="Text 7"/>
-          <p:cNvSpPr/>
-          <p:nvPr/>
-        </p:nvSpPr>
-        <p:spPr>
-          <a:xfrm>
-            <a:off x="960120" y="2743200"/>
-            <a:ext cx="4709160" cy="960120"/>
-          </a:xfrm>
-          <a:prstGeom prst="rect">
-            <a:avLst/>
-          </a:prstGeom>
-          <a:noFill/>
-          <a:ln/>
-        </p:spPr>
-        <p:txBody>
-          <a:bodyPr wrap="square" rtlCol="0" anchor="ctr"/>
-          <a:lstStyle/>
-          <a:p>
-            <a:pPr indent="0" marL="0">
+          <p:cNvPr id="35" name="Text 33"/>
+          <p:cNvSpPr/>
+          <p:nvPr/>
+        </p:nvSpPr>
+        <p:spPr>
+          <a:xfrm>
+            <a:off x="9646920" y="1702542"/>
+            <a:ext cx="2194560" cy="274320"/>
+          </a:xfrm>
+          <a:prstGeom prst="rect">
+            <a:avLst/>
+          </a:prstGeom>
+          <a:noFill/>
+          <a:ln/>
+        </p:spPr>
+        <p:txBody>
+          <a:bodyPr wrap="square" rtlCol="0" anchor="ctr"/>
+          <a:lstStyle/>
+          <a:p>
+            <a:pPr marL="0" indent="0">
+              <a:buNone/>
+            </a:pPr>
+            <a:endParaRPr lang="en-US" sz="1050" dirty="0"/>
+          </a:p>
+        </p:txBody>
+      </p:sp>
+      <p:sp>
+        <p:nvSpPr>
+          <p:cNvPr id="36" name="Text 34"/>
+          <p:cNvSpPr/>
+          <p:nvPr/>
+        </p:nvSpPr>
+        <p:spPr>
+          <a:xfrm>
+            <a:off x="6469711" y="2855742"/>
+            <a:ext cx="3177209" cy="1325880"/>
+          </a:xfrm>
+          <a:prstGeom prst="rect">
+            <a:avLst/>
+          </a:prstGeom>
+          <a:noFill/>
+          <a:ln/>
+        </p:spPr>
+        <p:txBody>
+          <a:bodyPr wrap="square" rtlCol="0" anchor="ctr"/>
+          <a:lstStyle/>
+          <a:p>
+            <a:pPr marL="0" indent="0">
               <a:lnSpc>
-                <a:spcPct val="115000"/>
+                <a:spcPct val="125000"/>
               </a:lnSpc>
               <a:buNone/>
             </a:pPr>
-            <a:r>
-              <a:rPr lang="en-US" sz="1080" b="1" dirty="0">
-                <a:solidFill>
-                  <a:srgbClr val="1C2541"/>
-                </a:solidFill>
-                <a:latin typeface="Calibri" pitchFamily="34" charset="0"/>
-                <a:ea typeface="Calibri" pitchFamily="34" charset="-122"/>
-                <a:cs typeface="Calibri" pitchFamily="34" charset="-120"/>
-              </a:rPr>
-              <a:t>Backstory  </a:t>
-            </a:r>
-            <a:pPr indent="0" marL="0">
+            <a:endParaRPr lang="en-US" sz="1400" b="1" dirty="0"/>
+          </a:p>
+        </p:txBody>
+      </p:sp>
+      <p:sp>
+        <p:nvSpPr>
+          <p:cNvPr id="37" name="Text 35"/>
+          <p:cNvSpPr/>
+          <p:nvPr/>
+        </p:nvSpPr>
+        <p:spPr>
+          <a:xfrm>
+            <a:off x="7390638" y="4864608"/>
+            <a:ext cx="3058668" cy="896112"/>
+          </a:xfrm>
+          <a:prstGeom prst="rect">
+            <a:avLst/>
+          </a:prstGeom>
+          <a:noFill/>
+          <a:ln/>
+        </p:spPr>
+        <p:txBody>
+          <a:bodyPr wrap="square" rtlCol="0" anchor="ctr"/>
+          <a:lstStyle/>
+          <a:p>
+            <a:pPr>
               <a:lnSpc>
-                <a:spcPct val="115000"/>
+                <a:spcPct val="120000"/>
               </a:lnSpc>
-              <a:buNone/>
-            </a:pPr>
-            <a:r>
-              <a:rPr lang="en-US" sz="1080" dirty="0">
-                <a:solidFill>
-                  <a:srgbClr val="222831"/>
-                </a:solidFill>
-                <a:latin typeface="Calibri" pitchFamily="34" charset="0"/>
-                <a:ea typeface="Calibri" pitchFamily="34" charset="-122"/>
-                <a:cs typeface="Calibri" pitchFamily="34" charset="-120"/>
-              </a:rPr>
-              <a:t>Has lived in the UK, Hong Kong SAR and Australia, mostly in apartments near campus; meets repair problems occasionally.</a:t>
-            </a:r>
-            <a:endParaRPr lang="en-US" sz="1080" dirty="0"/>
-          </a:p>
-        </p:txBody>
-      </p:sp>
-      <p:sp>
-        <p:nvSpPr>
-          <p:cNvPr id="11" name="Text 8"/>
-          <p:cNvSpPr/>
-          <p:nvPr/>
-        </p:nvSpPr>
-        <p:spPr>
-          <a:xfrm>
-            <a:off x="960120" y="3749040"/>
-            <a:ext cx="4709160" cy="1051560"/>
-          </a:xfrm>
-          <a:prstGeom prst="rect">
-            <a:avLst/>
-          </a:prstGeom>
-          <a:noFill/>
-          <a:ln/>
-        </p:spPr>
-        <p:txBody>
-          <a:bodyPr wrap="square" rtlCol="0" anchor="ctr"/>
-          <a:lstStyle/>
-          <a:p>
-            <a:pPr indent="0" marL="0">
-              <a:lnSpc>
-                <a:spcPct val="115000"/>
-              </a:lnSpc>
-              <a:buNone/>
-            </a:pPr>
-            <a:r>
-              <a:rPr lang="en-US" sz="1080" b="1" dirty="0">
-                <a:solidFill>
-                  <a:srgbClr val="1C2541"/>
-                </a:solidFill>
-                <a:latin typeface="Calibri" pitchFamily="34" charset="0"/>
-                <a:ea typeface="Calibri" pitchFamily="34" charset="-122"/>
-                <a:cs typeface="Calibri" pitchFamily="34" charset="-120"/>
-              </a:rPr>
-              <a:t>Frustration  </a:t>
-            </a:r>
-            <a:pPr indent="0" marL="0">
-              <a:lnSpc>
-                <a:spcPct val="115000"/>
-              </a:lnSpc>
-              <a:buNone/>
-            </a:pPr>
-            <a:r>
-              <a:rPr lang="en-US" sz="1080" dirty="0">
-                <a:solidFill>
-                  <a:srgbClr val="222831"/>
-                </a:solidFill>
-                <a:latin typeface="Calibri" pitchFamily="34" charset="0"/>
-                <a:ea typeface="Calibri" pitchFamily="34" charset="-122"/>
-                <a:cs typeface="Calibri" pitchFamily="34" charset="-120"/>
-              </a:rPr>
-              <a:t>Doesn’t know who’s responsible or whether asking again would help — nothing is ever confirmed, so continuing to raise it starts to feel pointless.</a:t>
-            </a:r>
-            <a:endParaRPr lang="en-US" sz="1080" dirty="0"/>
-          </a:p>
-        </p:txBody>
-      </p:sp>
-      <p:sp>
-        <p:nvSpPr>
-          <p:cNvPr id="12" name="Shape 9"/>
-          <p:cNvSpPr/>
-          <p:nvPr/>
-        </p:nvSpPr>
-        <p:spPr>
-          <a:xfrm>
-            <a:off x="960120" y="4892040"/>
-            <a:ext cx="4709160" cy="1051560"/>
-          </a:xfrm>
-          <a:prstGeom prst="roundRect">
-            <a:avLst>
-              <a:gd name="adj" fmla="val 5217"/>
-            </a:avLst>
-          </a:prstGeom>
-          <a:solidFill>
-            <a:srgbClr val="1C2541"/>
-          </a:solidFill>
-          <a:ln/>
-        </p:spPr>
-      </p:sp>
-      <p:sp>
-        <p:nvSpPr>
-          <p:cNvPr id="13" name="Text 10"/>
-          <p:cNvSpPr/>
-          <p:nvPr/>
-        </p:nvSpPr>
-        <p:spPr>
-          <a:xfrm>
-            <a:off x="1143000" y="4956048"/>
-            <a:ext cx="4343400" cy="914400"/>
-          </a:xfrm>
-          <a:prstGeom prst="rect">
-            <a:avLst/>
-          </a:prstGeom>
-          <a:noFill/>
-          <a:ln/>
-        </p:spPr>
-        <p:txBody>
-          <a:bodyPr wrap="square" rtlCol="0" anchor="ctr"/>
-          <a:lstStyle/>
-          <a:p>
-            <a:pPr indent="0" marL="0">
-              <a:lnSpc>
-                <a:spcPct val="115000"/>
-              </a:lnSpc>
-              <a:buNone/>
-            </a:pPr>
-            <a:r>
-              <a:rPr lang="en-US" sz="1100" i="1" dirty="0">
-                <a:solidFill>
-                  <a:srgbClr val="FFFFFF"/>
-                </a:solidFill>
-                <a:latin typeface="Cambria" pitchFamily="34" charset="0"/>
-                <a:ea typeface="Cambria" pitchFamily="34" charset="-122"/>
-                <a:cs typeface="Cambria" pitchFamily="34" charset="-120"/>
-              </a:rPr>
-              <a:t>“I reported it once. After that I just stopped asking — I didn’t know who to ask, or if it would even matter.”</a:t>
-            </a:r>
-            <a:endParaRPr lang="en-US" sz="1100" dirty="0"/>
-          </a:p>
-        </p:txBody>
-      </p:sp>
-      <p:sp>
-        <p:nvSpPr>
-          <p:cNvPr id="14" name="Shape 11"/>
-          <p:cNvSpPr/>
-          <p:nvPr/>
-        </p:nvSpPr>
-        <p:spPr>
-          <a:xfrm>
-            <a:off x="6217920" y="1371600"/>
-            <a:ext cx="5349240" cy="4800600"/>
-          </a:xfrm>
-          <a:prstGeom prst="roundRect">
-            <a:avLst>
-              <a:gd name="adj" fmla="val 1905"/>
-            </a:avLst>
-          </a:prstGeom>
-          <a:solidFill>
-            <a:srgbClr val="F4F5F7"/>
-          </a:solidFill>
-          <a:ln/>
-        </p:spPr>
-      </p:sp>
-      <p:sp>
-        <p:nvSpPr>
-          <p:cNvPr id="15" name="Shape 12"/>
-          <p:cNvSpPr/>
-          <p:nvPr/>
-        </p:nvSpPr>
-        <p:spPr>
-          <a:xfrm>
-            <a:off x="6537960" y="1691640"/>
-            <a:ext cx="822960" cy="822960"/>
-          </a:xfrm>
-          <a:prstGeom prst="ellipse">
-            <a:avLst/>
-          </a:prstGeom>
-          <a:solidFill>
-            <a:srgbClr val="1C2541"/>
-          </a:solidFill>
-          <a:ln/>
-        </p:spPr>
-      </p:sp>
-      <p:pic>
-        <p:nvPicPr>
-          <p:cNvPr id="16" name="Image 1" descr="/Users/devonma/Desktop/9106/Assignment/A2b/build/icons/users.png">    </p:cNvPr>
-          <p:cNvPicPr>
-            <a:picLocks noChangeAspect="1"/>
-          </p:cNvPicPr>
-          <p:nvPr/>
-        </p:nvPicPr>
-        <p:blipFill>
-          <a:blip r:embed="rId2"/>
-          <a:stretch>
-            <a:fillRect/>
-          </a:stretch>
-        </p:blipFill>
-        <p:spPr>
-          <a:xfrm>
-            <a:off x="6739128" y="1892808"/>
-            <a:ext cx="420624" cy="420624"/>
-          </a:xfrm>
-          <a:prstGeom prst="rect">
-            <a:avLst/>
-          </a:prstGeom>
-        </p:spPr>
-      </p:pic>
-      <p:sp>
-        <p:nvSpPr>
-          <p:cNvPr id="17" name="Text 13"/>
-          <p:cNvSpPr/>
-          <p:nvPr/>
-        </p:nvSpPr>
-        <p:spPr>
-          <a:xfrm>
-            <a:off x="7543800" y="1691640"/>
-            <a:ext cx="3794760" cy="256032"/>
-          </a:xfrm>
-          <a:prstGeom prst="rect">
-            <a:avLst/>
-          </a:prstGeom>
-          <a:noFill/>
-          <a:ln/>
-        </p:spPr>
-        <p:txBody>
-          <a:bodyPr wrap="square" rtlCol="0" anchor="ctr"/>
-          <a:lstStyle/>
-          <a:p>
-            <a:pPr indent="0" marL="0">
-              <a:buNone/>
-            </a:pPr>
-            <a:r>
-              <a:rPr lang="en-US" sz="1050" b="1" spc="100" kern="0" dirty="0">
-                <a:solidFill>
-                  <a:srgbClr val="D9782D"/>
-                </a:solidFill>
-                <a:latin typeface="Calibri" pitchFamily="34" charset="0"/>
-                <a:ea typeface="Calibri" pitchFamily="34" charset="-122"/>
-                <a:cs typeface="Calibri" pitchFamily="34" charset="-120"/>
-              </a:rPr>
-              <a:t>PERSONA B — THE PERSISTENT ASKER</a:t>
-            </a:r>
-            <a:endParaRPr lang="en-US" sz="1050" dirty="0"/>
-          </a:p>
-        </p:txBody>
-      </p:sp>
-      <p:sp>
-        <p:nvSpPr>
-          <p:cNvPr id="18" name="Text 14"/>
-          <p:cNvSpPr/>
-          <p:nvPr/>
-        </p:nvSpPr>
-        <p:spPr>
-          <a:xfrm>
-            <a:off x="7543800" y="1920240"/>
-            <a:ext cx="3794760" cy="365760"/>
-          </a:xfrm>
-          <a:prstGeom prst="rect">
-            <a:avLst/>
-          </a:prstGeom>
-          <a:noFill/>
-          <a:ln/>
-        </p:spPr>
-        <p:txBody>
-          <a:bodyPr wrap="square" rtlCol="0" anchor="ctr"/>
-          <a:lstStyle/>
-          <a:p>
-            <a:pPr indent="0" marL="0">
-              <a:buNone/>
-            </a:pPr>
-            <a:r>
-              <a:rPr lang="en-US" sz="1800" b="1" dirty="0">
-                <a:solidFill>
-                  <a:srgbClr val="1C2541"/>
-                </a:solidFill>
-                <a:latin typeface="Cambria" pitchFamily="34" charset="0"/>
-                <a:ea typeface="Cambria" pitchFamily="34" charset="-122"/>
-                <a:cs typeface="Cambria" pitchFamily="34" charset="-120"/>
-              </a:rPr>
-              <a:t>[Name TBD]</a:t>
-            </a:r>
-            <a:endParaRPr lang="en-US" sz="1800" dirty="0"/>
-          </a:p>
-        </p:txBody>
-      </p:sp>
-      <p:sp>
-        <p:nvSpPr>
-          <p:cNvPr id="19" name="Text 15"/>
-          <p:cNvSpPr/>
-          <p:nvPr/>
-        </p:nvSpPr>
-        <p:spPr>
-          <a:xfrm>
-            <a:off x="7543800" y="2258568"/>
-            <a:ext cx="3794760" cy="320040"/>
-          </a:xfrm>
-          <a:prstGeom prst="rect">
-            <a:avLst/>
-          </a:prstGeom>
-          <a:noFill/>
-          <a:ln/>
-        </p:spPr>
-        <p:txBody>
-          <a:bodyPr wrap="square" rtlCol="0" anchor="ctr"/>
-          <a:lstStyle/>
-          <a:p>
-            <a:pPr indent="0" marL="0">
-              <a:buNone/>
-            </a:pPr>
-            <a:r>
-              <a:rPr lang="en-US" sz="1100" dirty="0">
-                <a:solidFill>
-                  <a:srgbClr val="5B6472"/>
-                </a:solidFill>
-                <a:latin typeface="Calibri" pitchFamily="34" charset="0"/>
-                <a:ea typeface="Calibri" pitchFamily="34" charset="-122"/>
-                <a:cs typeface="Calibri" pitchFamily="34" charset="-120"/>
-              </a:rPr>
-              <a:t>[Housing type TBD], resident</a:t>
-            </a:r>
-            <a:endParaRPr lang="en-US" sz="1100" dirty="0"/>
-          </a:p>
-        </p:txBody>
-      </p:sp>
-      <p:sp>
-        <p:nvSpPr>
-          <p:cNvPr id="20" name="Text 16"/>
-          <p:cNvSpPr/>
-          <p:nvPr/>
-        </p:nvSpPr>
-        <p:spPr>
-          <a:xfrm>
-            <a:off x="6537960" y="2743200"/>
-            <a:ext cx="4709160" cy="960120"/>
-          </a:xfrm>
-          <a:prstGeom prst="rect">
-            <a:avLst/>
-          </a:prstGeom>
-          <a:noFill/>
-          <a:ln/>
-        </p:spPr>
-        <p:txBody>
-          <a:bodyPr wrap="square" rtlCol="0" anchor="ctr"/>
-          <a:lstStyle/>
-          <a:p>
-            <a:pPr indent="0" marL="0">
-              <a:lnSpc>
-                <a:spcPct val="115000"/>
-              </a:lnSpc>
-              <a:buNone/>
-            </a:pPr>
-            <a:r>
-              <a:rPr lang="en-US" sz="1080" b="1" dirty="0">
-                <a:solidFill>
-                  <a:srgbClr val="1C2541"/>
-                </a:solidFill>
-                <a:latin typeface="Calibri" pitchFamily="34" charset="0"/>
-                <a:ea typeface="Calibri" pitchFamily="34" charset="-122"/>
-                <a:cs typeface="Calibri" pitchFamily="34" charset="-120"/>
-              </a:rPr>
-              <a:t>Backstory  </a:t>
-            </a:r>
-            <a:pPr indent="0" marL="0">
-              <a:lnSpc>
-                <a:spcPct val="115000"/>
-              </a:lnSpc>
-              <a:buNone/>
-            </a:pPr>
-            <a:r>
-              <a:rPr lang="en-US" sz="1080" dirty="0">
-                <a:solidFill>
-                  <a:srgbClr val="222831"/>
-                </a:solidFill>
-                <a:latin typeface="Calibri" pitchFamily="34" charset="0"/>
-                <a:ea typeface="Calibri" pitchFamily="34" charset="-122"/>
-                <a:cs typeface="Calibri" pitchFamily="34" charset="-120"/>
-              </a:rPr>
-              <a:t>Keeps raising the fault through the proper channels rather than letting it go — treats it as something that should be resolved, not lived with.</a:t>
-            </a:r>
-            <a:endParaRPr lang="en-US" sz="1080" dirty="0"/>
-          </a:p>
-        </p:txBody>
-      </p:sp>
-      <p:sp>
-        <p:nvSpPr>
-          <p:cNvPr id="21" name="Text 17"/>
-          <p:cNvSpPr/>
-          <p:nvPr/>
-        </p:nvSpPr>
-        <p:spPr>
-          <a:xfrm>
-            <a:off x="6537960" y="3749040"/>
-            <a:ext cx="4709160" cy="1051560"/>
-          </a:xfrm>
-          <a:prstGeom prst="rect">
-            <a:avLst/>
-          </a:prstGeom>
-          <a:noFill/>
-          <a:ln/>
-        </p:spPr>
-        <p:txBody>
-          <a:bodyPr wrap="square" rtlCol="0" anchor="ctr"/>
-          <a:lstStyle/>
-          <a:p>
-            <a:pPr indent="0" marL="0">
-              <a:lnSpc>
-                <a:spcPct val="115000"/>
-              </a:lnSpc>
-              <a:buNone/>
-            </a:pPr>
-            <a:r>
-              <a:rPr lang="en-US" sz="1080" b="1" dirty="0">
-                <a:solidFill>
-                  <a:srgbClr val="1C2541"/>
-                </a:solidFill>
-                <a:latin typeface="Calibri" pitchFamily="34" charset="0"/>
-                <a:ea typeface="Calibri" pitchFamily="34" charset="-122"/>
-                <a:cs typeface="Calibri" pitchFamily="34" charset="-120"/>
-              </a:rPr>
-              <a:t>Frustration  </a:t>
-            </a:r>
-            <a:pPr indent="0" marL="0">
-              <a:lnSpc>
-                <a:spcPct val="115000"/>
-              </a:lnSpc>
-              <a:buNone/>
-            </a:pPr>
-            <a:r>
-              <a:rPr lang="en-US" sz="1080" dirty="0">
-                <a:solidFill>
-                  <a:srgbClr val="222831"/>
-                </a:solidFill>
-                <a:latin typeface="Calibri" pitchFamily="34" charset="0"/>
-                <a:ea typeface="Calibri" pitchFamily="34" charset="-122"/>
-                <a:cs typeface="Calibri" pitchFamily="34" charset="-120"/>
-              </a:rPr>
-              <a:t>Keeps raising the issue and keeps hearing “we’re looking into it” — no timeframe, no name attached; the effort never converts into clarity.</a:t>
-            </a:r>
-            <a:endParaRPr lang="en-US" sz="1080" dirty="0"/>
-          </a:p>
-        </p:txBody>
-      </p:sp>
-      <p:sp>
-        <p:nvSpPr>
-          <p:cNvPr id="22" name="Shape 18"/>
-          <p:cNvSpPr/>
-          <p:nvPr/>
-        </p:nvSpPr>
-        <p:spPr>
-          <a:xfrm>
-            <a:off x="6537960" y="4892040"/>
-            <a:ext cx="4709160" cy="1051560"/>
-          </a:xfrm>
-          <a:prstGeom prst="roundRect">
-            <a:avLst>
-              <a:gd name="adj" fmla="val 5217"/>
-            </a:avLst>
-          </a:prstGeom>
-          <a:solidFill>
-            <a:srgbClr val="1C2541"/>
-          </a:solidFill>
-          <a:ln/>
-        </p:spPr>
-      </p:sp>
-      <p:sp>
-        <p:nvSpPr>
-          <p:cNvPr id="23" name="Text 19"/>
-          <p:cNvSpPr/>
-          <p:nvPr/>
-        </p:nvSpPr>
-        <p:spPr>
-          <a:xfrm>
-            <a:off x="6720840" y="4956048"/>
-            <a:ext cx="4343400" cy="914400"/>
-          </a:xfrm>
-          <a:prstGeom prst="rect">
-            <a:avLst/>
-          </a:prstGeom>
-          <a:noFill/>
-          <a:ln/>
-        </p:spPr>
-        <p:txBody>
-          <a:bodyPr wrap="square" rtlCol="0" anchor="ctr"/>
-          <a:lstStyle/>
-          <a:p>
-            <a:pPr indent="0" marL="0">
-              <a:lnSpc>
-                <a:spcPct val="115000"/>
-              </a:lnSpc>
-              <a:buNone/>
-            </a:pPr>
-            <a:r>
-              <a:rPr lang="en-US" sz="1100" i="1" dirty="0">
-                <a:solidFill>
-                  <a:srgbClr val="FFFFFF"/>
-                </a:solidFill>
-                <a:latin typeface="Cambria" pitchFamily="34" charset="0"/>
-                <a:ea typeface="Cambria" pitchFamily="34" charset="-122"/>
-                <a:cs typeface="Cambria" pitchFamily="34" charset="-120"/>
-              </a:rPr>
-              <a:t>“I called three times. Every time it was ‘someone will look into it.’ Nobody ever told me who, or when.”</a:t>
-            </a:r>
-            <a:endParaRPr lang="en-US" sz="1100" dirty="0"/>
-          </a:p>
-        </p:txBody>
-      </p:sp>
-      <p:sp>
-        <p:nvSpPr>
-          <p:cNvPr id="24" name="Text 20"/>
+            </a:pPr>
+            <a:r>
+              <a:rPr lang="en-US" altLang="zh-CN" sz="2000" b="1" dirty="0">
+                <a:solidFill>
+                  <a:srgbClr val="00B0F0"/>
+                </a:solidFill>
+                <a:latin typeface="Calibri" pitchFamily="34" charset="0"/>
+                <a:ea typeface="Calibri" pitchFamily="34" charset="-122"/>
+                <a:cs typeface="Calibri" pitchFamily="34" charset="-120"/>
+              </a:rPr>
+              <a:t>The information and influence around the wait</a:t>
+            </a:r>
+            <a:endParaRPr lang="en-US" sz="2000" b="1" dirty="0">
+              <a:solidFill>
+                <a:srgbClr val="00B0F0"/>
+              </a:solidFill>
+            </a:endParaRPr>
+          </a:p>
+        </p:txBody>
+      </p:sp>
+      <p:sp>
+        <p:nvSpPr>
+          <p:cNvPr id="38" name="Text 36"/>
           <p:cNvSpPr/>
           <p:nvPr/>
         </p:nvSpPr>
@@ -6075,7 +5758,7 @@
           <a:bodyPr wrap="square" rtlCol="0" anchor="ctr"/>
           <a:lstStyle/>
           <a:p>
-            <a:pPr algn="l" indent="0" marL="0">
+            <a:pPr marL="0" indent="0" algn="l">
               <a:buNone/>
             </a:pPr>
             <a:r>
@@ -6095,13 +5778,13 @@
       </p:sp>
       <p:sp>
         <p:nvSpPr>
-          <p:cNvPr id="25" name="Text 21"/>
-          <p:cNvSpPr/>
-          <p:nvPr/>
-        </p:nvSpPr>
-        <p:spPr>
-          <a:xfrm>
-            <a:off x="11430000" y="6537960"/>
+          <p:cNvPr id="39" name="Text 37"/>
+          <p:cNvSpPr/>
+          <p:nvPr/>
+        </p:nvSpPr>
+        <p:spPr>
+          <a:xfrm>
+            <a:off x="11576304" y="5059093"/>
             <a:ext cx="365760" cy="274320"/>
           </a:xfrm>
           <a:prstGeom prst="rect">
@@ -6114,7 +5797,7 @@
           <a:bodyPr wrap="square" rtlCol="0" anchor="ctr"/>
           <a:lstStyle/>
           <a:p>
-            <a:pPr algn="r" indent="0" marL="0">
+            <a:pPr marL="0" indent="0" algn="r">
               <a:buNone/>
             </a:pPr>
             <a:r>
@@ -6126,9 +5809,125 @@
                 <a:ea typeface="Calibri" pitchFamily="34" charset="-122"/>
                 <a:cs typeface="Calibri" pitchFamily="34" charset="-120"/>
               </a:rPr>
-              <a:t>5</a:t>
+              <a:t>4</a:t>
             </a:r>
             <a:endParaRPr lang="en-US" sz="900" dirty="0"/>
+          </a:p>
+        </p:txBody>
+      </p:sp>
+      <p:sp>
+        <p:nvSpPr>
+          <p:cNvPr id="40" name="文本框 39">
+            <a:extLst>
+              <a:ext uri="{FF2B5EF4-FFF2-40B4-BE49-F238E27FC236}">
+                <a16:creationId xmlns:a16="http://schemas.microsoft.com/office/drawing/2014/main" id="{BB6E15E2-BA32-DACB-5271-ED7224CA490A}"/>
+              </a:ext>
+            </a:extLst>
+          </p:cNvPr>
+          <p:cNvSpPr txBox="1"/>
+          <p:nvPr/>
+        </p:nvSpPr>
+        <p:spPr>
+          <a:xfrm>
+            <a:off x="7374172" y="3094238"/>
+            <a:ext cx="3631096" cy="523220"/>
+          </a:xfrm>
+          <a:prstGeom prst="rect">
+            <a:avLst/>
+          </a:prstGeom>
+          <a:noFill/>
+        </p:spPr>
+        <p:txBody>
+          <a:bodyPr wrap="square" rtlCol="0">
+            <a:spAutoFit/>
+          </a:bodyPr>
+          <a:lstStyle/>
+          <a:p>
+            <a:r>
+              <a:rPr kumimoji="1" lang="en-US" altLang="zh-CN" sz="2800" dirty="0">
+                <a:solidFill>
+                  <a:srgbClr val="00B0F0"/>
+                </a:solidFill>
+                <a:latin typeface="Cambria" panose="02040503050406030204" pitchFamily="18" charset="0"/>
+              </a:rPr>
+              <a:t>Reframe FROM:</a:t>
+            </a:r>
+          </a:p>
+        </p:txBody>
+      </p:sp>
+      <p:sp>
+        <p:nvSpPr>
+          <p:cNvPr id="41" name="文本框 40">
+            <a:extLst>
+              <a:ext uri="{FF2B5EF4-FFF2-40B4-BE49-F238E27FC236}">
+                <a16:creationId xmlns:a16="http://schemas.microsoft.com/office/drawing/2014/main" id="{D3264656-36AA-CF55-6446-4D1BC4B3A593}"/>
+              </a:ext>
+            </a:extLst>
+          </p:cNvPr>
+          <p:cNvSpPr txBox="1"/>
+          <p:nvPr/>
+        </p:nvSpPr>
+        <p:spPr>
+          <a:xfrm>
+            <a:off x="8138160" y="3639359"/>
+            <a:ext cx="1665008" cy="584775"/>
+          </a:xfrm>
+          <a:prstGeom prst="rect">
+            <a:avLst/>
+          </a:prstGeom>
+          <a:noFill/>
+        </p:spPr>
+        <p:txBody>
+          <a:bodyPr wrap="none" rtlCol="0">
+            <a:spAutoFit/>
+          </a:bodyPr>
+          <a:lstStyle/>
+          <a:p>
+            <a:r>
+              <a:rPr kumimoji="1" lang="en-US" altLang="zh-CN" sz="3200" dirty="0"/>
+              <a:t>Repair🔧</a:t>
+            </a:r>
+            <a:endParaRPr kumimoji="1" lang="zh-CN" altLang="en-US" sz="3200" dirty="0"/>
+          </a:p>
+        </p:txBody>
+      </p:sp>
+      <p:sp>
+        <p:nvSpPr>
+          <p:cNvPr id="44" name="文本框 43">
+            <a:extLst>
+              <a:ext uri="{FF2B5EF4-FFF2-40B4-BE49-F238E27FC236}">
+                <a16:creationId xmlns:a16="http://schemas.microsoft.com/office/drawing/2014/main" id="{74121F0B-38F7-69D0-854B-ECF0B561C351}"/>
+              </a:ext>
+            </a:extLst>
+          </p:cNvPr>
+          <p:cNvSpPr txBox="1"/>
+          <p:nvPr/>
+        </p:nvSpPr>
+        <p:spPr>
+          <a:xfrm>
+            <a:off x="8450485" y="4341388"/>
+            <a:ext cx="739235" cy="523220"/>
+          </a:xfrm>
+          <a:prstGeom prst="rect">
+            <a:avLst/>
+          </a:prstGeom>
+          <a:noFill/>
+        </p:spPr>
+        <p:txBody>
+          <a:bodyPr wrap="square">
+            <a:spAutoFit/>
+          </a:bodyPr>
+          <a:lstStyle/>
+          <a:p>
+            <a:r>
+              <a:rPr kumimoji="1" lang="en-US" altLang="zh-CN" sz="2800" dirty="0">
+                <a:solidFill>
+                  <a:srgbClr val="00B0F0"/>
+                </a:solidFill>
+                <a:latin typeface="Cambria" panose="02040503050406030204" pitchFamily="18" charset="0"/>
+              </a:rPr>
+              <a:t>TO:</a:t>
+            </a:r>
           </a:p>
         </p:txBody>
       </p:sp>
@@ -6148,6 +5947,7 @@
         <a:solidFill>
           <a:srgbClr val="1C2541"/>
         </a:solidFill>
+        <a:effectLst/>
       </p:bgPr>
     </p:bg>
     <p:spTree>
@@ -6185,7 +5985,7 @@
           <a:bodyPr wrap="square" rtlCol="0" anchor="ctr"/>
           <a:lstStyle/>
           <a:p>
-            <a:pPr indent="0" marL="0">
+            <a:pPr marL="0" indent="0">
               <a:buNone/>
             </a:pPr>
             <a:r>
@@ -6224,55 +6024,22 @@
           <a:bodyPr wrap="square" rtlCol="0" anchor="ctr"/>
           <a:lstStyle/>
           <a:p>
-            <a:pPr indent="0" marL="0">
-              <a:buNone/>
-            </a:pPr>
-            <a:r>
-              <a:rPr lang="en-US" sz="1300" i="1" dirty="0">
-                <a:solidFill>
-                  <a:srgbClr val="CFE0E8"/>
-                </a:solidFill>
-                <a:latin typeface="Calibri" pitchFamily="34" charset="0"/>
-                <a:ea typeface="Calibri" pitchFamily="34" charset="-122"/>
-                <a:cs typeface="Calibri" pitchFamily="34" charset="-120"/>
-              </a:rPr>
-              <a:t>Grounded in the research above — not a proposed solution</a:t>
-            </a:r>
+            <a:pPr marL="0" indent="0">
+              <a:buNone/>
+            </a:pPr>
             <a:endParaRPr lang="en-US" sz="1300" dirty="0"/>
           </a:p>
         </p:txBody>
       </p:sp>
       <p:sp>
         <p:nvSpPr>
-          <p:cNvPr id="4" name="Shape 2"/>
-          <p:cNvSpPr/>
-          <p:nvPr/>
-        </p:nvSpPr>
-        <p:spPr>
-          <a:xfrm>
-            <a:off x="640080" y="1463040"/>
-            <a:ext cx="10881360" cy="1874520"/>
-          </a:xfrm>
-          <a:prstGeom prst="roundRect">
-            <a:avLst>
-              <a:gd name="adj" fmla="val 3902"/>
-            </a:avLst>
-          </a:prstGeom>
-          <a:solidFill>
-            <a:srgbClr val="141A30"/>
-          </a:solidFill>
-          <a:ln/>
-        </p:spPr>
-      </p:sp>
-      <p:sp>
-        <p:nvSpPr>
           <p:cNvPr id="5" name="Text 3"/>
           <p:cNvSpPr/>
           <p:nvPr/>
         </p:nvSpPr>
         <p:spPr>
           <a:xfrm>
-            <a:off x="914400" y="1627632"/>
+            <a:off x="640080" y="1188720"/>
             <a:ext cx="5486400" cy="274320"/>
           </a:xfrm>
           <a:prstGeom prst="rect">
@@ -6285,11 +6052,11 @@
           <a:bodyPr wrap="square" rtlCol="0" anchor="ctr"/>
           <a:lstStyle/>
           <a:p>
-            <a:pPr indent="0" marL="0">
-              <a:buNone/>
-            </a:pPr>
-            <a:r>
-              <a:rPr lang="en-US" sz="1050" b="1" spc="150" kern="0" dirty="0">
+            <a:pPr marL="0" indent="0">
+              <a:buNone/>
+            </a:pPr>
+            <a:r>
+              <a:rPr lang="en-US" sz="1400" b="1" kern="0" spc="150" dirty="0">
                 <a:solidFill>
                   <a:srgbClr val="D9782D"/>
                 </a:solidFill>
@@ -6299,7 +6066,7 @@
               </a:rPr>
               <a:t>OUR PROBLEM / OPPORTUNITY SPACE</a:t>
             </a:r>
-            <a:endParaRPr lang="en-US" sz="1050" dirty="0"/>
+            <a:endParaRPr lang="en-US" sz="1400" dirty="0"/>
           </a:p>
         </p:txBody>
       </p:sp>
@@ -6311,7 +6078,7 @@
         </p:nvSpPr>
         <p:spPr>
           <a:xfrm>
-            <a:off x="914400" y="1938528"/>
+            <a:off x="602246" y="1641348"/>
             <a:ext cx="10332720" cy="1325880"/>
           </a:xfrm>
           <a:prstGeom prst="rect">
@@ -6324,14 +6091,14 @@
           <a:bodyPr wrap="square" rtlCol="0" anchor="ctr"/>
           <a:lstStyle/>
           <a:p>
-            <a:pPr indent="0" marL="0">
+            <a:pPr marL="0" indent="0">
               <a:lnSpc>
                 <a:spcPct val="125000"/>
               </a:lnSpc>
               <a:buNone/>
             </a:pPr>
             <a:r>
-              <a:rPr lang="en-US" sz="1400" i="1" dirty="0">
+              <a:rPr lang="en-US" sz="1600" i="1" dirty="0">
                 <a:solidFill>
                   <a:srgbClr val="FFFFFF"/>
                 </a:solidFill>
@@ -6341,7 +6108,7 @@
               </a:rPr>
               <a:t>Residents across student accommodation, social housing, and residents with access needs who report a shared-facility fault but cannot see its status, who is responsible, or when they’ll next hear anything, for the entire undefined period between reporting and resolution. Left without that visibility, residents either disengage and wait it out, or repeatedly chase a response that stays ambiguous — either way, the uncertainty disrupts their ability to plan the rest of their lives around it.</a:t>
             </a:r>
-            <a:endParaRPr lang="en-US" sz="1400" dirty="0"/>
+            <a:endParaRPr lang="en-US" sz="1600" dirty="0"/>
           </a:p>
         </p:txBody>
       </p:sp>
@@ -6366,6 +6133,13 @@
           </a:solidFill>
           <a:ln/>
         </p:spPr>
+        <p:txBody>
+          <a:bodyPr/>
+          <a:lstStyle/>
+          <a:p>
+            <a:endParaRPr lang="zh-CN" altLang="en-US"/>
+          </a:p>
+        </p:txBody>
       </p:sp>
       <p:sp>
         <p:nvSpPr>
@@ -6388,11 +6162,11 @@
           <a:bodyPr wrap="square" rtlCol="0" anchor="ctr"/>
           <a:lstStyle/>
           <a:p>
-            <a:pPr indent="0" marL="0">
-              <a:buNone/>
-            </a:pPr>
-            <a:r>
-              <a:rPr lang="en-US" sz="1050" b="1" spc="150" kern="0" dirty="0">
+            <a:pPr marL="0" indent="0">
+              <a:buNone/>
+            </a:pPr>
+            <a:r>
+              <a:rPr lang="en-US" sz="1050" b="1" kern="0" spc="150" dirty="0">
                 <a:solidFill>
                   <a:srgbClr val="141A30"/>
                 </a:solidFill>
@@ -6427,7 +6201,7 @@
           <a:bodyPr wrap="square" rtlCol="0" anchor="ctr"/>
           <a:lstStyle/>
           <a:p>
-            <a:pPr indent="0" marL="0">
+            <a:pPr marL="0" indent="0">
               <a:lnSpc>
                 <a:spcPct val="120000"/>
               </a:lnSpc>
@@ -6467,17 +6241,24 @@
           </a:solidFill>
           <a:ln/>
         </p:spPr>
+        <p:txBody>
+          <a:bodyPr/>
+          <a:lstStyle/>
+          <a:p>
+            <a:endParaRPr lang="zh-CN" altLang="en-US"/>
+          </a:p>
+        </p:txBody>
       </p:sp>
       <p:pic>
         <p:nvPicPr>
-          <p:cNvPr id="11" name="Image 0" descr="/Users/devonma/Desktop/9106/Assignment/A2b/build/icons/home.png">    </p:cNvPr>
+          <p:cNvPr id="11" name="Image 0" descr="/Users/devonma/Desktop/9106/Assignment/A2b/build/icons/home.png"/>
           <p:cNvPicPr>
             <a:picLocks noChangeAspect="1"/>
           </p:cNvPicPr>
           <p:nvPr/>
         </p:nvPicPr>
         <p:blipFill>
-          <a:blip r:embed="rId1"/>
+          <a:blip r:embed="rId3"/>
           <a:stretch>
             <a:fillRect/>
           </a:stretch>
@@ -6513,7 +6294,7 @@
           <a:bodyPr wrap="square" rtlCol="0" anchor="ctr"/>
           <a:lstStyle/>
           <a:p>
-            <a:pPr indent="0" marL="0">
+            <a:pPr marL="0" indent="0">
               <a:buNone/>
             </a:pPr>
             <a:r>
@@ -6552,7 +6333,7 @@
           <a:bodyPr wrap="square" rtlCol="0" anchor="ctr"/>
           <a:lstStyle/>
           <a:p>
-            <a:pPr indent="0" marL="0">
+            <a:pPr marL="0" indent="0">
               <a:buNone/>
             </a:pPr>
             <a:r>
@@ -6589,17 +6370,24 @@
           </a:solidFill>
           <a:ln/>
         </p:spPr>
+        <p:txBody>
+          <a:bodyPr/>
+          <a:lstStyle/>
+          <a:p>
+            <a:endParaRPr lang="zh-CN" altLang="en-US"/>
+          </a:p>
+        </p:txBody>
       </p:sp>
       <p:pic>
         <p:nvPicPr>
-          <p:cNvPr id="15" name="Image 1" descr="/Users/devonma/Desktop/9106/Assignment/A2b/build/icons/key.png">    </p:cNvPr>
+          <p:cNvPr id="15" name="Image 1" descr="/Users/devonma/Desktop/9106/Assignment/A2b/build/icons/key.png"/>
           <p:cNvPicPr>
             <a:picLocks noChangeAspect="1"/>
           </p:cNvPicPr>
           <p:nvPr/>
         </p:nvPicPr>
         <p:blipFill>
-          <a:blip r:embed="rId2"/>
+          <a:blip r:embed="rId4"/>
           <a:stretch>
             <a:fillRect/>
           </a:stretch>
@@ -6635,7 +6423,7 @@
           <a:bodyPr wrap="square" rtlCol="0" anchor="ctr"/>
           <a:lstStyle/>
           <a:p>
-            <a:pPr indent="0" marL="0">
+            <a:pPr marL="0" indent="0">
               <a:buNone/>
             </a:pPr>
             <a:r>
@@ -6674,7 +6462,7 @@
           <a:bodyPr wrap="square" rtlCol="0" anchor="ctr"/>
           <a:lstStyle/>
           <a:p>
-            <a:pPr indent="0" marL="0">
+            <a:pPr marL="0" indent="0">
               <a:buNone/>
             </a:pPr>
             <a:r>
@@ -6713,7 +6501,7 @@
           <a:bodyPr wrap="square" rtlCol="0" anchor="ctr"/>
           <a:lstStyle/>
           <a:p>
-            <a:pPr indent="0" marL="0">
+            <a:pPr marL="0" indent="0">
               <a:buNone/>
             </a:pPr>
             <a:r>
@@ -6752,7 +6540,7 @@
           <a:bodyPr wrap="square" rtlCol="0" anchor="ctr"/>
           <a:lstStyle/>
           <a:p>
-            <a:pPr algn="l" indent="0" marL="0">
+            <a:pPr marL="0" indent="0" algn="l">
               <a:buNone/>
             </a:pPr>
             <a:r>
@@ -6791,7 +6579,7 @@
           <a:bodyPr wrap="square" rtlCol="0" anchor="ctr"/>
           <a:lstStyle/>
           <a:p>
-            <a:pPr algn="r" indent="0" marL="0">
+            <a:pPr marL="0" indent="0" algn="r">
               <a:buNone/>
             </a:pPr>
             <a:r>
@@ -6825,6 +6613,7 @@
         <a:solidFill>
           <a:srgbClr val="FFFFFF"/>
         </a:solidFill>
+        <a:effectLst/>
       </p:bgPr>
     </p:bg>
     <p:spTree>
@@ -6862,7 +6651,7 @@
           <a:bodyPr wrap="square" rtlCol="0" anchor="ctr"/>
           <a:lstStyle/>
           <a:p>
-            <a:pPr indent="0" marL="0">
+            <a:pPr marL="0" indent="0">
               <a:buNone/>
             </a:pPr>
             <a:r>
@@ -6901,7 +6690,7 @@
           <a:bodyPr wrap="square" rtlCol="0" anchor="ctr"/>
           <a:lstStyle/>
           <a:p>
-            <a:pPr indent="0" marL="0">
+            <a:pPr marL="0" indent="0">
               <a:buNone/>
             </a:pPr>
             <a:r>
@@ -6938,382 +6727,17 @@
           </a:solidFill>
           <a:ln/>
         </p:spPr>
+        <p:txBody>
+          <a:bodyPr/>
+          <a:lstStyle/>
+          <a:p>
+            <a:endParaRPr lang="zh-CN" altLang="en-US"/>
+          </a:p>
+        </p:txBody>
       </p:sp>
       <p:pic>
         <p:nvPicPr>
-          <p:cNvPr id="5" name="Image 0" descr="/Users/devonma/Desktop/9106/Assignment/A2b/build/icons/target.png">    </p:cNvPr>
-          <p:cNvPicPr>
-            <a:picLocks noChangeAspect="1"/>
-          </p:cNvPicPr>
-          <p:nvPr/>
-        </p:nvPicPr>
-        <p:blipFill>
-          <a:blip r:embed="rId1"/>
-          <a:stretch>
-            <a:fillRect/>
-          </a:stretch>
-        </p:blipFill>
-        <p:spPr>
-          <a:xfrm>
-            <a:off x="782726" y="1651406"/>
-            <a:ext cx="263347" cy="263347"/>
-          </a:xfrm>
-          <a:prstGeom prst="rect">
-            <a:avLst/>
-          </a:prstGeom>
-        </p:spPr>
-      </p:pic>
-      <p:sp>
-        <p:nvSpPr>
-          <p:cNvPr id="6" name="Text 3"/>
-          <p:cNvSpPr/>
-          <p:nvPr/>
-        </p:nvSpPr>
-        <p:spPr>
-          <a:xfrm>
-            <a:off x="1371600" y="1536192"/>
-            <a:ext cx="9144000" cy="320040"/>
-          </a:xfrm>
-          <a:prstGeom prst="rect">
-            <a:avLst/>
-          </a:prstGeom>
-          <a:noFill/>
-          <a:ln/>
-        </p:spPr>
-        <p:txBody>
-          <a:bodyPr wrap="square" rtlCol="0" anchor="ctr"/>
-          <a:lstStyle/>
-          <a:p>
-            <a:pPr indent="0" marL="0">
-              <a:buNone/>
-            </a:pPr>
-            <a:r>
-              <a:rPr lang="en-US" sz="1550" b="1" dirty="0">
-                <a:solidFill>
-                  <a:srgbClr val="1C2541"/>
-                </a:solidFill>
-                <a:latin typeface="Calibri" pitchFamily="34" charset="0"/>
-                <a:ea typeface="Calibri" pitchFamily="34" charset="-122"/>
-                <a:cs typeface="Calibri" pitchFamily="34" charset="-120"/>
-              </a:rPr>
-              <a:t>Method: Brainwriting 6-3-5</a:t>
-            </a:r>
-            <a:endParaRPr lang="en-US" sz="1550" dirty="0"/>
-          </a:p>
-        </p:txBody>
-      </p:sp>
-      <p:sp>
-        <p:nvSpPr>
-          <p:cNvPr id="7" name="Text 4"/>
-          <p:cNvSpPr/>
-          <p:nvPr/>
-        </p:nvSpPr>
-        <p:spPr>
-          <a:xfrm>
-            <a:off x="1371600" y="1901952"/>
-            <a:ext cx="10058400" cy="594360"/>
-          </a:xfrm>
-          <a:prstGeom prst="rect">
-            <a:avLst/>
-          </a:prstGeom>
-          <a:noFill/>
-          <a:ln/>
-        </p:spPr>
-        <p:txBody>
-          <a:bodyPr wrap="square" rtlCol="0" anchor="ctr"/>
-          <a:lstStyle/>
-          <a:p>
-            <a:pPr indent="0" marL="0">
-              <a:lnSpc>
-                <a:spcPct val="115000"/>
-              </a:lnSpc>
-              <a:buNone/>
-            </a:pPr>
-            <a:r>
-              <a:rPr lang="en-US" sz="1150" dirty="0">
-                <a:solidFill>
-                  <a:srgbClr val="222831"/>
-                </a:solidFill>
-                <a:latin typeface="Calibri" pitchFamily="34" charset="0"/>
-                <a:ea typeface="Calibri" pitchFamily="34" charset="-122"/>
-                <a:cs typeface="Calibri" pitchFamily="34" charset="-120"/>
-              </a:rPr>
-              <a:t>Chosen because reporting-and-waiting is something every team member has experienced differently. Silent, parallel writing meant no one’s first idea anchored the group — every round built on what was already on the page.</a:t>
-            </a:r>
-            <a:endParaRPr lang="en-US" sz="1150" dirty="0"/>
-          </a:p>
-        </p:txBody>
-      </p:sp>
-      <p:sp>
-        <p:nvSpPr>
-          <p:cNvPr id="8" name="Text 5"/>
-          <p:cNvSpPr/>
-          <p:nvPr/>
-        </p:nvSpPr>
-        <p:spPr>
-          <a:xfrm>
-            <a:off x="640080" y="2697480"/>
-            <a:ext cx="7315200" cy="274320"/>
-          </a:xfrm>
-          <a:prstGeom prst="rect">
-            <a:avLst/>
-          </a:prstGeom>
-          <a:noFill/>
-          <a:ln/>
-        </p:spPr>
-        <p:txBody>
-          <a:bodyPr wrap="square" rtlCol="0" anchor="ctr"/>
-          <a:lstStyle/>
-          <a:p>
-            <a:pPr indent="0" marL="0">
-              <a:buNone/>
-            </a:pPr>
-            <a:r>
-              <a:rPr lang="en-US" sz="1100" b="1" spc="100" kern="0" dirty="0">
-                <a:solidFill>
-                  <a:srgbClr val="5B6472"/>
-                </a:solidFill>
-                <a:latin typeface="Calibri" pitchFamily="34" charset="0"/>
-                <a:ea typeface="Calibri" pitchFamily="34" charset="-122"/>
-                <a:cs typeface="Calibri" pitchFamily="34" charset="-120"/>
-              </a:rPr>
-              <a:t>IDEAS CLUSTERED INTO THREE DIRECTIONS</a:t>
-            </a:r>
-            <a:endParaRPr lang="en-US" sz="1100" dirty="0"/>
-          </a:p>
-        </p:txBody>
-      </p:sp>
-      <p:sp>
-        <p:nvSpPr>
-          <p:cNvPr id="9" name="Shape 6"/>
-          <p:cNvSpPr/>
-          <p:nvPr/>
-        </p:nvSpPr>
-        <p:spPr>
-          <a:xfrm>
-            <a:off x="640080" y="3063240"/>
-            <a:ext cx="3429000" cy="2331720"/>
-          </a:xfrm>
-          <a:prstGeom prst="roundRect">
-            <a:avLst>
-              <a:gd name="adj" fmla="val 3922"/>
-            </a:avLst>
-          </a:prstGeom>
-          <a:solidFill>
-            <a:srgbClr val="1C2541"/>
-          </a:solidFill>
-          <a:ln/>
-        </p:spPr>
-      </p:sp>
-      <p:sp>
-        <p:nvSpPr>
-          <p:cNvPr id="10" name="Shape 7"/>
-          <p:cNvSpPr/>
-          <p:nvPr/>
-        </p:nvSpPr>
-        <p:spPr>
-          <a:xfrm>
-            <a:off x="914400" y="3337560"/>
-            <a:ext cx="502920" cy="502920"/>
-          </a:xfrm>
-          <a:prstGeom prst="ellipse">
-            <a:avLst/>
-          </a:prstGeom>
-          <a:solidFill>
-            <a:srgbClr val="D9782D"/>
-          </a:solidFill>
-          <a:ln/>
-        </p:spPr>
-      </p:sp>
-      <p:pic>
-        <p:nvPicPr>
-          <p:cNvPr id="11" name="Image 1" descr="/Users/devonma/Desktop/9106/Assignment/A2b/build/icons/eye.png">    </p:cNvPr>
-          <p:cNvPicPr>
-            <a:picLocks noChangeAspect="1"/>
-          </p:cNvPicPr>
-          <p:nvPr/>
-        </p:nvPicPr>
-        <p:blipFill>
-          <a:blip r:embed="rId2"/>
-          <a:stretch>
-            <a:fillRect/>
-          </a:stretch>
-        </p:blipFill>
-        <p:spPr>
-          <a:xfrm>
-            <a:off x="1045159" y="3468319"/>
-            <a:ext cx="241402" cy="241402"/>
-          </a:xfrm>
-          <a:prstGeom prst="rect">
-            <a:avLst/>
-          </a:prstGeom>
-        </p:spPr>
-      </p:pic>
-      <p:sp>
-        <p:nvSpPr>
-          <p:cNvPr id="12" name="Text 8"/>
-          <p:cNvSpPr/>
-          <p:nvPr/>
-        </p:nvSpPr>
-        <p:spPr>
-          <a:xfrm>
-            <a:off x="914400" y="3977640"/>
-            <a:ext cx="2880360" cy="365760"/>
-          </a:xfrm>
-          <a:prstGeom prst="rect">
-            <a:avLst/>
-          </a:prstGeom>
-          <a:noFill/>
-          <a:ln/>
-        </p:spPr>
-        <p:txBody>
-          <a:bodyPr wrap="square" rtlCol="0" anchor="ctr"/>
-          <a:lstStyle/>
-          <a:p>
-            <a:pPr indent="0" marL="0">
-              <a:buNone/>
-            </a:pPr>
-            <a:r>
-              <a:rPr lang="en-US" sz="1500" b="1" dirty="0">
-                <a:solidFill>
-                  <a:srgbClr val="FFFFFF"/>
-                </a:solidFill>
-                <a:latin typeface="Calibri" pitchFamily="34" charset="0"/>
-                <a:ea typeface="Calibri" pitchFamily="34" charset="-122"/>
-                <a:cs typeface="Calibri" pitchFamily="34" charset="-120"/>
-              </a:rPr>
-              <a:t>Visibility</a:t>
-            </a:r>
-            <a:endParaRPr lang="en-US" sz="1500" dirty="0"/>
-          </a:p>
-        </p:txBody>
-      </p:sp>
-      <p:sp>
-        <p:nvSpPr>
-          <p:cNvPr id="13" name="Text 9"/>
-          <p:cNvSpPr/>
-          <p:nvPr/>
-        </p:nvSpPr>
-        <p:spPr>
-          <a:xfrm>
-            <a:off x="914400" y="4361688"/>
-            <a:ext cx="2880360" cy="548640"/>
-          </a:xfrm>
-          <a:prstGeom prst="rect">
-            <a:avLst/>
-          </a:prstGeom>
-          <a:noFill/>
-          <a:ln/>
-        </p:spPr>
-        <p:txBody>
-          <a:bodyPr wrap="square" rtlCol="0" anchor="ctr"/>
-          <a:lstStyle/>
-          <a:p>
-            <a:pPr indent="0" marL="0">
-              <a:lnSpc>
-                <a:spcPct val="110000"/>
-              </a:lnSpc>
-              <a:buNone/>
-            </a:pPr>
-            <a:r>
-              <a:rPr lang="en-US" sz="1100" dirty="0">
-                <a:solidFill>
-                  <a:srgbClr val="CFE0E8"/>
-                </a:solidFill>
-                <a:latin typeface="Calibri" pitchFamily="34" charset="0"/>
-                <a:ea typeface="Calibri" pitchFamily="34" charset="-122"/>
-                <a:cs typeface="Calibri" pitchFamily="34" charset="-120"/>
-              </a:rPr>
-              <a:t>Make status visible to residents.</a:t>
-            </a:r>
-            <a:endParaRPr lang="en-US" sz="1100" dirty="0"/>
-          </a:p>
-        </p:txBody>
-      </p:sp>
-      <p:sp>
-        <p:nvSpPr>
-          <p:cNvPr id="14" name="Text 10"/>
-          <p:cNvSpPr/>
-          <p:nvPr/>
-        </p:nvSpPr>
-        <p:spPr>
-          <a:xfrm>
-            <a:off x="914400" y="4965192"/>
-            <a:ext cx="2880360" cy="320040"/>
-          </a:xfrm>
-          <a:prstGeom prst="rect">
-            <a:avLst/>
-          </a:prstGeom>
-          <a:noFill/>
-          <a:ln/>
-        </p:spPr>
-        <p:txBody>
-          <a:bodyPr wrap="square" rtlCol="0" anchor="ctr"/>
-          <a:lstStyle/>
-          <a:p>
-            <a:pPr indent="0" marL="0">
-              <a:buNone/>
-            </a:pPr>
-            <a:r>
-              <a:rPr lang="en-US" sz="950" b="1" spc="50" kern="0" dirty="0">
-                <a:solidFill>
-                  <a:srgbClr val="D9782D"/>
-                </a:solidFill>
-                <a:latin typeface="Calibri" pitchFamily="34" charset="0"/>
-                <a:ea typeface="Calibri" pitchFamily="34" charset="-122"/>
-                <a:cs typeface="Calibri" pitchFamily="34" charset="-120"/>
-              </a:rPr>
-              <a:t>✓ DEVELOPED NOW</a:t>
-            </a:r>
-            <a:endParaRPr lang="en-US" sz="950" dirty="0"/>
-          </a:p>
-        </p:txBody>
-      </p:sp>
-      <p:sp>
-        <p:nvSpPr>
-          <p:cNvPr id="15" name="Shape 11"/>
-          <p:cNvSpPr/>
-          <p:nvPr/>
-        </p:nvSpPr>
-        <p:spPr>
-          <a:xfrm>
-            <a:off x="4297680" y="3063240"/>
-            <a:ext cx="3429000" cy="2331720"/>
-          </a:xfrm>
-          <a:prstGeom prst="roundRect">
-            <a:avLst>
-              <a:gd name="adj" fmla="val 3922"/>
-            </a:avLst>
-          </a:prstGeom>
-          <a:solidFill>
-            <a:srgbClr val="1C2541"/>
-          </a:solidFill>
-          <a:ln/>
-        </p:spPr>
-      </p:sp>
-      <p:sp>
-        <p:nvSpPr>
-          <p:cNvPr id="16" name="Shape 12"/>
-          <p:cNvSpPr/>
-          <p:nvPr/>
-        </p:nvSpPr>
-        <p:spPr>
-          <a:xfrm>
-            <a:off x="4572000" y="3337560"/>
-            <a:ext cx="502920" cy="502920"/>
-          </a:xfrm>
-          <a:prstGeom prst="ellipse">
-            <a:avLst/>
-          </a:prstGeom>
-          <a:solidFill>
-            <a:srgbClr val="D9782D"/>
-          </a:solidFill>
-          <a:ln/>
-        </p:spPr>
-      </p:sp>
-      <p:pic>
-        <p:nvPicPr>
-          <p:cNvPr id="17" name="Image 2" descr="/Users/devonma/Desktop/9106/Assignment/A2b/build/icons/message.png">    </p:cNvPr>
+          <p:cNvPr id="5" name="Image 0" descr="/Users/devonma/Desktop/9106/Assignment/A2b/build/icons/target.png"/>
           <p:cNvPicPr>
             <a:picLocks noChangeAspect="1"/>
           </p:cNvPicPr>
@@ -7327,8 +6751,8 @@
         </p:blipFill>
         <p:spPr>
           <a:xfrm>
-            <a:off x="4702759" y="3468319"/>
-            <a:ext cx="241402" cy="241402"/>
+            <a:off x="782726" y="1651406"/>
+            <a:ext cx="263347" cy="263347"/>
           </a:xfrm>
           <a:prstGeom prst="rect">
             <a:avLst/>
@@ -7337,80 +6761,119 @@
       </p:pic>
       <p:sp>
         <p:nvSpPr>
-          <p:cNvPr id="18" name="Text 13"/>
-          <p:cNvSpPr/>
-          <p:nvPr/>
-        </p:nvSpPr>
-        <p:spPr>
-          <a:xfrm>
-            <a:off x="4572000" y="3977640"/>
-            <a:ext cx="2880360" cy="365760"/>
-          </a:xfrm>
-          <a:prstGeom prst="rect">
-            <a:avLst/>
-          </a:prstGeom>
-          <a:noFill/>
-          <a:ln/>
-        </p:spPr>
-        <p:txBody>
-          <a:bodyPr wrap="square" rtlCol="0" anchor="ctr"/>
-          <a:lstStyle/>
-          <a:p>
-            <a:pPr indent="0" marL="0">
-              <a:buNone/>
-            </a:pPr>
-            <a:r>
-              <a:rPr lang="en-US" sz="1500" b="1" dirty="0">
-                <a:solidFill>
-                  <a:srgbClr val="FFFFFF"/>
-                </a:solidFill>
-                <a:latin typeface="Calibri" pitchFamily="34" charset="0"/>
-                <a:ea typeface="Calibri" pitchFamily="34" charset="-122"/>
-                <a:cs typeface="Calibri" pitchFamily="34" charset="-120"/>
-              </a:rPr>
-              <a:t>Communication</a:t>
-            </a:r>
-            <a:endParaRPr lang="en-US" sz="1500" dirty="0"/>
-          </a:p>
-        </p:txBody>
-      </p:sp>
-      <p:sp>
-        <p:nvSpPr>
-          <p:cNvPr id="19" name="Text 14"/>
-          <p:cNvSpPr/>
-          <p:nvPr/>
-        </p:nvSpPr>
-        <p:spPr>
-          <a:xfrm>
-            <a:off x="4572000" y="4361688"/>
-            <a:ext cx="2880360" cy="548640"/>
-          </a:xfrm>
-          <a:prstGeom prst="rect">
-            <a:avLst/>
-          </a:prstGeom>
-          <a:noFill/>
-          <a:ln/>
-        </p:spPr>
-        <p:txBody>
-          <a:bodyPr wrap="square" rtlCol="0" anchor="ctr"/>
-          <a:lstStyle/>
-          <a:p>
-            <a:pPr indent="0" marL="0">
+          <p:cNvPr id="6" name="Text 3"/>
+          <p:cNvSpPr/>
+          <p:nvPr/>
+        </p:nvSpPr>
+        <p:spPr>
+          <a:xfrm>
+            <a:off x="1371600" y="1536192"/>
+            <a:ext cx="9144000" cy="320040"/>
+          </a:xfrm>
+          <a:prstGeom prst="rect">
+            <a:avLst/>
+          </a:prstGeom>
+          <a:noFill/>
+          <a:ln/>
+        </p:spPr>
+        <p:txBody>
+          <a:bodyPr wrap="square" rtlCol="0" anchor="ctr"/>
+          <a:lstStyle/>
+          <a:p>
+            <a:pPr marL="0" indent="0">
+              <a:buNone/>
+            </a:pPr>
+            <a:r>
+              <a:rPr lang="en-US" sz="1550" b="1" dirty="0">
+                <a:solidFill>
+                  <a:srgbClr val="1C2541"/>
+                </a:solidFill>
+                <a:latin typeface="Calibri" pitchFamily="34" charset="0"/>
+                <a:ea typeface="Calibri" pitchFamily="34" charset="-122"/>
+                <a:cs typeface="Calibri" pitchFamily="34" charset="-120"/>
+              </a:rPr>
+              <a:t>Method: Brainwriting 6-3-5</a:t>
+            </a:r>
+            <a:endParaRPr lang="en-US" sz="1550" dirty="0"/>
+          </a:p>
+        </p:txBody>
+      </p:sp>
+      <p:sp>
+        <p:nvSpPr>
+          <p:cNvPr id="7" name="Text 4"/>
+          <p:cNvSpPr/>
+          <p:nvPr/>
+        </p:nvSpPr>
+        <p:spPr>
+          <a:xfrm>
+            <a:off x="1371600" y="1901952"/>
+            <a:ext cx="10058400" cy="594360"/>
+          </a:xfrm>
+          <a:prstGeom prst="rect">
+            <a:avLst/>
+          </a:prstGeom>
+          <a:noFill/>
+          <a:ln/>
+        </p:spPr>
+        <p:txBody>
+          <a:bodyPr wrap="square" rtlCol="0" anchor="ctr"/>
+          <a:lstStyle/>
+          <a:p>
+            <a:pPr marL="0" indent="0">
               <a:lnSpc>
-                <a:spcPct val="110000"/>
+                <a:spcPct val="115000"/>
               </a:lnSpc>
               <a:buNone/>
             </a:pPr>
             <a:r>
-              <a:rPr lang="en-US" sz="1100" dirty="0">
-                <a:solidFill>
-                  <a:srgbClr val="CFE0E8"/>
-                </a:solidFill>
-                <a:latin typeface="Calibri" pitchFamily="34" charset="0"/>
-                <a:ea typeface="Calibri" pitchFamily="34" charset="-122"/>
-                <a:cs typeface="Calibri" pitchFamily="34" charset="-120"/>
-              </a:rPr>
-              <a:t>Guarantee a defined reply.</a:t>
+              <a:rPr lang="en-US" sz="1150" dirty="0">
+                <a:solidFill>
+                  <a:srgbClr val="222831"/>
+                </a:solidFill>
+                <a:latin typeface="Calibri" pitchFamily="34" charset="0"/>
+                <a:ea typeface="Calibri" pitchFamily="34" charset="-122"/>
+                <a:cs typeface="Calibri" pitchFamily="34" charset="-120"/>
+              </a:rPr>
+              <a:t>Chosen because reporting-and-waiting is something every team member has experienced differently. Silent, parallel writing meant no one’s first idea anchored the group — every round built on what was already on the page.</a:t>
+            </a:r>
+            <a:endParaRPr lang="en-US" sz="1150" dirty="0"/>
+          </a:p>
+        </p:txBody>
+      </p:sp>
+      <p:sp>
+        <p:nvSpPr>
+          <p:cNvPr id="8" name="Text 5"/>
+          <p:cNvSpPr/>
+          <p:nvPr/>
+        </p:nvSpPr>
+        <p:spPr>
+          <a:xfrm>
+            <a:off x="640080" y="2697480"/>
+            <a:ext cx="7315200" cy="274320"/>
+          </a:xfrm>
+          <a:prstGeom prst="rect">
+            <a:avLst/>
+          </a:prstGeom>
+          <a:noFill/>
+          <a:ln/>
+        </p:spPr>
+        <p:txBody>
+          <a:bodyPr wrap="square" rtlCol="0" anchor="ctr"/>
+          <a:lstStyle/>
+          <a:p>
+            <a:pPr marL="0" indent="0">
+              <a:buNone/>
+            </a:pPr>
+            <a:r>
+              <a:rPr lang="en-US" sz="1100" b="1" kern="0" spc="100" dirty="0">
+                <a:solidFill>
+                  <a:srgbClr val="5B6472"/>
+                </a:solidFill>
+                <a:latin typeface="Calibri" pitchFamily="34" charset="0"/>
+                <a:ea typeface="Calibri" pitchFamily="34" charset="-122"/>
+                <a:cs typeface="Calibri" pitchFamily="34" charset="-120"/>
+              </a:rPr>
+              <a:t>IDEAS CLUSTERED INTO THREE DIRECTIONS</a:t>
             </a:r>
             <a:endParaRPr lang="en-US" sz="1100" dirty="0"/>
           </a:p>
@@ -7418,52 +6881,13 @@
       </p:sp>
       <p:sp>
         <p:nvSpPr>
-          <p:cNvPr id="20" name="Text 15"/>
-          <p:cNvSpPr/>
-          <p:nvPr/>
-        </p:nvSpPr>
-        <p:spPr>
-          <a:xfrm>
-            <a:off x="4572000" y="4965192"/>
-            <a:ext cx="2880360" cy="320040"/>
-          </a:xfrm>
-          <a:prstGeom prst="rect">
-            <a:avLst/>
-          </a:prstGeom>
-          <a:noFill/>
-          <a:ln/>
-        </p:spPr>
-        <p:txBody>
-          <a:bodyPr wrap="square" rtlCol="0" anchor="ctr"/>
-          <a:lstStyle/>
-          <a:p>
-            <a:pPr indent="0" marL="0">
-              <a:buNone/>
-            </a:pPr>
-            <a:r>
-              <a:rPr lang="en-US" sz="950" b="1" spc="50" kern="0" dirty="0">
-                <a:solidFill>
-                  <a:srgbClr val="D9782D"/>
-                </a:solidFill>
-                <a:latin typeface="Calibri" pitchFamily="34" charset="0"/>
-                <a:ea typeface="Calibri" pitchFamily="34" charset="-122"/>
-                <a:cs typeface="Calibri" pitchFamily="34" charset="-120"/>
-              </a:rPr>
-              <a:t>✓ DEVELOPED NOW</a:t>
-            </a:r>
-            <a:endParaRPr lang="en-US" sz="950" dirty="0"/>
-          </a:p>
-        </p:txBody>
-      </p:sp>
-      <p:sp>
-        <p:nvSpPr>
-          <p:cNvPr id="21" name="Shape 16"/>
-          <p:cNvSpPr/>
-          <p:nvPr/>
-        </p:nvSpPr>
-        <p:spPr>
-          <a:xfrm>
-            <a:off x="7955280" y="3063240"/>
+          <p:cNvPr id="9" name="Shape 6"/>
+          <p:cNvSpPr/>
+          <p:nvPr/>
+        </p:nvSpPr>
+        <p:spPr>
+          <a:xfrm>
+            <a:off x="640080" y="3063240"/>
             <a:ext cx="3429000" cy="2331720"/>
           </a:xfrm>
           <a:prstGeom prst="roundRect">
@@ -7472,34 +6896,48 @@
             </a:avLst>
           </a:prstGeom>
           <a:solidFill>
-            <a:srgbClr val="F4F5F7"/>
+            <a:srgbClr val="1C2541"/>
           </a:solidFill>
           <a:ln/>
         </p:spPr>
-      </p:sp>
-      <p:sp>
-        <p:nvSpPr>
-          <p:cNvPr id="22" name="Shape 17"/>
-          <p:cNvSpPr/>
-          <p:nvPr/>
-        </p:nvSpPr>
-        <p:spPr>
-          <a:xfrm>
-            <a:off x="8229600" y="3337560"/>
+        <p:txBody>
+          <a:bodyPr/>
+          <a:lstStyle/>
+          <a:p>
+            <a:endParaRPr lang="zh-CN" altLang="en-US"/>
+          </a:p>
+        </p:txBody>
+      </p:sp>
+      <p:sp>
+        <p:nvSpPr>
+          <p:cNvPr id="10" name="Shape 7"/>
+          <p:cNvSpPr/>
+          <p:nvPr/>
+        </p:nvSpPr>
+        <p:spPr>
+          <a:xfrm>
+            <a:off x="914400" y="3337560"/>
             <a:ext cx="502920" cy="502920"/>
           </a:xfrm>
           <a:prstGeom prst="ellipse">
             <a:avLst/>
           </a:prstGeom>
           <a:solidFill>
-            <a:srgbClr val="5C7A99"/>
+            <a:srgbClr val="D9782D"/>
           </a:solidFill>
           <a:ln/>
         </p:spPr>
+        <p:txBody>
+          <a:bodyPr/>
+          <a:lstStyle/>
+          <a:p>
+            <a:endParaRPr lang="zh-CN" altLang="en-US"/>
+          </a:p>
+        </p:txBody>
       </p:sp>
       <p:pic>
         <p:nvPicPr>
-          <p:cNvPr id="23" name="Image 3" descr="/Users/devonma/Desktop/9106/Assignment/A2b/build/icons/shuffle.png">    </p:cNvPr>
+          <p:cNvPr id="11" name="Image 1" descr="/Users/devonma/Desktop/9106/Assignment/A2b/build/icons/eye.png"/>
           <p:cNvPicPr>
             <a:picLocks noChangeAspect="1"/>
           </p:cNvPicPr>
@@ -7513,7 +6951,7 @@
         </p:blipFill>
         <p:spPr>
           <a:xfrm>
-            <a:off x="8360359" y="3468319"/>
+            <a:off x="1045159" y="3468319"/>
             <a:ext cx="241402" cy="241402"/>
           </a:xfrm>
           <a:prstGeom prst="rect">
@@ -7523,13 +6961,13 @@
       </p:pic>
       <p:sp>
         <p:nvSpPr>
-          <p:cNvPr id="24" name="Text 18"/>
-          <p:cNvSpPr/>
-          <p:nvPr/>
-        </p:nvSpPr>
-        <p:spPr>
-          <a:xfrm>
-            <a:off x="8229600" y="3977640"/>
+          <p:cNvPr id="12" name="Text 8"/>
+          <p:cNvSpPr/>
+          <p:nvPr/>
+        </p:nvSpPr>
+        <p:spPr>
+          <a:xfrm>
+            <a:off x="914400" y="3977640"/>
             <a:ext cx="2880360" cy="365760"/>
           </a:xfrm>
           <a:prstGeom prst="rect">
@@ -7542,19 +6980,19 @@
           <a:bodyPr wrap="square" rtlCol="0" anchor="ctr"/>
           <a:lstStyle/>
           <a:p>
-            <a:pPr indent="0" marL="0">
+            <a:pPr marL="0" indent="0">
               <a:buNone/>
             </a:pPr>
             <a:r>
               <a:rPr lang="en-US" sz="1500" b="1" dirty="0">
                 <a:solidFill>
-                  <a:srgbClr val="1C2541"/>
-                </a:solidFill>
-                <a:latin typeface="Calibri" pitchFamily="34" charset="0"/>
-                <a:ea typeface="Calibri" pitchFamily="34" charset="-122"/>
-                <a:cs typeface="Calibri" pitchFamily="34" charset="-120"/>
-              </a:rPr>
-              <a:t>Scheduling influence</a:t>
+                  <a:srgbClr val="FFFFFF"/>
+                </a:solidFill>
+                <a:latin typeface="Calibri" pitchFamily="34" charset="0"/>
+                <a:ea typeface="Calibri" pitchFamily="34" charset="-122"/>
+                <a:cs typeface="Calibri" pitchFamily="34" charset="-120"/>
+              </a:rPr>
+              <a:t>Visibility</a:t>
             </a:r>
             <a:endParaRPr lang="en-US" sz="1500" dirty="0"/>
           </a:p>
@@ -7562,13 +7000,13 @@
       </p:sp>
       <p:sp>
         <p:nvSpPr>
-          <p:cNvPr id="25" name="Text 19"/>
-          <p:cNvSpPr/>
-          <p:nvPr/>
-        </p:nvSpPr>
-        <p:spPr>
-          <a:xfrm>
-            <a:off x="8229600" y="4361688"/>
+          <p:cNvPr id="13" name="Text 9"/>
+          <p:cNvSpPr/>
+          <p:nvPr/>
+        </p:nvSpPr>
+        <p:spPr>
+          <a:xfrm>
+            <a:off x="914400" y="4361688"/>
             <a:ext cx="2880360" cy="548640"/>
           </a:xfrm>
           <a:prstGeom prst="rect">
@@ -7581,7 +7019,7 @@
           <a:bodyPr wrap="square" rtlCol="0" anchor="ctr"/>
           <a:lstStyle/>
           <a:p>
-            <a:pPr indent="0" marL="0">
+            <a:pPr marL="0" indent="0">
               <a:lnSpc>
                 <a:spcPct val="110000"/>
               </a:lnSpc>
@@ -7590,6 +7028,406 @@
             <a:r>
               <a:rPr lang="en-US" sz="1100" dirty="0">
                 <a:solidFill>
+                  <a:srgbClr val="CFE0E8"/>
+                </a:solidFill>
+                <a:latin typeface="Calibri" pitchFamily="34" charset="0"/>
+                <a:ea typeface="Calibri" pitchFamily="34" charset="-122"/>
+                <a:cs typeface="Calibri" pitchFamily="34" charset="-120"/>
+              </a:rPr>
+              <a:t>Make status visible to residents.</a:t>
+            </a:r>
+            <a:endParaRPr lang="en-US" sz="1100" dirty="0"/>
+          </a:p>
+        </p:txBody>
+      </p:sp>
+      <p:sp>
+        <p:nvSpPr>
+          <p:cNvPr id="14" name="Text 10"/>
+          <p:cNvSpPr/>
+          <p:nvPr/>
+        </p:nvSpPr>
+        <p:spPr>
+          <a:xfrm>
+            <a:off x="914400" y="4965192"/>
+            <a:ext cx="2880360" cy="320040"/>
+          </a:xfrm>
+          <a:prstGeom prst="rect">
+            <a:avLst/>
+          </a:prstGeom>
+          <a:noFill/>
+          <a:ln/>
+        </p:spPr>
+        <p:txBody>
+          <a:bodyPr wrap="square" rtlCol="0" anchor="ctr"/>
+          <a:lstStyle/>
+          <a:p>
+            <a:pPr marL="0" indent="0">
+              <a:buNone/>
+            </a:pPr>
+            <a:r>
+              <a:rPr lang="en-US" sz="950" b="1" kern="0" spc="50" dirty="0">
+                <a:solidFill>
+                  <a:srgbClr val="D9782D"/>
+                </a:solidFill>
+                <a:latin typeface="Calibri" pitchFamily="34" charset="0"/>
+                <a:ea typeface="Calibri" pitchFamily="34" charset="-122"/>
+                <a:cs typeface="Calibri" pitchFamily="34" charset="-120"/>
+              </a:rPr>
+              <a:t>✓ DEVELOPED NOW</a:t>
+            </a:r>
+            <a:endParaRPr lang="en-US" sz="950" dirty="0"/>
+          </a:p>
+        </p:txBody>
+      </p:sp>
+      <p:sp>
+        <p:nvSpPr>
+          <p:cNvPr id="15" name="Shape 11"/>
+          <p:cNvSpPr/>
+          <p:nvPr/>
+        </p:nvSpPr>
+        <p:spPr>
+          <a:xfrm>
+            <a:off x="4297680" y="3063240"/>
+            <a:ext cx="3429000" cy="2331720"/>
+          </a:xfrm>
+          <a:prstGeom prst="roundRect">
+            <a:avLst>
+              <a:gd name="adj" fmla="val 3922"/>
+            </a:avLst>
+          </a:prstGeom>
+          <a:solidFill>
+            <a:srgbClr val="1C2541"/>
+          </a:solidFill>
+          <a:ln/>
+        </p:spPr>
+        <p:txBody>
+          <a:bodyPr/>
+          <a:lstStyle/>
+          <a:p>
+            <a:endParaRPr lang="zh-CN" altLang="en-US"/>
+          </a:p>
+        </p:txBody>
+      </p:sp>
+      <p:sp>
+        <p:nvSpPr>
+          <p:cNvPr id="16" name="Shape 12"/>
+          <p:cNvSpPr/>
+          <p:nvPr/>
+        </p:nvSpPr>
+        <p:spPr>
+          <a:xfrm>
+            <a:off x="4572000" y="3337560"/>
+            <a:ext cx="502920" cy="502920"/>
+          </a:xfrm>
+          <a:prstGeom prst="ellipse">
+            <a:avLst/>
+          </a:prstGeom>
+          <a:solidFill>
+            <a:srgbClr val="D9782D"/>
+          </a:solidFill>
+          <a:ln/>
+        </p:spPr>
+        <p:txBody>
+          <a:bodyPr/>
+          <a:lstStyle/>
+          <a:p>
+            <a:endParaRPr lang="zh-CN" altLang="en-US"/>
+          </a:p>
+        </p:txBody>
+      </p:sp>
+      <p:pic>
+        <p:nvPicPr>
+          <p:cNvPr id="17" name="Image 2" descr="/Users/devonma/Desktop/9106/Assignment/A2b/build/icons/message.png"/>
+          <p:cNvPicPr>
+            <a:picLocks noChangeAspect="1"/>
+          </p:cNvPicPr>
+          <p:nvPr/>
+        </p:nvPicPr>
+        <p:blipFill>
+          <a:blip r:embed="rId5"/>
+          <a:stretch>
+            <a:fillRect/>
+          </a:stretch>
+        </p:blipFill>
+        <p:spPr>
+          <a:xfrm>
+            <a:off x="4702759" y="3468319"/>
+            <a:ext cx="241402" cy="241402"/>
+          </a:xfrm>
+          <a:prstGeom prst="rect">
+            <a:avLst/>
+          </a:prstGeom>
+        </p:spPr>
+      </p:pic>
+      <p:sp>
+        <p:nvSpPr>
+          <p:cNvPr id="18" name="Text 13"/>
+          <p:cNvSpPr/>
+          <p:nvPr/>
+        </p:nvSpPr>
+        <p:spPr>
+          <a:xfrm>
+            <a:off x="4572000" y="3977640"/>
+            <a:ext cx="2880360" cy="365760"/>
+          </a:xfrm>
+          <a:prstGeom prst="rect">
+            <a:avLst/>
+          </a:prstGeom>
+          <a:noFill/>
+          <a:ln/>
+        </p:spPr>
+        <p:txBody>
+          <a:bodyPr wrap="square" rtlCol="0" anchor="ctr"/>
+          <a:lstStyle/>
+          <a:p>
+            <a:pPr marL="0" indent="0">
+              <a:buNone/>
+            </a:pPr>
+            <a:r>
+              <a:rPr lang="en-US" sz="1500" b="1" dirty="0">
+                <a:solidFill>
+                  <a:srgbClr val="FFFFFF"/>
+                </a:solidFill>
+                <a:latin typeface="Calibri" pitchFamily="34" charset="0"/>
+                <a:ea typeface="Calibri" pitchFamily="34" charset="-122"/>
+                <a:cs typeface="Calibri" pitchFamily="34" charset="-120"/>
+              </a:rPr>
+              <a:t>Communication</a:t>
+            </a:r>
+            <a:endParaRPr lang="en-US" sz="1500" dirty="0"/>
+          </a:p>
+        </p:txBody>
+      </p:sp>
+      <p:sp>
+        <p:nvSpPr>
+          <p:cNvPr id="19" name="Text 14"/>
+          <p:cNvSpPr/>
+          <p:nvPr/>
+        </p:nvSpPr>
+        <p:spPr>
+          <a:xfrm>
+            <a:off x="4572000" y="4361688"/>
+            <a:ext cx="2880360" cy="548640"/>
+          </a:xfrm>
+          <a:prstGeom prst="rect">
+            <a:avLst/>
+          </a:prstGeom>
+          <a:noFill/>
+          <a:ln/>
+        </p:spPr>
+        <p:txBody>
+          <a:bodyPr wrap="square" rtlCol="0" anchor="ctr"/>
+          <a:lstStyle/>
+          <a:p>
+            <a:pPr marL="0" indent="0">
+              <a:lnSpc>
+                <a:spcPct val="110000"/>
+              </a:lnSpc>
+              <a:buNone/>
+            </a:pPr>
+            <a:r>
+              <a:rPr lang="en-US" sz="1100" dirty="0">
+                <a:solidFill>
+                  <a:srgbClr val="CFE0E8"/>
+                </a:solidFill>
+                <a:latin typeface="Calibri" pitchFamily="34" charset="0"/>
+                <a:ea typeface="Calibri" pitchFamily="34" charset="-122"/>
+                <a:cs typeface="Calibri" pitchFamily="34" charset="-120"/>
+              </a:rPr>
+              <a:t>Guarantee a defined reply.</a:t>
+            </a:r>
+            <a:endParaRPr lang="en-US" sz="1100" dirty="0"/>
+          </a:p>
+        </p:txBody>
+      </p:sp>
+      <p:sp>
+        <p:nvSpPr>
+          <p:cNvPr id="20" name="Text 15"/>
+          <p:cNvSpPr/>
+          <p:nvPr/>
+        </p:nvSpPr>
+        <p:spPr>
+          <a:xfrm>
+            <a:off x="4572000" y="4965192"/>
+            <a:ext cx="2880360" cy="320040"/>
+          </a:xfrm>
+          <a:prstGeom prst="rect">
+            <a:avLst/>
+          </a:prstGeom>
+          <a:noFill/>
+          <a:ln/>
+        </p:spPr>
+        <p:txBody>
+          <a:bodyPr wrap="square" rtlCol="0" anchor="ctr"/>
+          <a:lstStyle/>
+          <a:p>
+            <a:pPr marL="0" indent="0">
+              <a:buNone/>
+            </a:pPr>
+            <a:r>
+              <a:rPr lang="en-US" sz="950" b="1" kern="0" spc="50" dirty="0">
+                <a:solidFill>
+                  <a:srgbClr val="D9782D"/>
+                </a:solidFill>
+                <a:latin typeface="Calibri" pitchFamily="34" charset="0"/>
+                <a:ea typeface="Calibri" pitchFamily="34" charset="-122"/>
+                <a:cs typeface="Calibri" pitchFamily="34" charset="-120"/>
+              </a:rPr>
+              <a:t>✓ DEVELOPED NOW</a:t>
+            </a:r>
+            <a:endParaRPr lang="en-US" sz="950" dirty="0"/>
+          </a:p>
+        </p:txBody>
+      </p:sp>
+      <p:sp>
+        <p:nvSpPr>
+          <p:cNvPr id="21" name="Shape 16"/>
+          <p:cNvSpPr/>
+          <p:nvPr/>
+        </p:nvSpPr>
+        <p:spPr>
+          <a:xfrm>
+            <a:off x="7955280" y="3063240"/>
+            <a:ext cx="3429000" cy="2331720"/>
+          </a:xfrm>
+          <a:prstGeom prst="roundRect">
+            <a:avLst>
+              <a:gd name="adj" fmla="val 3922"/>
+            </a:avLst>
+          </a:prstGeom>
+          <a:solidFill>
+            <a:srgbClr val="F4F5F7"/>
+          </a:solidFill>
+          <a:ln/>
+        </p:spPr>
+        <p:txBody>
+          <a:bodyPr/>
+          <a:lstStyle/>
+          <a:p>
+            <a:endParaRPr lang="zh-CN" altLang="en-US"/>
+          </a:p>
+        </p:txBody>
+      </p:sp>
+      <p:sp>
+        <p:nvSpPr>
+          <p:cNvPr id="22" name="Shape 17"/>
+          <p:cNvSpPr/>
+          <p:nvPr/>
+        </p:nvSpPr>
+        <p:spPr>
+          <a:xfrm>
+            <a:off x="8229600" y="3337560"/>
+            <a:ext cx="502920" cy="502920"/>
+          </a:xfrm>
+          <a:prstGeom prst="ellipse">
+            <a:avLst/>
+          </a:prstGeom>
+          <a:solidFill>
+            <a:srgbClr val="5C7A99"/>
+          </a:solidFill>
+          <a:ln/>
+        </p:spPr>
+        <p:txBody>
+          <a:bodyPr/>
+          <a:lstStyle/>
+          <a:p>
+            <a:endParaRPr lang="zh-CN" altLang="en-US"/>
+          </a:p>
+        </p:txBody>
+      </p:sp>
+      <p:pic>
+        <p:nvPicPr>
+          <p:cNvPr id="23" name="Image 3" descr="/Users/devonma/Desktop/9106/Assignment/A2b/build/icons/shuffle.png"/>
+          <p:cNvPicPr>
+            <a:picLocks noChangeAspect="1"/>
+          </p:cNvPicPr>
+          <p:nvPr/>
+        </p:nvPicPr>
+        <p:blipFill>
+          <a:blip r:embed="rId6"/>
+          <a:stretch>
+            <a:fillRect/>
+          </a:stretch>
+        </p:blipFill>
+        <p:spPr>
+          <a:xfrm>
+            <a:off x="8360359" y="3468319"/>
+            <a:ext cx="241402" cy="241402"/>
+          </a:xfrm>
+          <a:prstGeom prst="rect">
+            <a:avLst/>
+          </a:prstGeom>
+        </p:spPr>
+      </p:pic>
+      <p:sp>
+        <p:nvSpPr>
+          <p:cNvPr id="24" name="Text 18"/>
+          <p:cNvSpPr/>
+          <p:nvPr/>
+        </p:nvSpPr>
+        <p:spPr>
+          <a:xfrm>
+            <a:off x="8229600" y="3977640"/>
+            <a:ext cx="2880360" cy="365760"/>
+          </a:xfrm>
+          <a:prstGeom prst="rect">
+            <a:avLst/>
+          </a:prstGeom>
+          <a:noFill/>
+          <a:ln/>
+        </p:spPr>
+        <p:txBody>
+          <a:bodyPr wrap="square" rtlCol="0" anchor="ctr"/>
+          <a:lstStyle/>
+          <a:p>
+            <a:pPr marL="0" indent="0">
+              <a:buNone/>
+            </a:pPr>
+            <a:r>
+              <a:rPr lang="en-US" sz="1500" b="1" dirty="0">
+                <a:solidFill>
+                  <a:srgbClr val="1C2541"/>
+                </a:solidFill>
+                <a:latin typeface="Calibri" pitchFamily="34" charset="0"/>
+                <a:ea typeface="Calibri" pitchFamily="34" charset="-122"/>
+                <a:cs typeface="Calibri" pitchFamily="34" charset="-120"/>
+              </a:rPr>
+              <a:t>Scheduling influence</a:t>
+            </a:r>
+            <a:endParaRPr lang="en-US" sz="1500" dirty="0"/>
+          </a:p>
+        </p:txBody>
+      </p:sp>
+      <p:sp>
+        <p:nvSpPr>
+          <p:cNvPr id="25" name="Text 19"/>
+          <p:cNvSpPr/>
+          <p:nvPr/>
+        </p:nvSpPr>
+        <p:spPr>
+          <a:xfrm>
+            <a:off x="8229600" y="4361688"/>
+            <a:ext cx="2880360" cy="548640"/>
+          </a:xfrm>
+          <a:prstGeom prst="rect">
+            <a:avLst/>
+          </a:prstGeom>
+          <a:noFill/>
+          <a:ln/>
+        </p:spPr>
+        <p:txBody>
+          <a:bodyPr wrap="square" rtlCol="0" anchor="ctr"/>
+          <a:lstStyle/>
+          <a:p>
+            <a:pPr marL="0" indent="0">
+              <a:lnSpc>
+                <a:spcPct val="110000"/>
+              </a:lnSpc>
+              <a:buNone/>
+            </a:pPr>
+            <a:r>
+              <a:rPr lang="en-US" sz="1100" dirty="0">
+                <a:solidFill>
                   <a:srgbClr val="5B6472"/>
                 </a:solidFill>
                 <a:latin typeface="Calibri" pitchFamily="34" charset="0"/>
@@ -7623,11 +7461,11 @@
           <a:bodyPr wrap="square" rtlCol="0" anchor="ctr"/>
           <a:lstStyle/>
           <a:p>
-            <a:pPr indent="0" marL="0">
-              <a:buNone/>
-            </a:pPr>
-            <a:r>
-              <a:rPr lang="en-US" sz="950" b="1" spc="50" kern="0" dirty="0">
+            <a:pPr marL="0" indent="0">
+              <a:buNone/>
+            </a:pPr>
+            <a:r>
+              <a:rPr lang="en-US" sz="950" b="1" kern="0" spc="50" dirty="0">
                 <a:solidFill>
                   <a:srgbClr val="5B6472"/>
                 </a:solidFill>
@@ -7662,7 +7500,7 @@
           <a:bodyPr wrap="square" rtlCol="0" anchor="ctr"/>
           <a:lstStyle/>
           <a:p>
-            <a:pPr indent="0" marL="0">
+            <a:pPr marL="0" indent="0">
               <a:lnSpc>
                 <a:spcPct val="115000"/>
               </a:lnSpc>
@@ -7704,7 +7542,7 @@
           <a:bodyPr wrap="square" rtlCol="0" anchor="ctr"/>
           <a:lstStyle/>
           <a:p>
-            <a:pPr algn="l" indent="0" marL="0">
+            <a:pPr marL="0" indent="0" algn="l">
               <a:buNone/>
             </a:pPr>
             <a:r>
@@ -7743,7 +7581,7 @@
           <a:bodyPr wrap="square" rtlCol="0" anchor="ctr"/>
           <a:lstStyle/>
           <a:p>
-            <a:pPr algn="r" indent="0" marL="0">
+            <a:pPr marL="0" indent="0" algn="r">
               <a:buNone/>
             </a:pPr>
             <a:r>
@@ -7777,6 +7615,7 @@
         <a:solidFill>
           <a:srgbClr val="FFFFFF"/>
         </a:solidFill>
+        <a:effectLst/>
       </p:bgPr>
     </p:bg>
     <p:spTree>
@@ -7814,7 +7653,7 @@
           <a:bodyPr wrap="square" rtlCol="0" anchor="ctr"/>
           <a:lstStyle/>
           <a:p>
-            <a:pPr indent="0" marL="0">
+            <a:pPr marL="0" indent="0">
               <a:buNone/>
             </a:pPr>
             <a:r>
@@ -7853,7 +7692,7 @@
           <a:bodyPr wrap="square" rtlCol="0" anchor="ctr"/>
           <a:lstStyle/>
           <a:p>
-            <a:pPr indent="0" marL="0">
+            <a:pPr marL="0" indent="0">
               <a:buNone/>
             </a:pPr>
             <a:r>
@@ -7892,6 +7731,13 @@
           </a:solidFill>
           <a:ln/>
         </p:spPr>
+        <p:txBody>
+          <a:bodyPr/>
+          <a:lstStyle/>
+          <a:p>
+            <a:endParaRPr lang="zh-CN" altLang="en-US"/>
+          </a:p>
+        </p:txBody>
       </p:sp>
       <p:sp>
         <p:nvSpPr>
@@ -7912,17 +7758,24 @@
           </a:solidFill>
           <a:ln/>
         </p:spPr>
+        <p:txBody>
+          <a:bodyPr/>
+          <a:lstStyle/>
+          <a:p>
+            <a:endParaRPr lang="zh-CN" altLang="en-US"/>
+          </a:p>
+        </p:txBody>
       </p:sp>
       <p:pic>
         <p:nvPicPr>
-          <p:cNvPr id="6" name="Image 0" descr="/Users/devonma/Desktop/9106/Assignment/A2b/build/icons/eye.png">    </p:cNvPr>
+          <p:cNvPr id="6" name="Image 0" descr="/Users/devonma/Desktop/9106/Assignment/A2b/build/icons/eye.png"/>
           <p:cNvPicPr>
             <a:picLocks noChangeAspect="1"/>
           </p:cNvPicPr>
           <p:nvPr/>
         </p:nvPicPr>
         <p:blipFill>
-          <a:blip r:embed="rId1"/>
+          <a:blip r:embed="rId3"/>
           <a:stretch>
             <a:fillRect/>
           </a:stretch>
@@ -7958,7 +7811,7 @@
           <a:bodyPr wrap="square" rtlCol="0" anchor="ctr"/>
           <a:lstStyle/>
           <a:p>
-            <a:pPr indent="0" marL="0">
+            <a:pPr marL="0" indent="0">
               <a:buNone/>
             </a:pPr>
             <a:r>
@@ -7997,7 +7850,7 @@
           <a:bodyPr wrap="square" rtlCol="0" anchor="ctr"/>
           <a:lstStyle/>
           <a:p>
-            <a:pPr indent="0" marL="0">
+            <a:pPr marL="0" indent="0">
               <a:lnSpc>
                 <a:spcPct val="115000"/>
               </a:lnSpc>
@@ -8037,6 +7890,13 @@
           </a:solidFill>
           <a:ln/>
         </p:spPr>
+        <p:txBody>
+          <a:bodyPr/>
+          <a:lstStyle/>
+          <a:p>
+            <a:endParaRPr lang="zh-CN" altLang="en-US"/>
+          </a:p>
+        </p:txBody>
       </p:sp>
       <p:sp>
         <p:nvSpPr>
@@ -8059,7 +7919,7 @@
           <a:bodyPr wrap="square" rtlCol="0" anchor="ctr"/>
           <a:lstStyle/>
           <a:p>
-            <a:pPr algn="ctr" indent="0" marL="0">
+            <a:pPr marL="0" indent="0" algn="ctr">
               <a:buNone/>
             </a:pPr>
             <a:r>
@@ -8098,7 +7958,7 @@
           <a:bodyPr wrap="square" rtlCol="0" anchor="ctr"/>
           <a:lstStyle/>
           <a:p>
-            <a:pPr algn="ctr" indent="0" marL="0">
+            <a:pPr marL="0" indent="0" algn="ctr">
               <a:buNone/>
             </a:pPr>
             <a:r>
@@ -8138,6 +7998,13 @@
             <a:prstDash val="solid"/>
           </a:ln>
         </p:spPr>
+        <p:txBody>
+          <a:bodyPr/>
+          <a:lstStyle/>
+          <a:p>
+            <a:endParaRPr lang="zh-CN" altLang="en-US"/>
+          </a:p>
+        </p:txBody>
       </p:sp>
       <p:sp>
         <p:nvSpPr>
@@ -8158,6 +8025,13 @@
           </a:solidFill>
           <a:ln/>
         </p:spPr>
+        <p:txBody>
+          <a:bodyPr/>
+          <a:lstStyle/>
+          <a:p>
+            <a:endParaRPr lang="zh-CN" altLang="en-US"/>
+          </a:p>
+        </p:txBody>
       </p:sp>
       <p:sp>
         <p:nvSpPr>
@@ -8180,7 +8054,7 @@
           <a:bodyPr wrap="square" rtlCol="0" anchor="ctr"/>
           <a:lstStyle/>
           <a:p>
-            <a:pPr algn="ctr" indent="0" marL="0">
+            <a:pPr marL="0" indent="0" algn="ctr">
               <a:buNone/>
             </a:pPr>
             <a:r>
@@ -8219,7 +8093,7 @@
           <a:bodyPr wrap="square" rtlCol="0" anchor="ctr"/>
           <a:lstStyle/>
           <a:p>
-            <a:pPr algn="ctr" indent="0" marL="0">
+            <a:pPr marL="0" indent="0" algn="ctr">
               <a:buNone/>
             </a:pPr>
             <a:r>
@@ -8259,6 +8133,13 @@
             <a:prstDash val="solid"/>
           </a:ln>
         </p:spPr>
+        <p:txBody>
+          <a:bodyPr/>
+          <a:lstStyle/>
+          <a:p>
+            <a:endParaRPr lang="zh-CN" altLang="en-US"/>
+          </a:p>
+        </p:txBody>
       </p:sp>
       <p:sp>
         <p:nvSpPr>
@@ -8279,6 +8160,13 @@
           </a:solidFill>
           <a:ln/>
         </p:spPr>
+        <p:txBody>
+          <a:bodyPr/>
+          <a:lstStyle/>
+          <a:p>
+            <a:endParaRPr lang="zh-CN" altLang="en-US"/>
+          </a:p>
+        </p:txBody>
       </p:sp>
       <p:sp>
         <p:nvSpPr>
@@ -8301,7 +8189,7 @@
           <a:bodyPr wrap="square" rtlCol="0" anchor="ctr"/>
           <a:lstStyle/>
           <a:p>
-            <a:pPr algn="ctr" indent="0" marL="0">
+            <a:pPr marL="0" indent="0" algn="ctr">
               <a:buNone/>
             </a:pPr>
             <a:r>
@@ -8340,7 +8228,7 @@
           <a:bodyPr wrap="square" rtlCol="0" anchor="ctr"/>
           <a:lstStyle/>
           <a:p>
-            <a:pPr algn="ctr" indent="0" marL="0">
+            <a:pPr marL="0" indent="0" algn="ctr">
               <a:buNone/>
             </a:pPr>
             <a:r>
@@ -8380,6 +8268,13 @@
             <a:prstDash val="solid"/>
           </a:ln>
         </p:spPr>
+        <p:txBody>
+          <a:bodyPr/>
+          <a:lstStyle/>
+          <a:p>
+            <a:endParaRPr lang="zh-CN" altLang="en-US"/>
+          </a:p>
+        </p:txBody>
       </p:sp>
       <p:sp>
         <p:nvSpPr>
@@ -8400,6 +8295,13 @@
           </a:solidFill>
           <a:ln/>
         </p:spPr>
+        <p:txBody>
+          <a:bodyPr/>
+          <a:lstStyle/>
+          <a:p>
+            <a:endParaRPr lang="zh-CN" altLang="en-US"/>
+          </a:p>
+        </p:txBody>
       </p:sp>
       <p:sp>
         <p:nvSpPr>
@@ -8422,7 +8324,7 @@
           <a:bodyPr wrap="square" rtlCol="0" anchor="ctr"/>
           <a:lstStyle/>
           <a:p>
-            <a:pPr algn="ctr" indent="0" marL="0">
+            <a:pPr marL="0" indent="0" algn="ctr">
               <a:buNone/>
             </a:pPr>
             <a:r>
@@ -8461,7 +8363,7 @@
           <a:bodyPr wrap="square" rtlCol="0" anchor="ctr"/>
           <a:lstStyle/>
           <a:p>
-            <a:pPr algn="ctr" indent="0" marL="0">
+            <a:pPr marL="0" indent="0" algn="ctr">
               <a:buNone/>
             </a:pPr>
             <a:r>
@@ -8501,6 +8403,13 @@
             <a:prstDash val="solid"/>
           </a:ln>
         </p:spPr>
+        <p:txBody>
+          <a:bodyPr/>
+          <a:lstStyle/>
+          <a:p>
+            <a:endParaRPr lang="zh-CN" altLang="en-US"/>
+          </a:p>
+        </p:txBody>
       </p:sp>
       <p:sp>
         <p:nvSpPr>
@@ -8521,6 +8430,13 @@
           </a:solidFill>
           <a:ln/>
         </p:spPr>
+        <p:txBody>
+          <a:bodyPr/>
+          <a:lstStyle/>
+          <a:p>
+            <a:endParaRPr lang="zh-CN" altLang="en-US"/>
+          </a:p>
+        </p:txBody>
       </p:sp>
       <p:sp>
         <p:nvSpPr>
@@ -8543,7 +8459,7 @@
           <a:bodyPr wrap="square" rtlCol="0" anchor="ctr"/>
           <a:lstStyle/>
           <a:p>
-            <a:pPr algn="ctr" indent="0" marL="0">
+            <a:pPr marL="0" indent="0" algn="ctr">
               <a:buNone/>
             </a:pPr>
             <a:r>
@@ -8582,7 +8498,7 @@
           <a:bodyPr wrap="square" rtlCol="0" anchor="ctr"/>
           <a:lstStyle/>
           <a:p>
-            <a:pPr algn="ctr" indent="0" marL="0">
+            <a:pPr marL="0" indent="0" algn="ctr">
               <a:buNone/>
             </a:pPr>
             <a:r>
@@ -8621,7 +8537,7 @@
           <a:bodyPr wrap="square" rtlCol="0" anchor="ctr"/>
           <a:lstStyle/>
           <a:p>
-            <a:pPr indent="0" marL="0">
+            <a:pPr marL="0" indent="0">
               <a:buNone/>
             </a:pPr>
             <a:r>
@@ -8660,6 +8576,13 @@
           </a:solidFill>
           <a:ln/>
         </p:spPr>
+        <p:txBody>
+          <a:bodyPr/>
+          <a:lstStyle/>
+          <a:p>
+            <a:endParaRPr lang="zh-CN" altLang="en-US"/>
+          </a:p>
+        </p:txBody>
       </p:sp>
       <p:sp>
         <p:nvSpPr>
@@ -8680,17 +8603,24 @@
           </a:solidFill>
           <a:ln/>
         </p:spPr>
+        <p:txBody>
+          <a:bodyPr/>
+          <a:lstStyle/>
+          <a:p>
+            <a:endParaRPr lang="zh-CN" altLang="en-US"/>
+          </a:p>
+        </p:txBody>
       </p:sp>
       <p:pic>
         <p:nvPicPr>
-          <p:cNvPr id="31" name="Image 1" descr="/Users/devonma/Desktop/9106/Assignment/A2b/build/icons/file.png">    </p:cNvPr>
+          <p:cNvPr id="31" name="Image 1" descr="/Users/devonma/Desktop/9106/Assignment/A2b/build/icons/file.png"/>
           <p:cNvPicPr>
             <a:picLocks noChangeAspect="1"/>
           </p:cNvPicPr>
           <p:nvPr/>
         </p:nvPicPr>
         <p:blipFill>
-          <a:blip r:embed="rId2"/>
+          <a:blip r:embed="rId4"/>
           <a:stretch>
             <a:fillRect/>
           </a:stretch>
@@ -8726,7 +8656,7 @@
           <a:bodyPr wrap="square" rtlCol="0" anchor="ctr"/>
           <a:lstStyle/>
           <a:p>
-            <a:pPr indent="0" marL="0">
+            <a:pPr marL="0" indent="0">
               <a:buNone/>
             </a:pPr>
             <a:r>
@@ -8765,7 +8695,7 @@
           <a:bodyPr wrap="square" rtlCol="0" anchor="ctr"/>
           <a:lstStyle/>
           <a:p>
-            <a:pPr indent="0" marL="0">
+            <a:pPr marL="0" indent="0">
               <a:buNone/>
             </a:pPr>
             <a:r>
@@ -8804,6 +8734,13 @@
           </a:solidFill>
           <a:ln/>
         </p:spPr>
+        <p:txBody>
+          <a:bodyPr/>
+          <a:lstStyle/>
+          <a:p>
+            <a:endParaRPr lang="zh-CN" altLang="en-US"/>
+          </a:p>
+        </p:txBody>
       </p:sp>
       <p:sp>
         <p:nvSpPr>
@@ -8826,7 +8763,7 @@
           <a:bodyPr wrap="square" rtlCol="0" anchor="ctr"/>
           <a:lstStyle/>
           <a:p>
-            <a:pPr indent="0" marL="0">
+            <a:pPr marL="0" indent="0">
               <a:buNone/>
             </a:pPr>
             <a:r>
@@ -8865,7 +8802,7 @@
           <a:bodyPr wrap="square" rtlCol="0" anchor="ctr"/>
           <a:lstStyle/>
           <a:p>
-            <a:pPr indent="0" marL="0">
+            <a:pPr marL="0" indent="0">
               <a:buNone/>
             </a:pPr>
             <a:r>
@@ -8904,7 +8841,7 @@
           <a:bodyPr wrap="square" rtlCol="0" anchor="ctr"/>
           <a:lstStyle/>
           <a:p>
-            <a:pPr indent="0" marL="0">
+            <a:pPr marL="0" indent="0">
               <a:buNone/>
             </a:pPr>
             <a:r>
@@ -8943,7 +8880,7 @@
           <a:bodyPr wrap="square" rtlCol="0" anchor="ctr"/>
           <a:lstStyle/>
           <a:p>
-            <a:pPr indent="0" marL="0">
+            <a:pPr marL="0" indent="0">
               <a:buNone/>
             </a:pPr>
             <a:r>
@@ -8982,7 +8919,7 @@
           <a:bodyPr wrap="square" rtlCol="0" anchor="ctr"/>
           <a:lstStyle/>
           <a:p>
-            <a:pPr indent="0" marL="0">
+            <a:pPr marL="0" indent="0">
               <a:buNone/>
             </a:pPr>
             <a:r>
@@ -9021,7 +8958,7 @@
           <a:bodyPr wrap="square" rtlCol="0" anchor="ctr"/>
           <a:lstStyle/>
           <a:p>
-            <a:pPr indent="0" marL="0">
+            <a:pPr marL="0" indent="0">
               <a:buNone/>
             </a:pPr>
             <a:r>
@@ -9060,7 +8997,7 @@
           <a:bodyPr wrap="square" rtlCol="0" anchor="ctr"/>
           <a:lstStyle/>
           <a:p>
-            <a:pPr indent="0" marL="0">
+            <a:pPr marL="0" indent="0">
               <a:lnSpc>
                 <a:spcPct val="110000"/>
               </a:lnSpc>
@@ -9107,17 +9044,24 @@
             <a:prstDash val="solid"/>
           </a:ln>
         </p:spPr>
+        <p:txBody>
+          <a:bodyPr/>
+          <a:lstStyle/>
+          <a:p>
+            <a:endParaRPr lang="zh-CN" altLang="en-US"/>
+          </a:p>
+        </p:txBody>
       </p:sp>
       <p:pic>
         <p:nvPicPr>
-          <p:cNvPr id="43" name="Image 2" descr="/Users/devonma/Desktop/9106/Assignment/A2b/build/icons/check.png">    </p:cNvPr>
+          <p:cNvPr id="43" name="Image 2" descr="/Users/devonma/Desktop/9106/Assignment/A2b/build/icons/check.png"/>
           <p:cNvPicPr>
             <a:picLocks noChangeAspect="1"/>
           </p:cNvPicPr>
           <p:nvPr/>
         </p:nvPicPr>
         <p:blipFill>
-          <a:blip r:embed="rId3"/>
+          <a:blip r:embed="rId5"/>
           <a:stretch>
             <a:fillRect/>
           </a:stretch>
@@ -9153,7 +9097,7 @@
           <a:bodyPr wrap="square" rtlCol="0" anchor="ctr"/>
           <a:lstStyle/>
           <a:p>
-            <a:pPr indent="0" marL="0">
+            <a:pPr marL="0" indent="0">
               <a:buNone/>
             </a:pPr>
             <a:r>
@@ -9192,7 +9136,7 @@
           <a:bodyPr wrap="square" rtlCol="0" anchor="ctr"/>
           <a:lstStyle/>
           <a:p>
-            <a:pPr algn="l" indent="0" marL="0">
+            <a:pPr marL="0" indent="0" algn="l">
               <a:buNone/>
             </a:pPr>
             <a:r>
@@ -9231,7 +9175,7 @@
           <a:bodyPr wrap="square" rtlCol="0" anchor="ctr"/>
           <a:lstStyle/>
           <a:p>
-            <a:pPr algn="r" indent="0" marL="0">
+            <a:pPr marL="0" indent="0" algn="r">
               <a:buNone/>
             </a:pPr>
             <a:r>
@@ -9265,6 +9209,7 @@
         <a:solidFill>
           <a:srgbClr val="FFFFFF"/>
         </a:solidFill>
+        <a:effectLst/>
       </p:bgPr>
     </p:bg>
     <p:spTree>
@@ -9302,7 +9247,7 @@
           <a:bodyPr wrap="square" rtlCol="0" anchor="ctr"/>
           <a:lstStyle/>
           <a:p>
-            <a:pPr indent="0" marL="0">
+            <a:pPr marL="0" indent="0">
               <a:buNone/>
             </a:pPr>
             <a:r>
@@ -9341,7 +9286,7 @@
           <a:bodyPr wrap="square" rtlCol="0" anchor="ctr"/>
           <a:lstStyle/>
           <a:p>
-            <a:pPr indent="0" marL="0">
+            <a:pPr marL="0" indent="0">
               <a:buNone/>
             </a:pPr>
             <a:r>
@@ -9380,6 +9325,13 @@
           </a:solidFill>
           <a:ln/>
         </p:spPr>
+        <p:txBody>
+          <a:bodyPr/>
+          <a:lstStyle/>
+          <a:p>
+            <a:endParaRPr lang="zh-CN" altLang="en-US"/>
+          </a:p>
+        </p:txBody>
       </p:sp>
       <p:sp>
         <p:nvSpPr>
@@ -9402,7 +9354,7 @@
           <a:bodyPr wrap="square" rtlCol="0" anchor="ctr"/>
           <a:lstStyle/>
           <a:p>
-            <a:pPr indent="0" marL="0">
+            <a:pPr marL="0" indent="0">
               <a:lnSpc>
                 <a:spcPct val="105000"/>
               </a:lnSpc>
@@ -9425,267 +9377,7 @@
       </p:sp>
       <p:pic>
         <p:nvPicPr>
-          <p:cNvPr id="6" name="Image 0" descr="/Users/devonma/Desktop/9106/Assignment/A2b/build/icons/trend.png">    </p:cNvPr>
-          <p:cNvPicPr>
-            <a:picLocks noChangeAspect="1"/>
-          </p:cNvPicPr>
-          <p:nvPr/>
-        </p:nvPicPr>
-        <p:blipFill>
-          <a:blip r:embed="rId1"/>
-          <a:stretch>
-            <a:fillRect/>
-          </a:stretch>
-        </p:blipFill>
-        <p:spPr>
-          <a:xfrm>
-            <a:off x="3703320" y="1563624"/>
-            <a:ext cx="237744" cy="237744"/>
-          </a:xfrm>
-          <a:prstGeom prst="rect">
-            <a:avLst/>
-          </a:prstGeom>
-        </p:spPr>
-      </p:pic>
-      <p:sp>
-        <p:nvSpPr>
-          <p:cNvPr id="7" name="Text 4"/>
-          <p:cNvSpPr/>
-          <p:nvPr/>
-        </p:nvSpPr>
-        <p:spPr>
-          <a:xfrm>
-            <a:off x="4069080" y="1426464"/>
-            <a:ext cx="2971800" cy="512064"/>
-          </a:xfrm>
-          <a:prstGeom prst="rect">
-            <a:avLst/>
-          </a:prstGeom>
-          <a:noFill/>
-          <a:ln/>
-        </p:spPr>
-        <p:txBody>
-          <a:bodyPr wrap="square" rtlCol="0" anchor="ctr"/>
-          <a:lstStyle/>
-          <a:p>
-            <a:pPr indent="0" marL="0">
-              <a:lnSpc>
-                <a:spcPct val="105000"/>
-              </a:lnSpc>
-              <a:buNone/>
-            </a:pPr>
-            <a:r>
-              <a:rPr lang="en-US" sz="1050" b="1" dirty="0">
-                <a:solidFill>
-                  <a:srgbClr val="1C2541"/>
-                </a:solidFill>
-                <a:latin typeface="Calibri" pitchFamily="34" charset="0"/>
-                <a:ea typeface="Calibri" pitchFamily="34" charset="-122"/>
-                <a:cs typeface="Calibri" pitchFamily="34" charset="-120"/>
-              </a:rPr>
-              <a:t>Visible Queue Board — stage always shown</a:t>
-            </a:r>
-            <a:endParaRPr lang="en-US" sz="1050" dirty="0"/>
-          </a:p>
-        </p:txBody>
-      </p:sp>
-      <p:sp>
-        <p:nvSpPr>
-          <p:cNvPr id="8" name="Shape 5"/>
-          <p:cNvSpPr/>
-          <p:nvPr/>
-        </p:nvSpPr>
-        <p:spPr>
-          <a:xfrm>
-            <a:off x="640080" y="2084832"/>
-            <a:ext cx="6492240" cy="621792"/>
-          </a:xfrm>
-          <a:prstGeom prst="roundRect">
-            <a:avLst>
-              <a:gd name="adj" fmla="val 7353"/>
-            </a:avLst>
-          </a:prstGeom>
-          <a:solidFill>
-            <a:srgbClr val="F4F5F7"/>
-          </a:solidFill>
-          <a:ln/>
-        </p:spPr>
-      </p:sp>
-      <p:sp>
-        <p:nvSpPr>
-          <p:cNvPr id="9" name="Text 6"/>
-          <p:cNvSpPr/>
-          <p:nvPr/>
-        </p:nvSpPr>
-        <p:spPr>
-          <a:xfrm>
-            <a:off x="822960" y="2139696"/>
-            <a:ext cx="2834640" cy="512064"/>
-          </a:xfrm>
-          <a:prstGeom prst="rect">
-            <a:avLst/>
-          </a:prstGeom>
-          <a:noFill/>
-          <a:ln/>
-        </p:spPr>
-        <p:txBody>
-          <a:bodyPr wrap="square" rtlCol="0" anchor="ctr"/>
-          <a:lstStyle/>
-          <a:p>
-            <a:pPr indent="0" marL="0">
-              <a:lnSpc>
-                <a:spcPct val="105000"/>
-              </a:lnSpc>
-              <a:buNone/>
-            </a:pPr>
-            <a:r>
-              <a:rPr lang="en-US" sz="1050" dirty="0">
-                <a:solidFill>
-                  <a:srgbClr val="222831"/>
-                </a:solidFill>
-                <a:latin typeface="Calibri" pitchFamily="34" charset="0"/>
-                <a:ea typeface="Calibri" pitchFamily="34" charset="-122"/>
-                <a:cs typeface="Calibri" pitchFamily="34" charset="-120"/>
-              </a:rPr>
-              <a:t>Checking status repeatedly</a:t>
-            </a:r>
-            <a:endParaRPr lang="en-US" sz="1050" dirty="0"/>
-          </a:p>
-        </p:txBody>
-      </p:sp>
-      <p:pic>
-        <p:nvPicPr>
-          <p:cNvPr id="10" name="Image 1" descr="/Users/devonma/Desktop/9106/Assignment/A2b/build/icons/trend.png">    </p:cNvPr>
-          <p:cNvPicPr>
-            <a:picLocks noChangeAspect="1"/>
-          </p:cNvPicPr>
-          <p:nvPr/>
-        </p:nvPicPr>
-        <p:blipFill>
-          <a:blip r:embed="rId2"/>
-          <a:stretch>
-            <a:fillRect/>
-          </a:stretch>
-        </p:blipFill>
-        <p:spPr>
-          <a:xfrm>
-            <a:off x="3703320" y="2276856"/>
-            <a:ext cx="237744" cy="237744"/>
-          </a:xfrm>
-          <a:prstGeom prst="rect">
-            <a:avLst/>
-          </a:prstGeom>
-        </p:spPr>
-      </p:pic>
-      <p:sp>
-        <p:nvSpPr>
-          <p:cNvPr id="11" name="Text 7"/>
-          <p:cNvSpPr/>
-          <p:nvPr/>
-        </p:nvSpPr>
-        <p:spPr>
-          <a:xfrm>
-            <a:off x="4069080" y="2139696"/>
-            <a:ext cx="2971800" cy="512064"/>
-          </a:xfrm>
-          <a:prstGeom prst="rect">
-            <a:avLst/>
-          </a:prstGeom>
-          <a:noFill/>
-          <a:ln/>
-        </p:spPr>
-        <p:txBody>
-          <a:bodyPr wrap="square" rtlCol="0" anchor="ctr"/>
-          <a:lstStyle/>
-          <a:p>
-            <a:pPr indent="0" marL="0">
-              <a:lnSpc>
-                <a:spcPct val="105000"/>
-              </a:lnSpc>
-              <a:buNone/>
-            </a:pPr>
-            <a:r>
-              <a:rPr lang="en-US" sz="1050" b="1" dirty="0">
-                <a:solidFill>
-                  <a:srgbClr val="1C2541"/>
-                </a:solidFill>
-                <a:latin typeface="Calibri" pitchFamily="34" charset="0"/>
-                <a:ea typeface="Calibri" pitchFamily="34" charset="-122"/>
-                <a:cs typeface="Calibri" pitchFamily="34" charset="-120"/>
-              </a:rPr>
-              <a:t>Board removes the need to ask — status is ambient</a:t>
-            </a:r>
-            <a:endParaRPr lang="en-US" sz="1050" dirty="0"/>
-          </a:p>
-        </p:txBody>
-      </p:sp>
-      <p:sp>
-        <p:nvSpPr>
-          <p:cNvPr id="12" name="Shape 8"/>
-          <p:cNvSpPr/>
-          <p:nvPr/>
-        </p:nvSpPr>
-        <p:spPr>
-          <a:xfrm>
-            <a:off x="640080" y="2798064"/>
-            <a:ext cx="6492240" cy="621792"/>
-          </a:xfrm>
-          <a:prstGeom prst="roundRect">
-            <a:avLst>
-              <a:gd name="adj" fmla="val 7353"/>
-            </a:avLst>
-          </a:prstGeom>
-          <a:solidFill>
-            <a:srgbClr val="F4F5F7"/>
-          </a:solidFill>
-          <a:ln/>
-        </p:spPr>
-      </p:sp>
-      <p:sp>
-        <p:nvSpPr>
-          <p:cNvPr id="13" name="Text 9"/>
-          <p:cNvSpPr/>
-          <p:nvPr/>
-        </p:nvSpPr>
-        <p:spPr>
-          <a:xfrm>
-            <a:off x="822960" y="2852928"/>
-            <a:ext cx="2834640" cy="512064"/>
-          </a:xfrm>
-          <a:prstGeom prst="rect">
-            <a:avLst/>
-          </a:prstGeom>
-          <a:noFill/>
-          <a:ln/>
-        </p:spPr>
-        <p:txBody>
-          <a:bodyPr wrap="square" rtlCol="0" anchor="ctr"/>
-          <a:lstStyle/>
-          <a:p>
-            <a:pPr indent="0" marL="0">
-              <a:lnSpc>
-                <a:spcPct val="105000"/>
-              </a:lnSpc>
-              <a:buNone/>
-            </a:pPr>
-            <a:r>
-              <a:rPr lang="en-US" sz="1050" dirty="0">
-                <a:solidFill>
-                  <a:srgbClr val="222831"/>
-                </a:solidFill>
-                <a:latin typeface="Calibri" pitchFamily="34" charset="0"/>
-                <a:ea typeface="Calibri" pitchFamily="34" charset="-122"/>
-                <a:cs typeface="Calibri" pitchFamily="34" charset="-120"/>
-              </a:rPr>
-              <a:t>Reply not useful / no reply</a:t>
-            </a:r>
-            <a:endParaRPr lang="en-US" sz="1050" dirty="0"/>
-          </a:p>
-        </p:txBody>
-      </p:sp>
-      <p:pic>
-        <p:nvPicPr>
-          <p:cNvPr id="14" name="Image 2" descr="/Users/devonma/Desktop/9106/Assignment/A2b/build/icons/trend.png">    </p:cNvPr>
+          <p:cNvPr id="6" name="Image 0" descr="/Users/devonma/Desktop/9106/Assignment/A2b/build/icons/trend.png"/>
           <p:cNvPicPr>
             <a:picLocks noChangeAspect="1"/>
           </p:cNvPicPr>
@@ -9699,7 +9391,7 @@
         </p:blipFill>
         <p:spPr>
           <a:xfrm>
-            <a:off x="3703320" y="2990088"/>
+            <a:off x="3703320" y="1563624"/>
             <a:ext cx="237744" cy="237744"/>
           </a:xfrm>
           <a:prstGeom prst="rect">
@@ -9709,13 +9401,13 @@
       </p:pic>
       <p:sp>
         <p:nvSpPr>
-          <p:cNvPr id="15" name="Text 10"/>
-          <p:cNvSpPr/>
-          <p:nvPr/>
-        </p:nvSpPr>
-        <p:spPr>
-          <a:xfrm>
-            <a:off x="4069080" y="2852928"/>
+          <p:cNvPr id="7" name="Text 4"/>
+          <p:cNvSpPr/>
+          <p:nvPr/>
+        </p:nvSpPr>
+        <p:spPr>
+          <a:xfrm>
+            <a:off x="4069080" y="1426464"/>
             <a:ext cx="2971800" cy="512064"/>
           </a:xfrm>
           <a:prstGeom prst="rect">
@@ -9728,7 +9420,7 @@
           <a:bodyPr wrap="square" rtlCol="0" anchor="ctr"/>
           <a:lstStyle/>
           <a:p>
-            <a:pPr indent="0" marL="0">
+            <a:pPr marL="0" indent="0">
               <a:lnSpc>
                 <a:spcPct val="105000"/>
               </a:lnSpc>
@@ -9743,7 +9435,7 @@
                 <a:ea typeface="Calibri" pitchFamily="34" charset="-122"/>
                 <a:cs typeface="Calibri" pitchFamily="34" charset="-120"/>
               </a:rPr>
-              <a:t>Receipt Card guarantees a defined next update</a:t>
+              <a:t>Visible Queue Board — stage always shown</a:t>
             </a:r>
             <a:endParaRPr lang="en-US" sz="1050" dirty="0"/>
           </a:p>
@@ -9751,13 +9443,13 @@
       </p:sp>
       <p:sp>
         <p:nvSpPr>
-          <p:cNvPr id="16" name="Shape 11"/>
-          <p:cNvSpPr/>
-          <p:nvPr/>
-        </p:nvSpPr>
-        <p:spPr>
-          <a:xfrm>
-            <a:off x="640080" y="3511296"/>
+          <p:cNvPr id="8" name="Shape 5"/>
+          <p:cNvSpPr/>
+          <p:nvPr/>
+        </p:nvSpPr>
+        <p:spPr>
+          <a:xfrm>
+            <a:off x="640080" y="2084832"/>
             <a:ext cx="6492240" cy="621792"/>
           </a:xfrm>
           <a:prstGeom prst="roundRect">
@@ -9770,16 +9462,23 @@
           </a:solidFill>
           <a:ln/>
         </p:spPr>
-      </p:sp>
-      <p:sp>
-        <p:nvSpPr>
-          <p:cNvPr id="17" name="Text 12"/>
-          <p:cNvSpPr/>
-          <p:nvPr/>
-        </p:nvSpPr>
-        <p:spPr>
-          <a:xfrm>
-            <a:off x="822960" y="3566160"/>
+        <p:txBody>
+          <a:bodyPr/>
+          <a:lstStyle/>
+          <a:p>
+            <a:endParaRPr lang="zh-CN" altLang="en-US"/>
+          </a:p>
+        </p:txBody>
+      </p:sp>
+      <p:sp>
+        <p:nvSpPr>
+          <p:cNvPr id="9" name="Text 6"/>
+          <p:cNvSpPr/>
+          <p:nvPr/>
+        </p:nvSpPr>
+        <p:spPr>
+          <a:xfrm>
+            <a:off x="822960" y="2139696"/>
             <a:ext cx="2834640" cy="512064"/>
           </a:xfrm>
           <a:prstGeom prst="rect">
@@ -9792,7 +9491,7 @@
           <a:bodyPr wrap="square" rtlCol="0" anchor="ctr"/>
           <a:lstStyle/>
           <a:p>
-            <a:pPr indent="0" marL="0">
+            <a:pPr marL="0" indent="0">
               <a:lnSpc>
                 <a:spcPct val="105000"/>
               </a:lnSpc>
@@ -9807,7 +9506,7 @@
                 <a:ea typeface="Calibri" pitchFamily="34" charset="-122"/>
                 <a:cs typeface="Calibri" pitchFamily="34" charset="-120"/>
               </a:rPr>
-              <a:t>Relevant parties unclear</a:t>
+              <a:t>Checking status repeatedly</a:t>
             </a:r>
             <a:endParaRPr lang="en-US" sz="1050" dirty="0"/>
           </a:p>
@@ -9815,21 +9514,21 @@
       </p:sp>
       <p:pic>
         <p:nvPicPr>
-          <p:cNvPr id="18" name="Image 3" descr="/Users/devonma/Desktop/9106/Assignment/A2b/build/icons/trend.png">    </p:cNvPr>
+          <p:cNvPr id="10" name="Image 1" descr="/Users/devonma/Desktop/9106/Assignment/A2b/build/icons/trend.png"/>
           <p:cNvPicPr>
             <a:picLocks noChangeAspect="1"/>
           </p:cNvPicPr>
           <p:nvPr/>
         </p:nvPicPr>
         <p:blipFill>
-          <a:blip r:embed="rId4"/>
+          <a:blip r:embed="rId3"/>
           <a:stretch>
             <a:fillRect/>
           </a:stretch>
         </p:blipFill>
         <p:spPr>
           <a:xfrm>
-            <a:off x="3703320" y="3703320"/>
+            <a:off x="3703320" y="2276856"/>
             <a:ext cx="237744" cy="237744"/>
           </a:xfrm>
           <a:prstGeom prst="rect">
@@ -9839,13 +9538,13 @@
       </p:pic>
       <p:sp>
         <p:nvSpPr>
-          <p:cNvPr id="19" name="Text 13"/>
-          <p:cNvSpPr/>
-          <p:nvPr/>
-        </p:nvSpPr>
-        <p:spPr>
-          <a:xfrm>
-            <a:off x="4069080" y="3566160"/>
+          <p:cNvPr id="11" name="Text 7"/>
+          <p:cNvSpPr/>
+          <p:nvPr/>
+        </p:nvSpPr>
+        <p:spPr>
+          <a:xfrm>
+            <a:off x="4069080" y="2139696"/>
             <a:ext cx="2971800" cy="512064"/>
           </a:xfrm>
           <a:prstGeom prst="rect">
@@ -9858,7 +9557,7 @@
           <a:bodyPr wrap="square" rtlCol="0" anchor="ctr"/>
           <a:lstStyle/>
           <a:p>
-            <a:pPr indent="0" marL="0">
+            <a:pPr marL="0" indent="0">
               <a:lnSpc>
                 <a:spcPct val="105000"/>
               </a:lnSpc>
@@ -9873,7 +9572,7 @@
                 <a:ea typeface="Calibri" pitchFamily="34" charset="-122"/>
                 <a:cs typeface="Calibri" pitchFamily="34" charset="-120"/>
               </a:rPr>
-              <a:t>Both show the current responsible party</a:t>
+              <a:t>Board removes the need to ask — status is ambient</a:t>
             </a:r>
             <a:endParaRPr lang="en-US" sz="1050" dirty="0"/>
           </a:p>
@@ -9881,13 +9580,13 @@
       </p:sp>
       <p:sp>
         <p:nvSpPr>
-          <p:cNvPr id="20" name="Shape 14"/>
-          <p:cNvSpPr/>
-          <p:nvPr/>
-        </p:nvSpPr>
-        <p:spPr>
-          <a:xfrm>
-            <a:off x="640080" y="4224528"/>
+          <p:cNvPr id="12" name="Shape 8"/>
+          <p:cNvSpPr/>
+          <p:nvPr/>
+        </p:nvSpPr>
+        <p:spPr>
+          <a:xfrm>
+            <a:off x="640080" y="2798064"/>
             <a:ext cx="6492240" cy="621792"/>
           </a:xfrm>
           <a:prstGeom prst="roundRect">
@@ -9900,16 +9599,23 @@
           </a:solidFill>
           <a:ln/>
         </p:spPr>
-      </p:sp>
-      <p:sp>
-        <p:nvSpPr>
-          <p:cNvPr id="21" name="Text 15"/>
-          <p:cNvSpPr/>
-          <p:nvPr/>
-        </p:nvSpPr>
-        <p:spPr>
-          <a:xfrm>
-            <a:off x="822960" y="4279392"/>
+        <p:txBody>
+          <a:bodyPr/>
+          <a:lstStyle/>
+          <a:p>
+            <a:endParaRPr lang="zh-CN" altLang="en-US"/>
+          </a:p>
+        </p:txBody>
+      </p:sp>
+      <p:sp>
+        <p:nvSpPr>
+          <p:cNvPr id="13" name="Text 9"/>
+          <p:cNvSpPr/>
+          <p:nvPr/>
+        </p:nvSpPr>
+        <p:spPr>
+          <a:xfrm>
+            <a:off x="822960" y="2852928"/>
             <a:ext cx="2834640" cy="512064"/>
           </a:xfrm>
           <a:prstGeom prst="rect">
@@ -9922,7 +9628,7 @@
           <a:bodyPr wrap="square" rtlCol="0" anchor="ctr"/>
           <a:lstStyle/>
           <a:p>
-            <a:pPr indent="0" marL="0">
+            <a:pPr marL="0" indent="0">
               <a:lnSpc>
                 <a:spcPct val="105000"/>
               </a:lnSpc>
@@ -9937,7 +9643,7 @@
                 <a:ea typeface="Calibri" pitchFamily="34" charset="-122"/>
                 <a:cs typeface="Calibri" pitchFamily="34" charset="-120"/>
               </a:rPr>
-              <a:t>Longer than expected</a:t>
+              <a:t>Reply not useful / no reply</a:t>
             </a:r>
             <a:endParaRPr lang="en-US" sz="1050" dirty="0"/>
           </a:p>
@@ -9945,21 +9651,21 @@
       </p:sp>
       <p:pic>
         <p:nvPicPr>
-          <p:cNvPr id="22" name="Image 4" descr="/Users/devonma/Desktop/9106/Assignment/A2b/build/icons/trend.png">    </p:cNvPr>
+          <p:cNvPr id="14" name="Image 2" descr="/Users/devonma/Desktop/9106/Assignment/A2b/build/icons/trend.png"/>
           <p:cNvPicPr>
             <a:picLocks noChangeAspect="1"/>
           </p:cNvPicPr>
           <p:nvPr/>
         </p:nvPicPr>
         <p:blipFill>
-          <a:blip r:embed="rId5"/>
+          <a:blip r:embed="rId3"/>
           <a:stretch>
             <a:fillRect/>
           </a:stretch>
         </p:blipFill>
         <p:spPr>
           <a:xfrm>
-            <a:off x="3703320" y="4416552"/>
+            <a:off x="3703320" y="2990088"/>
             <a:ext cx="237744" cy="237744"/>
           </a:xfrm>
           <a:prstGeom prst="rect">
@@ -9969,13 +9675,13 @@
       </p:pic>
       <p:sp>
         <p:nvSpPr>
-          <p:cNvPr id="23" name="Text 16"/>
-          <p:cNvSpPr/>
-          <p:nvPr/>
-        </p:nvSpPr>
-        <p:spPr>
-          <a:xfrm>
-            <a:off x="4069080" y="4279392"/>
+          <p:cNvPr id="15" name="Text 10"/>
+          <p:cNvSpPr/>
+          <p:nvPr/>
+        </p:nvSpPr>
+        <p:spPr>
+          <a:xfrm>
+            <a:off x="4069080" y="2852928"/>
             <a:ext cx="2971800" cy="512064"/>
           </a:xfrm>
           <a:prstGeom prst="rect">
@@ -9988,7 +9694,7 @@
           <a:bodyPr wrap="square" rtlCol="0" anchor="ctr"/>
           <a:lstStyle/>
           <a:p>
-            <a:pPr indent="0" marL="0">
+            <a:pPr marL="0" indent="0">
               <a:lnSpc>
                 <a:spcPct val="105000"/>
               </a:lnSpc>
@@ -10003,7 +9709,7 @@
                 <a:ea typeface="Calibri" pitchFamily="34" charset="-122"/>
                 <a:cs typeface="Calibri" pitchFamily="34" charset="-120"/>
               </a:rPr>
-              <a:t>Stage ranges replace silence — an “explained” wait</a:t>
+              <a:t>Receipt Card guarantees a defined next update</a:t>
             </a:r>
             <a:endParaRPr lang="en-US" sz="1050" dirty="0"/>
           </a:p>
@@ -10011,13 +9717,13 @@
       </p:sp>
       <p:sp>
         <p:nvSpPr>
-          <p:cNvPr id="24" name="Shape 17"/>
-          <p:cNvSpPr/>
-          <p:nvPr/>
-        </p:nvSpPr>
-        <p:spPr>
-          <a:xfrm>
-            <a:off x="640080" y="4937760"/>
+          <p:cNvPr id="16" name="Shape 11"/>
+          <p:cNvSpPr/>
+          <p:nvPr/>
+        </p:nvSpPr>
+        <p:spPr>
+          <a:xfrm>
+            <a:off x="640080" y="3511296"/>
             <a:ext cx="6492240" cy="621792"/>
           </a:xfrm>
           <a:prstGeom prst="roundRect">
@@ -10030,16 +9736,23 @@
           </a:solidFill>
           <a:ln/>
         </p:spPr>
-      </p:sp>
-      <p:sp>
-        <p:nvSpPr>
-          <p:cNvPr id="25" name="Text 18"/>
-          <p:cNvSpPr/>
-          <p:nvPr/>
-        </p:nvSpPr>
-        <p:spPr>
-          <a:xfrm>
-            <a:off x="822960" y="4992624"/>
+        <p:txBody>
+          <a:bodyPr/>
+          <a:lstStyle/>
+          <a:p>
+            <a:endParaRPr lang="zh-CN" altLang="en-US"/>
+          </a:p>
+        </p:txBody>
+      </p:sp>
+      <p:sp>
+        <p:nvSpPr>
+          <p:cNvPr id="17" name="Text 12"/>
+          <p:cNvSpPr/>
+          <p:nvPr/>
+        </p:nvSpPr>
+        <p:spPr>
+          <a:xfrm>
+            <a:off x="822960" y="3566160"/>
             <a:ext cx="2834640" cy="512064"/>
           </a:xfrm>
           <a:prstGeom prst="rect">
@@ -10052,7 +9765,7 @@
           <a:bodyPr wrap="square" rtlCol="0" anchor="ctr"/>
           <a:lstStyle/>
           <a:p>
-            <a:pPr indent="0" marL="0">
+            <a:pPr marL="0" indent="0">
               <a:lnSpc>
                 <a:spcPct val="105000"/>
               </a:lnSpc>
@@ -10067,7 +9780,7 @@
                 <a:ea typeface="Calibri" pitchFamily="34" charset="-122"/>
                 <a:cs typeface="Calibri" pitchFamily="34" charset="-120"/>
               </a:rPr>
-              <a:t>Disrupts other life plans</a:t>
+              <a:t>Relevant parties unclear</a:t>
             </a:r>
             <a:endParaRPr lang="en-US" sz="1050" dirty="0"/>
           </a:p>
@@ -10075,20 +9788,294 @@
       </p:sp>
       <p:pic>
         <p:nvPicPr>
-          <p:cNvPr id="26" name="Image 5" descr="/Users/devonma/Desktop/9106/Assignment/A2b/build/icons/trend.png">    </p:cNvPr>
+          <p:cNvPr id="18" name="Image 3" descr="/Users/devonma/Desktop/9106/Assignment/A2b/build/icons/trend.png"/>
           <p:cNvPicPr>
             <a:picLocks noChangeAspect="1"/>
           </p:cNvPicPr>
           <p:nvPr/>
         </p:nvPicPr>
         <p:blipFill>
-          <a:blip r:embed="rId6"/>
+          <a:blip r:embed="rId3"/>
           <a:stretch>
             <a:fillRect/>
           </a:stretch>
         </p:blipFill>
         <p:spPr>
           <a:xfrm>
+            <a:off x="3703320" y="3703320"/>
+            <a:ext cx="237744" cy="237744"/>
+          </a:xfrm>
+          <a:prstGeom prst="rect">
+            <a:avLst/>
+          </a:prstGeom>
+        </p:spPr>
+      </p:pic>
+      <p:sp>
+        <p:nvSpPr>
+          <p:cNvPr id="19" name="Text 13"/>
+          <p:cNvSpPr/>
+          <p:nvPr/>
+        </p:nvSpPr>
+        <p:spPr>
+          <a:xfrm>
+            <a:off x="4069080" y="3566160"/>
+            <a:ext cx="2971800" cy="512064"/>
+          </a:xfrm>
+          <a:prstGeom prst="rect">
+            <a:avLst/>
+          </a:prstGeom>
+          <a:noFill/>
+          <a:ln/>
+        </p:spPr>
+        <p:txBody>
+          <a:bodyPr wrap="square" rtlCol="0" anchor="ctr"/>
+          <a:lstStyle/>
+          <a:p>
+            <a:pPr marL="0" indent="0">
+              <a:lnSpc>
+                <a:spcPct val="105000"/>
+              </a:lnSpc>
+              <a:buNone/>
+            </a:pPr>
+            <a:r>
+              <a:rPr lang="en-US" sz="1050" b="1" dirty="0">
+                <a:solidFill>
+                  <a:srgbClr val="1C2541"/>
+                </a:solidFill>
+                <a:latin typeface="Calibri" pitchFamily="34" charset="0"/>
+                <a:ea typeface="Calibri" pitchFamily="34" charset="-122"/>
+                <a:cs typeface="Calibri" pitchFamily="34" charset="-120"/>
+              </a:rPr>
+              <a:t>Both show the current responsible party</a:t>
+            </a:r>
+            <a:endParaRPr lang="en-US" sz="1050" dirty="0"/>
+          </a:p>
+        </p:txBody>
+      </p:sp>
+      <p:sp>
+        <p:nvSpPr>
+          <p:cNvPr id="20" name="Shape 14"/>
+          <p:cNvSpPr/>
+          <p:nvPr/>
+        </p:nvSpPr>
+        <p:spPr>
+          <a:xfrm>
+            <a:off x="640080" y="4224528"/>
+            <a:ext cx="6492240" cy="621792"/>
+          </a:xfrm>
+          <a:prstGeom prst="roundRect">
+            <a:avLst>
+              <a:gd name="adj" fmla="val 7353"/>
+            </a:avLst>
+          </a:prstGeom>
+          <a:solidFill>
+            <a:srgbClr val="F4F5F7"/>
+          </a:solidFill>
+          <a:ln/>
+        </p:spPr>
+        <p:txBody>
+          <a:bodyPr/>
+          <a:lstStyle/>
+          <a:p>
+            <a:endParaRPr lang="zh-CN" altLang="en-US"/>
+          </a:p>
+        </p:txBody>
+      </p:sp>
+      <p:sp>
+        <p:nvSpPr>
+          <p:cNvPr id="21" name="Text 15"/>
+          <p:cNvSpPr/>
+          <p:nvPr/>
+        </p:nvSpPr>
+        <p:spPr>
+          <a:xfrm>
+            <a:off x="822960" y="4279392"/>
+            <a:ext cx="2834640" cy="512064"/>
+          </a:xfrm>
+          <a:prstGeom prst="rect">
+            <a:avLst/>
+          </a:prstGeom>
+          <a:noFill/>
+          <a:ln/>
+        </p:spPr>
+        <p:txBody>
+          <a:bodyPr wrap="square" rtlCol="0" anchor="ctr"/>
+          <a:lstStyle/>
+          <a:p>
+            <a:pPr marL="0" indent="0">
+              <a:lnSpc>
+                <a:spcPct val="105000"/>
+              </a:lnSpc>
+              <a:buNone/>
+            </a:pPr>
+            <a:r>
+              <a:rPr lang="en-US" sz="1050" dirty="0">
+                <a:solidFill>
+                  <a:srgbClr val="222831"/>
+                </a:solidFill>
+                <a:latin typeface="Calibri" pitchFamily="34" charset="0"/>
+                <a:ea typeface="Calibri" pitchFamily="34" charset="-122"/>
+                <a:cs typeface="Calibri" pitchFamily="34" charset="-120"/>
+              </a:rPr>
+              <a:t>Longer than expected</a:t>
+            </a:r>
+            <a:endParaRPr lang="en-US" sz="1050" dirty="0"/>
+          </a:p>
+        </p:txBody>
+      </p:sp>
+      <p:pic>
+        <p:nvPicPr>
+          <p:cNvPr id="22" name="Image 4" descr="/Users/devonma/Desktop/9106/Assignment/A2b/build/icons/trend.png"/>
+          <p:cNvPicPr>
+            <a:picLocks noChangeAspect="1"/>
+          </p:cNvPicPr>
+          <p:nvPr/>
+        </p:nvPicPr>
+        <p:blipFill>
+          <a:blip r:embed="rId3"/>
+          <a:stretch>
+            <a:fillRect/>
+          </a:stretch>
+        </p:blipFill>
+        <p:spPr>
+          <a:xfrm>
+            <a:off x="3703320" y="4416552"/>
+            <a:ext cx="237744" cy="237744"/>
+          </a:xfrm>
+          <a:prstGeom prst="rect">
+            <a:avLst/>
+          </a:prstGeom>
+        </p:spPr>
+      </p:pic>
+      <p:sp>
+        <p:nvSpPr>
+          <p:cNvPr id="23" name="Text 16"/>
+          <p:cNvSpPr/>
+          <p:nvPr/>
+        </p:nvSpPr>
+        <p:spPr>
+          <a:xfrm>
+            <a:off x="4069080" y="4279392"/>
+            <a:ext cx="2971800" cy="512064"/>
+          </a:xfrm>
+          <a:prstGeom prst="rect">
+            <a:avLst/>
+          </a:prstGeom>
+          <a:noFill/>
+          <a:ln/>
+        </p:spPr>
+        <p:txBody>
+          <a:bodyPr wrap="square" rtlCol="0" anchor="ctr"/>
+          <a:lstStyle/>
+          <a:p>
+            <a:pPr marL="0" indent="0">
+              <a:lnSpc>
+                <a:spcPct val="105000"/>
+              </a:lnSpc>
+              <a:buNone/>
+            </a:pPr>
+            <a:r>
+              <a:rPr lang="en-US" sz="1050" b="1" dirty="0">
+                <a:solidFill>
+                  <a:srgbClr val="1C2541"/>
+                </a:solidFill>
+                <a:latin typeface="Calibri" pitchFamily="34" charset="0"/>
+                <a:ea typeface="Calibri" pitchFamily="34" charset="-122"/>
+                <a:cs typeface="Calibri" pitchFamily="34" charset="-120"/>
+              </a:rPr>
+              <a:t>Stage ranges replace silence — an “explained” wait</a:t>
+            </a:r>
+            <a:endParaRPr lang="en-US" sz="1050" dirty="0"/>
+          </a:p>
+        </p:txBody>
+      </p:sp>
+      <p:sp>
+        <p:nvSpPr>
+          <p:cNvPr id="24" name="Shape 17"/>
+          <p:cNvSpPr/>
+          <p:nvPr/>
+        </p:nvSpPr>
+        <p:spPr>
+          <a:xfrm>
+            <a:off x="640080" y="4937760"/>
+            <a:ext cx="6492240" cy="621792"/>
+          </a:xfrm>
+          <a:prstGeom prst="roundRect">
+            <a:avLst>
+              <a:gd name="adj" fmla="val 7353"/>
+            </a:avLst>
+          </a:prstGeom>
+          <a:solidFill>
+            <a:srgbClr val="F4F5F7"/>
+          </a:solidFill>
+          <a:ln/>
+        </p:spPr>
+        <p:txBody>
+          <a:bodyPr/>
+          <a:lstStyle/>
+          <a:p>
+            <a:endParaRPr lang="zh-CN" altLang="en-US"/>
+          </a:p>
+        </p:txBody>
+      </p:sp>
+      <p:sp>
+        <p:nvSpPr>
+          <p:cNvPr id="25" name="Text 18"/>
+          <p:cNvSpPr/>
+          <p:nvPr/>
+        </p:nvSpPr>
+        <p:spPr>
+          <a:xfrm>
+            <a:off x="822960" y="4992624"/>
+            <a:ext cx="2834640" cy="512064"/>
+          </a:xfrm>
+          <a:prstGeom prst="rect">
+            <a:avLst/>
+          </a:prstGeom>
+          <a:noFill/>
+          <a:ln/>
+        </p:spPr>
+        <p:txBody>
+          <a:bodyPr wrap="square" rtlCol="0" anchor="ctr"/>
+          <a:lstStyle/>
+          <a:p>
+            <a:pPr marL="0" indent="0">
+              <a:lnSpc>
+                <a:spcPct val="105000"/>
+              </a:lnSpc>
+              <a:buNone/>
+            </a:pPr>
+            <a:r>
+              <a:rPr lang="en-US" sz="1050" dirty="0">
+                <a:solidFill>
+                  <a:srgbClr val="222831"/>
+                </a:solidFill>
+                <a:latin typeface="Calibri" pitchFamily="34" charset="0"/>
+                <a:ea typeface="Calibri" pitchFamily="34" charset="-122"/>
+                <a:cs typeface="Calibri" pitchFamily="34" charset="-120"/>
+              </a:rPr>
+              <a:t>Disrupts other life plans</a:t>
+            </a:r>
+            <a:endParaRPr lang="en-US" sz="1050" dirty="0"/>
+          </a:p>
+        </p:txBody>
+      </p:sp>
+      <p:pic>
+        <p:nvPicPr>
+          <p:cNvPr id="26" name="Image 5" descr="/Users/devonma/Desktop/9106/Assignment/A2b/build/icons/trend.png"/>
+          <p:cNvPicPr>
+            <a:picLocks noChangeAspect="1"/>
+          </p:cNvPicPr>
+          <p:nvPr/>
+        </p:nvPicPr>
+        <p:blipFill>
+          <a:blip r:embed="rId3"/>
+          <a:stretch>
+            <a:fillRect/>
+          </a:stretch>
+        </p:blipFill>
+        <p:spPr>
+          <a:xfrm>
             <a:off x="3703320" y="5129784"/>
             <a:ext cx="237744" cy="237744"/>
           </a:xfrm>
@@ -10118,7 +10105,7 @@
           <a:bodyPr wrap="square" rtlCol="0" anchor="ctr"/>
           <a:lstStyle/>
           <a:p>
-            <a:pPr indent="0" marL="0">
+            <a:pPr marL="0" indent="0">
               <a:lnSpc>
                 <a:spcPct val="105000"/>
               </a:lnSpc>
@@ -10160,6 +10147,13 @@
           </a:solidFill>
           <a:ln/>
         </p:spPr>
+        <p:txBody>
+          <a:bodyPr/>
+          <a:lstStyle/>
+          <a:p>
+            <a:endParaRPr lang="zh-CN" altLang="en-US"/>
+          </a:p>
+        </p:txBody>
       </p:sp>
       <p:sp>
         <p:nvSpPr>
@@ -10182,11 +10176,11 @@
           <a:bodyPr wrap="square" rtlCol="0" anchor="ctr"/>
           <a:lstStyle/>
           <a:p>
-            <a:pPr indent="0" marL="0">
-              <a:buNone/>
-            </a:pPr>
-            <a:r>
-              <a:rPr lang="en-US" sz="1050" b="1" spc="100" kern="0" dirty="0">
+            <a:pPr marL="0" indent="0">
+              <a:buNone/>
+            </a:pPr>
+            <a:r>
+              <a:rPr lang="en-US" sz="1050" b="1" kern="0" spc="100" dirty="0">
                 <a:solidFill>
                   <a:srgbClr val="D9782D"/>
                 </a:solidFill>
@@ -10219,6 +10213,13 @@
           </a:solidFill>
           <a:ln/>
         </p:spPr>
+        <p:txBody>
+          <a:bodyPr/>
+          <a:lstStyle/>
+          <a:p>
+            <a:endParaRPr lang="zh-CN" altLang="en-US"/>
+          </a:p>
+        </p:txBody>
       </p:sp>
       <p:sp>
         <p:nvSpPr>
@@ -10241,7 +10242,7 @@
           <a:bodyPr wrap="square" rtlCol="0" anchor="ctr"/>
           <a:lstStyle/>
           <a:p>
-            <a:pPr algn="ctr" indent="0" marL="0">
+            <a:pPr marL="0" indent="0" algn="ctr">
               <a:buNone/>
             </a:pPr>
             <a:r>
@@ -10280,7 +10281,7 @@
           <a:bodyPr wrap="square" rtlCol="0" anchor="ctr"/>
           <a:lstStyle/>
           <a:p>
-            <a:pPr indent="0" marL="0">
+            <a:pPr marL="0" indent="0">
               <a:lnSpc>
                 <a:spcPct val="115000"/>
               </a:lnSpc>
@@ -10320,6 +10321,13 @@
           </a:solidFill>
           <a:ln/>
         </p:spPr>
+        <p:txBody>
+          <a:bodyPr/>
+          <a:lstStyle/>
+          <a:p>
+            <a:endParaRPr lang="zh-CN" altLang="en-US"/>
+          </a:p>
+        </p:txBody>
       </p:sp>
       <p:sp>
         <p:nvSpPr>
@@ -10342,7 +10350,7 @@
           <a:bodyPr wrap="square" rtlCol="0" anchor="ctr"/>
           <a:lstStyle/>
           <a:p>
-            <a:pPr algn="ctr" indent="0" marL="0">
+            <a:pPr marL="0" indent="0" algn="ctr">
               <a:buNone/>
             </a:pPr>
             <a:r>
@@ -10381,7 +10389,7 @@
           <a:bodyPr wrap="square" rtlCol="0" anchor="ctr"/>
           <a:lstStyle/>
           <a:p>
-            <a:pPr indent="0" marL="0">
+            <a:pPr marL="0" indent="0">
               <a:lnSpc>
                 <a:spcPct val="115000"/>
               </a:lnSpc>
@@ -10421,6 +10429,13 @@
           </a:solidFill>
           <a:ln/>
         </p:spPr>
+        <p:txBody>
+          <a:bodyPr/>
+          <a:lstStyle/>
+          <a:p>
+            <a:endParaRPr lang="zh-CN" altLang="en-US"/>
+          </a:p>
+        </p:txBody>
       </p:sp>
       <p:sp>
         <p:nvSpPr>
@@ -10443,7 +10458,7 @@
           <a:bodyPr wrap="square" rtlCol="0" anchor="ctr"/>
           <a:lstStyle/>
           <a:p>
-            <a:pPr algn="ctr" indent="0" marL="0">
+            <a:pPr marL="0" indent="0" algn="ctr">
               <a:buNone/>
             </a:pPr>
             <a:r>
@@ -10482,7 +10497,7 @@
           <a:bodyPr wrap="square" rtlCol="0" anchor="ctr"/>
           <a:lstStyle/>
           <a:p>
-            <a:pPr indent="0" marL="0">
+            <a:pPr marL="0" indent="0">
               <a:lnSpc>
                 <a:spcPct val="115000"/>
               </a:lnSpc>
@@ -10522,6 +10537,13 @@
           </a:solidFill>
           <a:ln/>
         </p:spPr>
+        <p:txBody>
+          <a:bodyPr/>
+          <a:lstStyle/>
+          <a:p>
+            <a:endParaRPr lang="zh-CN" altLang="en-US"/>
+          </a:p>
+        </p:txBody>
       </p:sp>
       <p:sp>
         <p:nvSpPr>
@@ -10544,7 +10566,7 @@
           <a:bodyPr wrap="square" rtlCol="0" anchor="ctr"/>
           <a:lstStyle/>
           <a:p>
-            <a:pPr algn="ctr" indent="0" marL="0">
+            <a:pPr marL="0" indent="0" algn="ctr">
               <a:buNone/>
             </a:pPr>
             <a:r>
@@ -10583,7 +10605,7 @@
           <a:bodyPr wrap="square" rtlCol="0" anchor="ctr"/>
           <a:lstStyle/>
           <a:p>
-            <a:pPr indent="0" marL="0">
+            <a:pPr marL="0" indent="0">
               <a:lnSpc>
                 <a:spcPct val="115000"/>
               </a:lnSpc>
@@ -10625,7 +10647,7 @@
           <a:bodyPr wrap="square" rtlCol="0" anchor="ctr"/>
           <a:lstStyle/>
           <a:p>
-            <a:pPr algn="l" indent="0" marL="0">
+            <a:pPr marL="0" indent="0" algn="l">
               <a:buNone/>
             </a:pPr>
             <a:r>
@@ -10664,7 +10686,7 @@
           <a:bodyPr wrap="square" rtlCol="0" anchor="ctr"/>
           <a:lstStyle/>
           <a:p>
-            <a:pPr algn="r" indent="0" marL="0">
+            <a:pPr marL="0" indent="0" algn="r">
               <a:buNone/>
             </a:pPr>
             <a:r>
@@ -10983,4 +11005,319 @@
     </a:ext>
   </a:extLst>
 </a:theme>
+</file>
+
+<file path=ppt/theme/theme2.xml><?xml version="1.0" encoding="utf-8"?>
+<a:theme xmlns:a="http://schemas.openxmlformats.org/drawingml/2006/main" name="Office 主题​​">
+  <a:themeElements>
+    <a:clrScheme name="Office">
+      <a:dk1>
+        <a:sysClr val="windowText" lastClr="000000"/>
+      </a:dk1>
+      <a:lt1>
+        <a:sysClr val="window" lastClr="FFFFFF"/>
+      </a:lt1>
+      <a:dk2>
+        <a:srgbClr val="0E2841"/>
+      </a:dk2>
+      <a:lt2>
+        <a:srgbClr val="E8E8E8"/>
+      </a:lt2>
+      <a:accent1>
+        <a:srgbClr val="156082"/>
+      </a:accent1>
+      <a:accent2>
+        <a:srgbClr val="E97132"/>
+      </a:accent2>
+      <a:accent3>
+        <a:srgbClr val="196B24"/>
+      </a:accent3>
+      <a:accent4>
+        <a:srgbClr val="0F9ED5"/>
+      </a:accent4>
+      <a:accent5>
+        <a:srgbClr val="A02B93"/>
+      </a:accent5>
+      <a:accent6>
+        <a:srgbClr val="4EA72E"/>
+      </a:accent6>
+      <a:hlink>
+        <a:srgbClr val="467886"/>
+      </a:hlink>
+      <a:folHlink>
+        <a:srgbClr val="96607D"/>
+      </a:folHlink>
+    </a:clrScheme>
+    <a:fontScheme name="Office">
+      <a:majorFont>
+        <a:latin typeface="等线 Light" panose="02110004020202020204"/>
+        <a:ea typeface=""/>
+        <a:cs typeface=""/>
+        <a:font script="Jpan" typeface="游ゴシック Light"/>
+        <a:font script="Hang" typeface="맑은 고딕"/>
+        <a:font script="Hans" typeface="等线 Light"/>
+        <a:font script="Hant" typeface="新細明體"/>
+        <a:font script="Arab" typeface="Times New Roman"/>
+        <a:font script="Hebr" typeface="Times New Roman"/>
+        <a:font script="Thai" typeface="Angsana New"/>
+        <a:font script="Ethi" typeface="Nyala"/>
+        <a:font script="Beng" typeface="Vrinda"/>
+        <a:font script="Gujr" typeface="Shruti"/>
+        <a:font script="Khmr" typeface="MoolBoran"/>
+        <a:font script="Knda" typeface="Tunga"/>
+        <a:font script="Guru" typeface="Raavi"/>
+        <a:font script="Cans" typeface="Euphemia"/>
+        <a:font script="Cher" typeface="Plantagenet Cherokee"/>
+        <a:font script="Yiii" typeface="Microsoft Yi Baiti"/>
+        <a:font script="Tibt" typeface="Microsoft Himalaya"/>
+        <a:font script="Thaa" typeface="MV Boli"/>
+        <a:font script="Deva" typeface="Mangal"/>
+        <a:font script="Telu" typeface="Gautami"/>
+        <a:font script="Taml" typeface="Latha"/>
+        <a:font script="Syrc" typeface="Estrangelo Edessa"/>
+        <a:font script="Orya" typeface="Kalinga"/>
+        <a:font script="Mlym" typeface="Kartika"/>
+        <a:font script="Laoo" typeface="DokChampa"/>
+        <a:font script="Sinh" typeface="Iskoola Pota"/>
+        <a:font script="Mong" typeface="Mongolian Baiti"/>
+        <a:font script="Viet" typeface="Times New Roman"/>
+        <a:font script="Uigh" typeface="Microsoft Uighur"/>
+        <a:font script="Geor" typeface="Sylfaen"/>
+        <a:font script="Armn" typeface="Arial"/>
+        <a:font script="Bugi" typeface="Leelawadee UI"/>
+        <a:font script="Bopo" typeface="Microsoft JhengHei"/>
+        <a:font script="Java" typeface="Javanese Text"/>
+        <a:font script="Lisu" typeface="Segoe UI"/>
+        <a:font script="Mymr" typeface="Myanmar Text"/>
+        <a:font script="Nkoo" typeface="Ebrima"/>
+        <a:font script="Olck" typeface="Nirmala UI"/>
+        <a:font script="Osma" typeface="Ebrima"/>
+        <a:font script="Phag" typeface="Phagspa"/>
+        <a:font script="Syrn" typeface="Estrangelo Edessa"/>
+        <a:font script="Syrj" typeface="Estrangelo Edessa"/>
+        <a:font script="Syre" typeface="Estrangelo Edessa"/>
+        <a:font script="Sora" typeface="Nirmala UI"/>
+        <a:font script="Tale" typeface="Microsoft Tai Le"/>
+        <a:font script="Talu" typeface="Microsoft New Tai Lue"/>
+        <a:font script="Tfng" typeface="Ebrima"/>
+      </a:majorFont>
+      <a:minorFont>
+        <a:latin typeface="等线" panose="02110004020202020204"/>
+        <a:ea typeface=""/>
+        <a:cs typeface=""/>
+        <a:font script="Jpan" typeface="游ゴシック"/>
+        <a:font script="Hang" typeface="맑은 고딕"/>
+        <a:font script="Hans" typeface="等线"/>
+        <a:font script="Hant" typeface="新細明體"/>
+        <a:font script="Arab" typeface="Arial"/>
+        <a:font script="Hebr" typeface="Arial"/>
+        <a:font script="Thai" typeface="Cordia New"/>
+        <a:font script="Ethi" typeface="Nyala"/>
+        <a:font script="Beng" typeface="Vrinda"/>
+        <a:font script="Gujr" typeface="Shruti"/>
+        <a:font script="Khmr" typeface="DaunPenh"/>
+        <a:font script="Knda" typeface="Tunga"/>
+        <a:font script="Guru" typeface="Raavi"/>
+        <a:font script="Cans" typeface="Euphemia"/>
+        <a:font script="Cher" typeface="Plantagenet Cherokee"/>
+        <a:font script="Yiii" typeface="Microsoft Yi Baiti"/>
+        <a:font script="Tibt" typeface="Microsoft Himalaya"/>
+        <a:font script="Thaa" typeface="MV Boli"/>
+        <a:font script="Deva" typeface="Mangal"/>
+        <a:font script="Telu" typeface="Gautami"/>
+        <a:font script="Taml" typeface="Latha"/>
+        <a:font script="Syrc" typeface="Estrangelo Edessa"/>
+        <a:font script="Orya" typeface="Kalinga"/>
+        <a:font script="Mlym" typeface="Kartika"/>
+        <a:font script="Laoo" typeface="DokChampa"/>
+        <a:font script="Sinh" typeface="Iskoola Pota"/>
+        <a:font script="Mong" typeface="Mongolian Baiti"/>
+        <a:font script="Viet" typeface="Arial"/>
+        <a:font script="Uigh" typeface="Microsoft Uighur"/>
+        <a:font script="Geor" typeface="Sylfaen"/>
+        <a:font script="Armn" typeface="Arial"/>
+        <a:font script="Bugi" typeface="Leelawadee UI"/>
+        <a:font script="Bopo" typeface="Microsoft JhengHei"/>
+        <a:font script="Java" typeface="Javanese Text"/>
+        <a:font script="Lisu" typeface="Segoe UI"/>
+        <a:font script="Mymr" typeface="Myanmar Text"/>
+        <a:font script="Nkoo" typeface="Ebrima"/>
+        <a:font script="Olck" typeface="Nirmala UI"/>
+        <a:font script="Osma" typeface="Ebrima"/>
+        <a:font script="Phag" typeface="Phagspa"/>
+        <a:font script="Syrn" typeface="Estrangelo Edessa"/>
+        <a:font script="Syrj" typeface="Estrangelo Edessa"/>
+        <a:font script="Syre" typeface="Estrangelo Edessa"/>
+        <a:font script="Sora" typeface="Nirmala UI"/>
+        <a:font script="Tale" typeface="Microsoft Tai Le"/>
+        <a:font script="Talu" typeface="Microsoft New Tai Lue"/>
+        <a:font script="Tfng" typeface="Ebrima"/>
+      </a:minorFont>
+    </a:fontScheme>
+    <a:fmtScheme name="Office">
+      <a:fillStyleLst>
+        <a:solidFill>
+          <a:schemeClr val="phClr"/>
+        </a:solidFill>
+        <a:gradFill rotWithShape="1">
+          <a:gsLst>
+            <a:gs pos="0">
+              <a:schemeClr val="phClr">
+                <a:lumMod val="110000"/>
+                <a:satMod val="105000"/>
+                <a:tint val="67000"/>
+              </a:schemeClr>
+            </a:gs>
+            <a:gs pos="50000">
+              <a:schemeClr val="phClr">
+                <a:lumMod val="105000"/>
+                <a:satMod val="103000"/>
+                <a:tint val="73000"/>
+              </a:schemeClr>
+            </a:gs>
+            <a:gs pos="100000">
+              <a:schemeClr val="phClr">
+                <a:lumMod val="105000"/>
+                <a:satMod val="109000"/>
+                <a:tint val="81000"/>
+              </a:schemeClr>
+            </a:gs>
+          </a:gsLst>
+          <a:lin ang="5400000" scaled="0"/>
+        </a:gradFill>
+        <a:gradFill rotWithShape="1">
+          <a:gsLst>
+            <a:gs pos="0">
+              <a:schemeClr val="phClr">
+                <a:satMod val="103000"/>
+                <a:lumMod val="102000"/>
+                <a:tint val="94000"/>
+              </a:schemeClr>
+            </a:gs>
+            <a:gs pos="50000">
+              <a:schemeClr val="phClr">
+                <a:satMod val="110000"/>
+                <a:lumMod val="100000"/>
+                <a:shade val="100000"/>
+              </a:schemeClr>
+            </a:gs>
+            <a:gs pos="100000">
+              <a:schemeClr val="phClr">
+                <a:lumMod val="99000"/>
+                <a:satMod val="120000"/>
+                <a:shade val="78000"/>
+              </a:schemeClr>
+            </a:gs>
+          </a:gsLst>
+          <a:lin ang="5400000" scaled="0"/>
+        </a:gradFill>
+      </a:fillStyleLst>
+      <a:lnStyleLst>
+        <a:ln w="12700" cap="flat" cmpd="sng" algn="ctr">
+          <a:solidFill>
+            <a:schemeClr val="phClr"/>
+          </a:solidFill>
+          <a:prstDash val="solid"/>
+          <a:miter lim="800000"/>
+        </a:ln>
+        <a:ln w="19050" cap="flat" cmpd="sng" algn="ctr">
+          <a:solidFill>
+            <a:schemeClr val="phClr"/>
+          </a:solidFill>
+          <a:prstDash val="solid"/>
+          <a:miter lim="800000"/>
+        </a:ln>
+        <a:ln w="25400" cap="flat" cmpd="sng" algn="ctr">
+          <a:solidFill>
+            <a:schemeClr val="phClr"/>
+          </a:solidFill>
+          <a:prstDash val="solid"/>
+          <a:miter lim="800000"/>
+        </a:ln>
+      </a:lnStyleLst>
+      <a:effectStyleLst>
+        <a:effectStyle>
+          <a:effectLst/>
+        </a:effectStyle>
+        <a:effectStyle>
+          <a:effectLst/>
+        </a:effectStyle>
+        <a:effectStyle>
+          <a:effectLst>
+            <a:outerShdw blurRad="57150" dist="19050" dir="5400000" algn="ctr" rotWithShape="0">
+              <a:srgbClr val="000000">
+                <a:alpha val="63000"/>
+              </a:srgbClr>
+            </a:outerShdw>
+          </a:effectLst>
+        </a:effectStyle>
+      </a:effectStyleLst>
+      <a:bgFillStyleLst>
+        <a:solidFill>
+          <a:schemeClr val="phClr"/>
+        </a:solidFill>
+        <a:solidFill>
+          <a:schemeClr val="phClr">
+            <a:tint val="95000"/>
+            <a:satMod val="170000"/>
+          </a:schemeClr>
+        </a:solidFill>
+        <a:gradFill rotWithShape="1">
+          <a:gsLst>
+            <a:gs pos="0">
+              <a:schemeClr val="phClr">
+                <a:tint val="93000"/>
+                <a:satMod val="150000"/>
+                <a:shade val="98000"/>
+                <a:lumMod val="102000"/>
+              </a:schemeClr>
+            </a:gs>
+            <a:gs pos="50000">
+              <a:schemeClr val="phClr">
+                <a:tint val="98000"/>
+                <a:satMod val="130000"/>
+                <a:shade val="90000"/>
+                <a:lumMod val="103000"/>
+              </a:schemeClr>
+            </a:gs>
+            <a:gs pos="100000">
+              <a:schemeClr val="phClr">
+                <a:shade val="63000"/>
+                <a:satMod val="120000"/>
+              </a:schemeClr>
+            </a:gs>
+          </a:gsLst>
+          <a:lin ang="5400000" scaled="0"/>
+        </a:gradFill>
+      </a:bgFillStyleLst>
+    </a:fmtScheme>
+  </a:themeElements>
+  <a:objectDefaults>
+    <a:lnDef>
+      <a:spPr/>
+      <a:bodyPr/>
+      <a:lstStyle/>
+      <a:style>
+        <a:lnRef idx="2">
+          <a:schemeClr val="accent1"/>
+        </a:lnRef>
+        <a:fillRef idx="0">
+          <a:schemeClr val="accent1"/>
+        </a:fillRef>
+        <a:effectRef idx="1">
+          <a:schemeClr val="accent1"/>
+        </a:effectRef>
+        <a:fontRef idx="minor">
+          <a:schemeClr val="tx1"/>
+        </a:fontRef>
+      </a:style>
+    </a:lnDef>
+  </a:objectDefaults>
+  <a:extraClrSchemeLst/>
+  <a:extLst>
+    <a:ext uri="{05A4C25C-085E-4340-85A3-A5531E510DB2}">
+      <thm15:themeFamily xmlns:thm15="http://schemas.microsoft.com/office/thememl/2012/main" name="Office Theme" id="{2E142A2C-CD16-42D6-873A-C26D2A0506FA}" vid="{1BDDFF52-6CD6-40A5-AB3C-68EB2F1E4D0A}"/>
+    </a:ext>
+  </a:extLst>
+</a:theme>
 </file>